--- a/static/ppts/G6_Math_T2_Add_Sub_Fractions.pptx
+++ b/static/ppts/G6_Math_T2_Add_Sub_Fractions.pptx
@@ -9,9 +9,10 @@
     <p:sldId id="257" r:id="rId3"/>
     <p:sldId id="258" r:id="rId4"/>
     <p:sldId id="259" r:id="rId5"/>
+    <p:sldId id="260" r:id="rId6"/>
   </p:sldIdLst>
   <p:notesMasterIdLst>
-    <p:notesMasterId r:id="rId6"/>
+    <p:notesMasterId r:id="rId7"/>
   </p:notesMasterIdLst>
   <p:sldSz cx="9144000" cy="5143500"/>
   <p:notesSz cx="5143500" cy="9144000"/>
@@ -811,6 +812,94 @@
 </p:notes>
 </file>
 
+<file path=ppt/notesSlides/notesSlide5.xml><?xml version="1.0" encoding="utf-8"?>
+<p:notes xmlns:a="http://schemas.openxmlformats.org/drawingml/2006/main" xmlns:r="http://schemas.openxmlformats.org/officeDocument/2006/relationships" xmlns:p="http://schemas.openxmlformats.org/presentationml/2006/main">
+  <p:cSld>
+    <p:spTree>
+      <p:nvGrpSpPr>
+        <p:cNvPr id="1" name=""/>
+        <p:cNvGrpSpPr/>
+        <p:nvPr/>
+      </p:nvGrpSpPr>
+      <p:grpSpPr>
+        <a:xfrm>
+          <a:off x="0" y="0"/>
+          <a:ext cx="0" cy="0"/>
+          <a:chOff x="0" y="0"/>
+          <a:chExt cx="0" cy="0"/>
+        </a:xfrm>
+      </p:grpSpPr>
+      <p:sp>
+        <p:nvSpPr>
+          <p:cNvPr id="2" name="Slide Image Placeholder 1"/>
+          <p:cNvSpPr>
+            <a:spLocks noGrp="1" noRot="1" noChangeAspect="1"/>
+          </p:cNvSpPr>
+          <p:nvPr>
+            <p:ph type="sldImg"/>
+          </p:nvPr>
+        </p:nvSpPr>
+        <p:spPr/>
+      </p:sp>
+      <p:sp>
+        <p:nvSpPr>
+          <p:cNvPr id="3" name="Notes Placeholder 2"/>
+          <p:cNvSpPr>
+            <a:spLocks noGrp="1"/>
+          </p:cNvSpPr>
+          <p:nvPr>
+            <p:ph type="body" idx="1"/>
+          </p:nvPr>
+        </p:nvSpPr>
+        <p:spPr/>
+        <p:txBody>
+          <a:bodyPr/>
+          <a:lstStyle/>
+          <a:p>
+            <a:r>
+              <a:rPr lang="en-US" dirty="0"/>
+              <a:t/>
+            </a:r>
+            <a:endParaRPr lang="en-US" dirty="0"/>
+          </a:p>
+        </p:txBody>
+      </p:sp>
+      <p:sp>
+        <p:nvSpPr>
+          <p:cNvPr id="4" name="Slide Number Placeholder 3"/>
+          <p:cNvSpPr>
+            <a:spLocks noGrp="1"/>
+          </p:cNvSpPr>
+          <p:nvPr>
+            <p:ph type="sldNum" sz="quarter" idx="10"/>
+          </p:nvPr>
+        </p:nvSpPr>
+        <p:spPr/>
+        <p:txBody>
+          <a:bodyPr/>
+          <a:lstStyle/>
+          <a:p>
+            <a:fld id="{F7021451-1387-4CA6-816F-3879F97B5CBC}" type="slidenum">
+              <a:rPr lang="en-US"/>
+              <a:t>5</a:t>
+            </a:fld>
+            <a:endParaRPr lang="en-US"/>
+          </a:p>
+        </p:txBody>
+      </p:sp>
+    </p:spTree>
+    <p:extLst>
+      <p:ext uri="{BB962C8B-B14F-4D97-AF65-F5344CB8AC3E}">
+        <p14:creationId xmlns:p14="http://schemas.microsoft.com/office/powerpoint/2010/main" val="1024086991"/>
+      </p:ext>
+    </p:extLst>
+  </p:cSld>
+  <p:clrMapOvr>
+    <a:masterClrMapping/>
+  </p:clrMapOvr>
+</p:notes>
+</file>
+
 <file path=ppt/slideLayouts/slideLayout1.xml><?xml version="1.0" encoding="utf-8"?>
 <p:sldLayout xmlns:a="http://schemas.openxmlformats.org/drawingml/2006/main" xmlns:r="http://schemas.openxmlformats.org/officeDocument/2006/relationships" xmlns:p="http://schemas.openxmlformats.org/presentationml/2006/main" preserve="1">
   <p:cSld name="DEFAULT">
@@ -1170,7 +1259,7 @@
         </p:nvSpPr>
         <p:spPr>
           <a:xfrm>
-            <a:off x="731520" y="1280160"/>
+            <a:off x="731520" y="1097280"/>
             <a:ext cx="7772400" cy="1371600"/>
           </a:xfrm>
           <a:prstGeom prst="rect">
@@ -1187,7 +1276,7 @@
               <a:buNone/>
             </a:pPr>
             <a:r>
-              <a:rPr lang="en-US" sz="3600" b="1" dirty="0">
+              <a:rPr lang="en-US" sz="4000" b="1" dirty="0">
                 <a:solidFill>
                   <a:srgbClr val="FFFFFF"/>
                 </a:solidFill>
@@ -1197,7 +1286,7 @@
               </a:rPr>
               <a:t>Adding &amp; Subtracting Fractions</a:t>
             </a:r>
-            <a:endParaRPr lang="en-US" sz="3600" dirty="0"/>
+            <a:endParaRPr lang="en-US" sz="4000" dirty="0"/>
           </a:p>
         </p:txBody>
       </p:sp>
@@ -1209,7 +1298,7 @@
         </p:nvSpPr>
         <p:spPr>
           <a:xfrm>
-            <a:off x="731520" y="2743200"/>
+            <a:off x="731520" y="2560320"/>
             <a:ext cx="7772400" cy="548640"/>
           </a:xfrm>
           <a:prstGeom prst="rect">
@@ -1228,13 +1317,13 @@
             <a:r>
               <a:rPr lang="en-US" sz="1600" dirty="0">
                 <a:solidFill>
-                  <a:srgbClr val="9B9690"/>
+                  <a:srgbClr val="E9C46A"/>
                 </a:solidFill>
                 <a:latin typeface="Calibri" pitchFamily="34" charset="0"/>
                 <a:ea typeface="Calibri" pitchFamily="34" charset="-122"/>
                 <a:cs typeface="Calibri" pitchFamily="34" charset="-120"/>
               </a:rPr>
-              <a:t>G6 Maths · Fractions &amp; Decimals</a:t>
+              <a:t>Grade 6 Mathematics · Mr Zocchi</a:t>
             </a:r>
             <a:endParaRPr lang="en-US" sz="1600" dirty="0"/>
           </a:p>
@@ -1242,14 +1331,36 @@
       </p:sp>
       <p:sp>
         <p:nvSpPr>
-          <p:cNvPr id="5" name="Text 3"/>
-          <p:cNvSpPr/>
-          <p:nvPr/>
-        </p:nvSpPr>
-        <p:spPr>
-          <a:xfrm>
-            <a:off x="731520" y="4389120"/>
-            <a:ext cx="7772400" cy="457200"/>
+          <p:cNvPr id="5" name="Shape 3"/>
+          <p:cNvSpPr/>
+          <p:nvPr/>
+        </p:nvSpPr>
+        <p:spPr>
+          <a:xfrm>
+            <a:off x="731520" y="3474720"/>
+            <a:ext cx="2011680" cy="411480"/>
+          </a:xfrm>
+          <a:prstGeom prst="roundRect">
+            <a:avLst>
+              <a:gd name="adj" fmla="val 17778"/>
+            </a:avLst>
+          </a:prstGeom>
+          <a:solidFill>
+            <a:srgbClr val="2A9D8F"/>
+          </a:solidFill>
+          <a:ln/>
+        </p:spPr>
+      </p:sp>
+      <p:sp>
+        <p:nvSpPr>
+          <p:cNvPr id="6" name="Text 4"/>
+          <p:cNvSpPr/>
+          <p:nvPr/>
+        </p:nvSpPr>
+        <p:spPr>
+          <a:xfrm>
+            <a:off x="731520" y="3474720"/>
+            <a:ext cx="2011680" cy="411480"/>
           </a:xfrm>
           <a:prstGeom prst="rect">
             <a:avLst/>
@@ -1261,21 +1372,21 @@
           <a:bodyPr wrap="square" rtlCol="0" anchor="ctr"/>
           <a:lstStyle/>
           <a:p>
-            <a:pPr indent="0" marL="0">
+            <a:pPr algn="ctr" indent="0" marL="0">
               <a:buNone/>
             </a:pPr>
             <a:r>
-              <a:rPr lang="en-US" sz="1000" dirty="0">
+              <a:rPr lang="en-US" sz="1200" b="1" dirty="0">
                 <a:solidFill>
-                  <a:srgbClr val="6B6660"/>
+                  <a:srgbClr val="FFFFFF"/>
                 </a:solidFill>
                 <a:latin typeface="Calibri" pitchFamily="34" charset="0"/>
                 <a:ea typeface="Calibri" pitchFamily="34" charset="-122"/>
                 <a:cs typeface="Calibri" pitchFamily="34" charset="-120"/>
               </a:rPr>
-              <a:t>Mr Zocchi · mrzocchi.com</a:t>
-            </a:r>
-            <a:endParaRPr lang="en-US" sz="1000" dirty="0"/>
+              <a:t>Term 2 · Fractions &amp; Decimals</a:t>
+            </a:r>
+            <a:endParaRPr lang="en-US" sz="1200" dirty="0"/>
           </a:p>
         </p:txBody>
       </p:sp>
@@ -1293,7 +1404,7 @@
     <p:bg>
       <p:bgPr>
         <a:solidFill>
-          <a:srgbClr val="FFFFFF"/>
+          <a:srgbClr val="FAF8F5"/>
         </a:solidFill>
       </p:bgPr>
     </p:bg>
@@ -1339,8 +1450,8 @@
         </p:nvSpPr>
         <p:spPr>
           <a:xfrm>
-            <a:off x="548640" y="274320"/>
-            <a:ext cx="8046720" cy="640080"/>
+            <a:off x="7772400" y="4709160"/>
+            <a:ext cx="1097280" cy="320040"/>
           </a:xfrm>
           <a:prstGeom prst="rect">
             <a:avLst/>
@@ -1349,14 +1460,105 @@
           <a:ln/>
         </p:spPr>
         <p:txBody>
-          <a:bodyPr wrap="square" lIns="0" tIns="0" rIns="0" bIns="0" rtlCol="0" anchor="ctr"/>
+          <a:bodyPr wrap="square" rtlCol="0" anchor="ctr"/>
+          <a:lstStyle/>
+          <a:p>
+            <a:pPr algn="r" indent="0" marL="0">
+              <a:buNone/>
+            </a:pPr>
+            <a:r>
+              <a:rPr lang="en-US" sz="900" dirty="0">
+                <a:solidFill>
+                  <a:srgbClr val="6B6660"/>
+                </a:solidFill>
+                <a:latin typeface="Calibri" pitchFamily="34" charset="0"/>
+                <a:ea typeface="Calibri" pitchFamily="34" charset="-122"/>
+                <a:cs typeface="Calibri" pitchFamily="34" charset="-120"/>
+              </a:rPr>
+              <a:t>2 / 5</a:t>
+            </a:r>
+            <a:endParaRPr lang="en-US" sz="900" dirty="0"/>
+          </a:p>
+        </p:txBody>
+      </p:sp>
+      <p:sp>
+        <p:nvSpPr>
+          <p:cNvPr id="4" name="Shape 2"/>
+          <p:cNvSpPr/>
+          <p:nvPr/>
+        </p:nvSpPr>
+        <p:spPr>
+          <a:xfrm>
+            <a:off x="1371600" y="914400"/>
+            <a:ext cx="6400800" cy="3200400"/>
+          </a:xfrm>
+          <a:prstGeom prst="rect">
+            <a:avLst/>
+          </a:prstGeom>
+          <a:solidFill>
+            <a:srgbClr val="FFFFFF"/>
+          </a:solidFill>
+          <a:ln w="12700">
+            <a:solidFill>
+              <a:srgbClr val="E5E2DC"/>
+            </a:solidFill>
+            <a:prstDash val="solid"/>
+          </a:ln>
+          <a:effectLst>
+            <a:outerShdw sx="100000" sy="100000" kx="0" ky="0" algn="bl" rotWithShape="0" blurRad="50800" dist="25400" dir="8100000">
+              <a:srgbClr val="000000">
+                <a:alpha val="10000"/>
+              </a:srgbClr>
+            </a:outerShdw>
+          </a:effectLst>
+        </p:spPr>
+      </p:sp>
+      <p:sp>
+        <p:nvSpPr>
+          <p:cNvPr id="5" name="Shape 3"/>
+          <p:cNvSpPr/>
+          <p:nvPr/>
+        </p:nvSpPr>
+        <p:spPr>
+          <a:xfrm>
+            <a:off x="1371600" y="914400"/>
+            <a:ext cx="91440" cy="3200400"/>
+          </a:xfrm>
+          <a:prstGeom prst="rect">
+            <a:avLst/>
+          </a:prstGeom>
+          <a:solidFill>
+            <a:srgbClr val="2A9D8F"/>
+          </a:solidFill>
+          <a:ln/>
+        </p:spPr>
+      </p:sp>
+      <p:sp>
+        <p:nvSpPr>
+          <p:cNvPr id="6" name="Text 4"/>
+          <p:cNvSpPr/>
+          <p:nvPr/>
+        </p:nvSpPr>
+        <p:spPr>
+          <a:xfrm>
+            <a:off x="1828800" y="1097280"/>
+            <a:ext cx="5669280" cy="640080"/>
+          </a:xfrm>
+          <a:prstGeom prst="rect">
+            <a:avLst/>
+          </a:prstGeom>
+          <a:noFill/>
+          <a:ln/>
+        </p:spPr>
+        <p:txBody>
+          <a:bodyPr wrap="square" rtlCol="0" anchor="ctr"/>
           <a:lstStyle/>
           <a:p>
             <a:pPr indent="0" marL="0">
               <a:buNone/>
             </a:pPr>
             <a:r>
-              <a:rPr lang="en-US" sz="2600" b="1" dirty="0">
+              <a:rPr lang="en-US" sz="2400" b="1" dirty="0">
                 <a:solidFill>
                   <a:srgbClr val="1B2A4A"/>
                 </a:solidFill>
@@ -1364,22 +1566,22 @@
                 <a:ea typeface="Georgia" pitchFamily="34" charset="-122"/>
                 <a:cs typeface="Georgia" pitchFamily="34" charset="-120"/>
               </a:rPr>
-              <a:t>Same Denominators</a:t>
-            </a:r>
-            <a:endParaRPr lang="en-US" sz="2600" dirty="0"/>
-          </a:p>
-        </p:txBody>
-      </p:sp>
-      <p:sp>
-        <p:nvSpPr>
-          <p:cNvPr id="4" name="Text 2"/>
-          <p:cNvSpPr/>
-          <p:nvPr/>
-        </p:nvSpPr>
-        <p:spPr>
-          <a:xfrm>
-            <a:off x="548640" y="1097280"/>
-            <a:ext cx="8046720" cy="3474720"/>
+              <a:t>Adding and Subtracting Fractions</a:t>
+            </a:r>
+            <a:endParaRPr lang="en-US" sz="2400" dirty="0"/>
+          </a:p>
+        </p:txBody>
+      </p:sp>
+      <p:sp>
+        <p:nvSpPr>
+          <p:cNvPr id="7" name="Text 5"/>
+          <p:cNvSpPr/>
+          <p:nvPr/>
+        </p:nvSpPr>
+        <p:spPr>
+          <a:xfrm>
+            <a:off x="1828800" y="1828800"/>
+            <a:ext cx="5669280" cy="2011680"/>
           </a:xfrm>
           <a:prstGeom prst="rect">
             <a:avLst/>
@@ -1391,12 +1593,11 @@
           <a:bodyPr wrap="square" rtlCol="0" anchor="t"/>
           <a:lstStyle/>
           <a:p>
-            <a:pPr marL="342900" indent="-342900">
-              <a:spcAft>
-                <a:spcPts val="800"/>
-              </a:spcAft>
-              <a:buSzPct val="100000"/>
-              <a:buChar char="•"/>
+            <a:pPr indent="0" marL="0">
+              <a:lnSpc>
+                <a:spcPct val="130000"/>
+              </a:lnSpc>
+              <a:buNone/>
             </a:pPr>
             <a:r>
               <a:rPr lang="en-US" sz="1500" dirty="0">
@@ -1407,108 +1608,9 @@
                 <a:ea typeface="Calibri" pitchFamily="34" charset="-122"/>
                 <a:cs typeface="Calibri" pitchFamily="34" charset="-120"/>
               </a:rPr>
-              <a:t>If denominators are the same → just add/subtract the numerators</a:t>
+              <a:t>To add or subtract fractions, the denominators must be THE SAME. If they're different, find a common denominator first. Then add or subtract the numerators only — the denominator stays the same. Always simplify your answer.</a:t>
             </a:r>
             <a:endParaRPr lang="en-US" sz="1500" dirty="0"/>
-          </a:p>
-          <a:p>
-            <a:pPr marL="342900" indent="-342900">
-              <a:spcAft>
-                <a:spcPts val="800"/>
-              </a:spcAft>
-              <a:buSzPct val="100000"/>
-              <a:buChar char="•"/>
-            </a:pPr>
-            <a:r>
-              <a:rPr lang="en-US" sz="1500" dirty="0">
-                <a:solidFill>
-                  <a:srgbClr val="3D3A36"/>
-                </a:solidFill>
-                <a:latin typeface="Calibri" pitchFamily="34" charset="0"/>
-                <a:ea typeface="Calibri" pitchFamily="34" charset="-122"/>
-                <a:cs typeface="Calibri" pitchFamily="34" charset="-120"/>
-              </a:rPr>
-              <a:t>3/7 + 2/7 = 5/7 (add numerators, keep denominator)</a:t>
-            </a:r>
-            <a:endParaRPr lang="en-US" sz="1500" dirty="0"/>
-          </a:p>
-          <a:p>
-            <a:pPr marL="342900" indent="-342900">
-              <a:spcAft>
-                <a:spcPts val="800"/>
-              </a:spcAft>
-              <a:buSzPct val="100000"/>
-              <a:buChar char="•"/>
-            </a:pPr>
-            <a:r>
-              <a:rPr lang="en-US" sz="1500" dirty="0">
-                <a:solidFill>
-                  <a:srgbClr val="3D3A36"/>
-                </a:solidFill>
-                <a:latin typeface="Calibri" pitchFamily="34" charset="0"/>
-                <a:ea typeface="Calibri" pitchFamily="34" charset="-122"/>
-                <a:cs typeface="Calibri" pitchFamily="34" charset="-120"/>
-              </a:rPr>
-              <a:t>5/8 - 3/8 = 2/8 = 1/4 (simplify if possible)</a:t>
-            </a:r>
-            <a:endParaRPr lang="en-US" sz="1500" dirty="0"/>
-          </a:p>
-          <a:p>
-            <a:pPr marL="342900" indent="-342900">
-              <a:spcAft>
-                <a:spcPts val="800"/>
-              </a:spcAft>
-              <a:buSzPct val="100000"/>
-              <a:buChar char="•"/>
-            </a:pPr>
-            <a:r>
-              <a:rPr lang="en-US" sz="1500" dirty="0">
-                <a:solidFill>
-                  <a:srgbClr val="3D3A36"/>
-                </a:solidFill>
-                <a:latin typeface="Calibri" pitchFamily="34" charset="0"/>
-                <a:ea typeface="Calibri" pitchFamily="34" charset="-122"/>
-                <a:cs typeface="Calibri" pitchFamily="34" charset="-120"/>
-              </a:rPr>
-              <a:t>The denominator tells you the SIZE of the pieces — must be the same size to combine</a:t>
-            </a:r>
-            <a:endParaRPr lang="en-US" sz="1500" dirty="0"/>
-          </a:p>
-        </p:txBody>
-      </p:sp>
-      <p:sp>
-        <p:nvSpPr>
-          <p:cNvPr id="5" name="Text 3"/>
-          <p:cNvSpPr/>
-          <p:nvPr/>
-        </p:nvSpPr>
-        <p:spPr>
-          <a:xfrm>
-            <a:off x="548640" y="4800600"/>
-            <a:ext cx="3657600" cy="274320"/>
-          </a:xfrm>
-          <a:prstGeom prst="rect">
-            <a:avLst/>
-          </a:prstGeom>
-          <a:noFill/>
-          <a:ln/>
-        </p:spPr>
-        <p:txBody>
-          <a:bodyPr wrap="square" rtlCol="0" anchor="ctr"/>
-          <a:lstStyle/>
-          <a:p>
-            <a:pPr indent="0" marL="0">
-              <a:buNone/>
-            </a:pPr>
-            <a:r>
-              <a:rPr lang="en-US" sz="800" dirty="0">
-                <a:solidFill>
-                  <a:srgbClr val="9B9690"/>
-                </a:solidFill>
-              </a:rPr>
-              <a:t>mrzocchi.com</a:t>
-            </a:r>
-            <a:endParaRPr lang="en-US" sz="800" dirty="0"/>
           </a:p>
         </p:txBody>
       </p:sp>
@@ -1526,7 +1628,7 @@
     <p:bg>
       <p:bgPr>
         <a:solidFill>
-          <a:srgbClr val="FFFFFF"/>
+          <a:srgbClr val="FAF8F5"/>
         </a:solidFill>
       </p:bgPr>
     </p:bg>
@@ -1572,8 +1674,8 @@
         </p:nvSpPr>
         <p:spPr>
           <a:xfrm>
-            <a:off x="548640" y="274320"/>
-            <a:ext cx="8046720" cy="640080"/>
+            <a:off x="7772400" y="4709160"/>
+            <a:ext cx="1097280" cy="320040"/>
           </a:xfrm>
           <a:prstGeom prst="rect">
             <a:avLst/>
@@ -1582,7 +1684,46 @@
           <a:ln/>
         </p:spPr>
         <p:txBody>
-          <a:bodyPr wrap="square" lIns="0" tIns="0" rIns="0" bIns="0" rtlCol="0" anchor="ctr"/>
+          <a:bodyPr wrap="square" rtlCol="0" anchor="ctr"/>
+          <a:lstStyle/>
+          <a:p>
+            <a:pPr algn="r" indent="0" marL="0">
+              <a:buNone/>
+            </a:pPr>
+            <a:r>
+              <a:rPr lang="en-US" sz="900" dirty="0">
+                <a:solidFill>
+                  <a:srgbClr val="6B6660"/>
+                </a:solidFill>
+                <a:latin typeface="Calibri" pitchFamily="34" charset="0"/>
+                <a:ea typeface="Calibri" pitchFamily="34" charset="-122"/>
+                <a:cs typeface="Calibri" pitchFamily="34" charset="-120"/>
+              </a:rPr>
+              <a:t>3 / 5</a:t>
+            </a:r>
+            <a:endParaRPr lang="en-US" sz="900" dirty="0"/>
+          </a:p>
+        </p:txBody>
+      </p:sp>
+      <p:sp>
+        <p:nvSpPr>
+          <p:cNvPr id="4" name="Text 2"/>
+          <p:cNvSpPr/>
+          <p:nvPr/>
+        </p:nvSpPr>
+        <p:spPr>
+          <a:xfrm>
+            <a:off x="457200" y="274320"/>
+            <a:ext cx="8229600" cy="640080"/>
+          </a:xfrm>
+          <a:prstGeom prst="rect">
+            <a:avLst/>
+          </a:prstGeom>
+          <a:noFill/>
+          <a:ln/>
+        </p:spPr>
+        <p:txBody>
+          <a:bodyPr wrap="square" rtlCol="0" anchor="ctr"/>
           <a:lstStyle/>
           <a:p>
             <a:pPr indent="0" marL="0">
@@ -1597,7 +1738,7 @@
                 <a:ea typeface="Georgia" pitchFamily="34" charset="-122"/>
                 <a:cs typeface="Georgia" pitchFamily="34" charset="-120"/>
               </a:rPr>
-              <a:t>Different Denominators</a:t>
+              <a:t>Step by Step</a:t>
             </a:r>
             <a:endParaRPr lang="en-US" sz="2600" dirty="0"/>
           </a:p>
@@ -1605,14 +1746,66 @@
       </p:sp>
       <p:sp>
         <p:nvSpPr>
-          <p:cNvPr id="4" name="Text 2"/>
-          <p:cNvSpPr/>
-          <p:nvPr/>
-        </p:nvSpPr>
-        <p:spPr>
-          <a:xfrm>
-            <a:off x="548640" y="1097280"/>
-            <a:ext cx="8046720" cy="3474720"/>
+          <p:cNvPr id="5" name="Shape 3"/>
+          <p:cNvSpPr/>
+          <p:nvPr/>
+        </p:nvSpPr>
+        <p:spPr>
+          <a:xfrm>
+            <a:off x="457200" y="1188720"/>
+            <a:ext cx="2560320" cy="1828800"/>
+          </a:xfrm>
+          <a:prstGeom prst="rect">
+            <a:avLst/>
+          </a:prstGeom>
+          <a:solidFill>
+            <a:srgbClr val="FFFFFF"/>
+          </a:solidFill>
+          <a:ln w="12700">
+            <a:solidFill>
+              <a:srgbClr val="E5E2DC"/>
+            </a:solidFill>
+            <a:prstDash val="solid"/>
+          </a:ln>
+          <a:effectLst>
+            <a:outerShdw sx="100000" sy="100000" kx="0" ky="0" algn="bl" rotWithShape="0" blurRad="50800" dist="25400" dir="8100000">
+              <a:srgbClr val="000000">
+                <a:alpha val="10000"/>
+              </a:srgbClr>
+            </a:outerShdw>
+          </a:effectLst>
+        </p:spPr>
+      </p:sp>
+      <p:sp>
+        <p:nvSpPr>
+          <p:cNvPr id="6" name="Shape 4"/>
+          <p:cNvSpPr/>
+          <p:nvPr/>
+        </p:nvSpPr>
+        <p:spPr>
+          <a:xfrm>
+            <a:off x="457200" y="1188720"/>
+            <a:ext cx="2560320" cy="54864"/>
+          </a:xfrm>
+          <a:prstGeom prst="rect">
+            <a:avLst/>
+          </a:prstGeom>
+          <a:solidFill>
+            <a:srgbClr val="2A9D8F"/>
+          </a:solidFill>
+          <a:ln/>
+        </p:spPr>
+      </p:sp>
+      <p:sp>
+        <p:nvSpPr>
+          <p:cNvPr id="7" name="Text 5"/>
+          <p:cNvSpPr/>
+          <p:nvPr/>
+        </p:nvSpPr>
+        <p:spPr>
+          <a:xfrm>
+            <a:off x="594360" y="1325880"/>
+            <a:ext cx="2286000" cy="365760"/>
           </a:xfrm>
           <a:prstGeom prst="rect">
             <a:avLst/>
@@ -1621,18 +1814,53 @@
           <a:ln/>
         </p:spPr>
         <p:txBody>
+          <a:bodyPr wrap="square" rtlCol="0" anchor="ctr"/>
+          <a:lstStyle/>
+          <a:p>
+            <a:pPr indent="0" marL="0">
+              <a:buNone/>
+            </a:pPr>
+            <a:r>
+              <a:rPr lang="en-US" sz="1400" b="1" dirty="0">
+                <a:solidFill>
+                  <a:srgbClr val="1B2A4A"/>
+                </a:solidFill>
+                <a:latin typeface="Calibri" pitchFamily="34" charset="0"/>
+                <a:ea typeface="Calibri" pitchFamily="34" charset="-122"/>
+                <a:cs typeface="Calibri" pitchFamily="34" charset="-120"/>
+              </a:rPr>
+              <a:t>Same Denominator</a:t>
+            </a:r>
+            <a:endParaRPr lang="en-US" sz="1400" dirty="0"/>
+          </a:p>
+        </p:txBody>
+      </p:sp>
+      <p:sp>
+        <p:nvSpPr>
+          <p:cNvPr id="8" name="Text 6"/>
+          <p:cNvSpPr/>
+          <p:nvPr/>
+        </p:nvSpPr>
+        <p:spPr>
+          <a:xfrm>
+            <a:off x="594360" y="1737360"/>
+            <a:ext cx="2286000" cy="1097280"/>
+          </a:xfrm>
+          <a:prstGeom prst="rect">
+            <a:avLst/>
+          </a:prstGeom>
+          <a:noFill/>
+          <a:ln/>
+        </p:spPr>
+        <p:txBody>
           <a:bodyPr wrap="square" rtlCol="0" anchor="t"/>
           <a:lstStyle/>
           <a:p>
-            <a:pPr marL="342900" indent="-342900">
-              <a:spcAft>
-                <a:spcPts val="800"/>
-              </a:spcAft>
-              <a:buSzPct val="100000"/>
-              <a:buChar char="•"/>
+            <a:pPr indent="0" marL="0">
+              <a:buNone/>
             </a:pPr>
             <a:r>
-              <a:rPr lang="en-US" sz="1500" dirty="0">
+              <a:rPr lang="en-US" sz="1100" dirty="0">
                 <a:solidFill>
                   <a:srgbClr val="3D3A36"/>
                 </a:solidFill>
@@ -1640,20 +1868,129 @@
                 <a:ea typeface="Calibri" pitchFamily="34" charset="-122"/>
                 <a:cs typeface="Calibri" pitchFamily="34" charset="-120"/>
               </a:rPr>
-              <a:t>Find a common denominator (LCM of both denominators)</a:t>
-            </a:r>
-            <a:endParaRPr lang="en-US" sz="1500" dirty="0"/>
-          </a:p>
-          <a:p>
-            <a:pPr marL="342900" indent="-342900">
-              <a:spcAft>
-                <a:spcPts val="800"/>
-              </a:spcAft>
-              <a:buSzPct val="100000"/>
-              <a:buChar char="•"/>
+              <a:t>Just add/subtract the numerators. ²⁄₇ + ³⁄₇ = ⁵⁄₇. ⁵⁄₈ − ³⁄₈ = ²⁄₈ = ¼ (simplify!). The denominator NEVER changes.</a:t>
+            </a:r>
+            <a:endParaRPr lang="en-US" sz="1100" dirty="0"/>
+          </a:p>
+        </p:txBody>
+      </p:sp>
+      <p:sp>
+        <p:nvSpPr>
+          <p:cNvPr id="9" name="Shape 7"/>
+          <p:cNvSpPr/>
+          <p:nvPr/>
+        </p:nvSpPr>
+        <p:spPr>
+          <a:xfrm>
+            <a:off x="3291840" y="1188720"/>
+            <a:ext cx="2560320" cy="1828800"/>
+          </a:xfrm>
+          <a:prstGeom prst="rect">
+            <a:avLst/>
+          </a:prstGeom>
+          <a:solidFill>
+            <a:srgbClr val="FFFFFF"/>
+          </a:solidFill>
+          <a:ln w="12700">
+            <a:solidFill>
+              <a:srgbClr val="E5E2DC"/>
+            </a:solidFill>
+            <a:prstDash val="solid"/>
+          </a:ln>
+          <a:effectLst>
+            <a:outerShdw sx="100000" sy="100000" kx="0" ky="0" algn="bl" rotWithShape="0" blurRad="50800" dist="25400" dir="8100000">
+              <a:srgbClr val="000000">
+                <a:alpha val="10000"/>
+              </a:srgbClr>
+            </a:outerShdw>
+          </a:effectLst>
+        </p:spPr>
+      </p:sp>
+      <p:sp>
+        <p:nvSpPr>
+          <p:cNvPr id="10" name="Shape 8"/>
+          <p:cNvSpPr/>
+          <p:nvPr/>
+        </p:nvSpPr>
+        <p:spPr>
+          <a:xfrm>
+            <a:off x="3291840" y="1188720"/>
+            <a:ext cx="2560320" cy="54864"/>
+          </a:xfrm>
+          <a:prstGeom prst="rect">
+            <a:avLst/>
+          </a:prstGeom>
+          <a:solidFill>
+            <a:srgbClr val="2A9D8F"/>
+          </a:solidFill>
+          <a:ln/>
+        </p:spPr>
+      </p:sp>
+      <p:sp>
+        <p:nvSpPr>
+          <p:cNvPr id="11" name="Text 9"/>
+          <p:cNvSpPr/>
+          <p:nvPr/>
+        </p:nvSpPr>
+        <p:spPr>
+          <a:xfrm>
+            <a:off x="3429000" y="1325880"/>
+            <a:ext cx="2286000" cy="365760"/>
+          </a:xfrm>
+          <a:prstGeom prst="rect">
+            <a:avLst/>
+          </a:prstGeom>
+          <a:noFill/>
+          <a:ln/>
+        </p:spPr>
+        <p:txBody>
+          <a:bodyPr wrap="square" rtlCol="0" anchor="ctr"/>
+          <a:lstStyle/>
+          <a:p>
+            <a:pPr indent="0" marL="0">
+              <a:buNone/>
             </a:pPr>
             <a:r>
-              <a:rPr lang="en-US" sz="1500" dirty="0">
+              <a:rPr lang="en-US" sz="1400" b="1" dirty="0">
+                <a:solidFill>
+                  <a:srgbClr val="1B2A4A"/>
+                </a:solidFill>
+                <a:latin typeface="Calibri" pitchFamily="34" charset="0"/>
+                <a:ea typeface="Calibri" pitchFamily="34" charset="-122"/>
+                <a:cs typeface="Calibri" pitchFamily="34" charset="-120"/>
+              </a:rPr>
+              <a:t>Different Denominators</a:t>
+            </a:r>
+            <a:endParaRPr lang="en-US" sz="1400" dirty="0"/>
+          </a:p>
+        </p:txBody>
+      </p:sp>
+      <p:sp>
+        <p:nvSpPr>
+          <p:cNvPr id="12" name="Text 10"/>
+          <p:cNvSpPr/>
+          <p:nvPr/>
+        </p:nvSpPr>
+        <p:spPr>
+          <a:xfrm>
+            <a:off x="3429000" y="1737360"/>
+            <a:ext cx="2286000" cy="1097280"/>
+          </a:xfrm>
+          <a:prstGeom prst="rect">
+            <a:avLst/>
+          </a:prstGeom>
+          <a:noFill/>
+          <a:ln/>
+        </p:spPr>
+        <p:txBody>
+          <a:bodyPr wrap="square" rtlCol="0" anchor="t"/>
+          <a:lstStyle/>
+          <a:p>
+            <a:pPr indent="0" marL="0">
+              <a:buNone/>
+            </a:pPr>
+            <a:r>
+              <a:rPr lang="en-US" sz="1100" dirty="0">
                 <a:solidFill>
                   <a:srgbClr val="3D3A36"/>
                 </a:solidFill>
@@ -1661,20 +1998,129 @@
                 <a:ea typeface="Calibri" pitchFamily="34" charset="-122"/>
                 <a:cs typeface="Calibri" pitchFamily="34" charset="-120"/>
               </a:rPr>
-              <a:t>Convert both fractions to equivalent fractions with that denominator</a:t>
-            </a:r>
-            <a:endParaRPr lang="en-US" sz="1500" dirty="0"/>
-          </a:p>
-          <a:p>
-            <a:pPr marL="342900" indent="-342900">
-              <a:spcAft>
-                <a:spcPts val="800"/>
-              </a:spcAft>
-              <a:buSzPct val="100000"/>
-              <a:buChar char="•"/>
+              <a:t>Find the LCM of denominators. Convert both fractions. Then add/subtract. ½ + ¹⁄₃: LCM(2,3)=6 → ³⁄₆ + ²⁄₆ = ⁵⁄₆.</a:t>
+            </a:r>
+            <a:endParaRPr lang="en-US" sz="1100" dirty="0"/>
+          </a:p>
+        </p:txBody>
+      </p:sp>
+      <p:sp>
+        <p:nvSpPr>
+          <p:cNvPr id="13" name="Shape 11"/>
+          <p:cNvSpPr/>
+          <p:nvPr/>
+        </p:nvSpPr>
+        <p:spPr>
+          <a:xfrm>
+            <a:off x="6126480" y="1188720"/>
+            <a:ext cx="2560320" cy="1828800"/>
+          </a:xfrm>
+          <a:prstGeom prst="rect">
+            <a:avLst/>
+          </a:prstGeom>
+          <a:solidFill>
+            <a:srgbClr val="FFFFFF"/>
+          </a:solidFill>
+          <a:ln w="12700">
+            <a:solidFill>
+              <a:srgbClr val="E5E2DC"/>
+            </a:solidFill>
+            <a:prstDash val="solid"/>
+          </a:ln>
+          <a:effectLst>
+            <a:outerShdw sx="100000" sy="100000" kx="0" ky="0" algn="bl" rotWithShape="0" blurRad="50800" dist="25400" dir="8100000">
+              <a:srgbClr val="000000">
+                <a:alpha val="10000"/>
+              </a:srgbClr>
+            </a:outerShdw>
+          </a:effectLst>
+        </p:spPr>
+      </p:sp>
+      <p:sp>
+        <p:nvSpPr>
+          <p:cNvPr id="14" name="Shape 12"/>
+          <p:cNvSpPr/>
+          <p:nvPr/>
+        </p:nvSpPr>
+        <p:spPr>
+          <a:xfrm>
+            <a:off x="6126480" y="1188720"/>
+            <a:ext cx="2560320" cy="54864"/>
+          </a:xfrm>
+          <a:prstGeom prst="rect">
+            <a:avLst/>
+          </a:prstGeom>
+          <a:solidFill>
+            <a:srgbClr val="2A9D8F"/>
+          </a:solidFill>
+          <a:ln/>
+        </p:spPr>
+      </p:sp>
+      <p:sp>
+        <p:nvSpPr>
+          <p:cNvPr id="15" name="Text 13"/>
+          <p:cNvSpPr/>
+          <p:nvPr/>
+        </p:nvSpPr>
+        <p:spPr>
+          <a:xfrm>
+            <a:off x="6263640" y="1325880"/>
+            <a:ext cx="2286000" cy="365760"/>
+          </a:xfrm>
+          <a:prstGeom prst="rect">
+            <a:avLst/>
+          </a:prstGeom>
+          <a:noFill/>
+          <a:ln/>
+        </p:spPr>
+        <p:txBody>
+          <a:bodyPr wrap="square" rtlCol="0" anchor="ctr"/>
+          <a:lstStyle/>
+          <a:p>
+            <a:pPr indent="0" marL="0">
+              <a:buNone/>
             </a:pPr>
             <a:r>
-              <a:rPr lang="en-US" sz="1500" dirty="0">
+              <a:rPr lang="en-US" sz="1400" b="1" dirty="0">
+                <a:solidFill>
+                  <a:srgbClr val="1B2A4A"/>
+                </a:solidFill>
+                <a:latin typeface="Calibri" pitchFamily="34" charset="0"/>
+                <a:ea typeface="Calibri" pitchFamily="34" charset="-122"/>
+                <a:cs typeface="Calibri" pitchFamily="34" charset="-120"/>
+              </a:rPr>
+              <a:t>Mixed Numbers</a:t>
+            </a:r>
+            <a:endParaRPr lang="en-US" sz="1400" dirty="0"/>
+          </a:p>
+        </p:txBody>
+      </p:sp>
+      <p:sp>
+        <p:nvSpPr>
+          <p:cNvPr id="16" name="Text 14"/>
+          <p:cNvSpPr/>
+          <p:nvPr/>
+        </p:nvSpPr>
+        <p:spPr>
+          <a:xfrm>
+            <a:off x="6263640" y="1737360"/>
+            <a:ext cx="2286000" cy="1097280"/>
+          </a:xfrm>
+          <a:prstGeom prst="rect">
+            <a:avLst/>
+          </a:prstGeom>
+          <a:noFill/>
+          <a:ln/>
+        </p:spPr>
+        <p:txBody>
+          <a:bodyPr wrap="square" rtlCol="0" anchor="t"/>
+          <a:lstStyle/>
+          <a:p>
+            <a:pPr indent="0" marL="0">
+              <a:buNone/>
+            </a:pPr>
+            <a:r>
+              <a:rPr lang="en-US" sz="1100" dirty="0">
                 <a:solidFill>
                   <a:srgbClr val="3D3A36"/>
                 </a:solidFill>
@@ -1682,108 +2128,9 @@
                 <a:ea typeface="Calibri" pitchFamily="34" charset="-122"/>
                 <a:cs typeface="Calibri" pitchFamily="34" charset="-120"/>
               </a:rPr>
-              <a:t>Then add or subtract the numerators</a:t>
-            </a:r>
-            <a:endParaRPr lang="en-US" sz="1500" dirty="0"/>
-          </a:p>
-          <a:p>
-            <a:pPr marL="342900" indent="-342900">
-              <a:spcAft>
-                <a:spcPts val="800"/>
-              </a:spcAft>
-              <a:buSzPct val="100000"/>
-              <a:buChar char="•"/>
-            </a:pPr>
-            <a:r>
-              <a:rPr lang="en-US" sz="1500" dirty="0">
-                <a:solidFill>
-                  <a:srgbClr val="3D3A36"/>
-                </a:solidFill>
-                <a:latin typeface="Calibri" pitchFamily="34" charset="0"/>
-                <a:ea typeface="Calibri" pitchFamily="34" charset="-122"/>
-                <a:cs typeface="Calibri" pitchFamily="34" charset="-120"/>
-              </a:rPr>
-              <a:t>Example: 1/3 + 1/4 → LCM of 3 and 4 = 12</a:t>
-            </a:r>
-            <a:endParaRPr lang="en-US" sz="1500" dirty="0"/>
-          </a:p>
-          <a:p>
-            <a:pPr marL="342900" indent="-342900">
-              <a:spcAft>
-                <a:spcPts val="800"/>
-              </a:spcAft>
-              <a:buSzPct val="100000"/>
-              <a:buChar char="•"/>
-            </a:pPr>
-            <a:r>
-              <a:rPr lang="en-US" sz="1500" dirty="0">
-                <a:solidFill>
-                  <a:srgbClr val="3D3A36"/>
-                </a:solidFill>
-                <a:latin typeface="Calibri" pitchFamily="34" charset="0"/>
-                <a:ea typeface="Calibri" pitchFamily="34" charset="-122"/>
-                <a:cs typeface="Calibri" pitchFamily="34" charset="-120"/>
-              </a:rPr>
-              <a:t>1/3 = 4/12 and 1/4 = 3/12 → 4/12 + 3/12 = 7/12</a:t>
-            </a:r>
-            <a:endParaRPr lang="en-US" sz="1500" dirty="0"/>
-          </a:p>
-          <a:p>
-            <a:pPr marL="342900" indent="-342900">
-              <a:spcAft>
-                <a:spcPts val="800"/>
-              </a:spcAft>
-              <a:buSzPct val="100000"/>
-              <a:buChar char="•"/>
-            </a:pPr>
-            <a:r>
-              <a:rPr lang="en-US" sz="1500" dirty="0">
-                <a:solidFill>
-                  <a:srgbClr val="3D3A36"/>
-                </a:solidFill>
-                <a:latin typeface="Calibri" pitchFamily="34" charset="0"/>
-                <a:ea typeface="Calibri" pitchFamily="34" charset="-122"/>
-                <a:cs typeface="Calibri" pitchFamily="34" charset="-120"/>
-              </a:rPr>
-              <a:t>Always simplify your answer</a:t>
-            </a:r>
-            <a:endParaRPr lang="en-US" sz="1500" dirty="0"/>
-          </a:p>
-        </p:txBody>
-      </p:sp>
-      <p:sp>
-        <p:nvSpPr>
-          <p:cNvPr id="5" name="Text 3"/>
-          <p:cNvSpPr/>
-          <p:nvPr/>
-        </p:nvSpPr>
-        <p:spPr>
-          <a:xfrm>
-            <a:off x="548640" y="4800600"/>
-            <a:ext cx="3657600" cy="274320"/>
-          </a:xfrm>
-          <a:prstGeom prst="rect">
-            <a:avLst/>
-          </a:prstGeom>
-          <a:noFill/>
-          <a:ln/>
-        </p:spPr>
-        <p:txBody>
-          <a:bodyPr wrap="square" rtlCol="0" anchor="ctr"/>
-          <a:lstStyle/>
-          <a:p>
-            <a:pPr indent="0" marL="0">
-              <a:buNone/>
-            </a:pPr>
-            <a:r>
-              <a:rPr lang="en-US" sz="800" dirty="0">
-                <a:solidFill>
-                  <a:srgbClr val="9B9690"/>
-                </a:solidFill>
-              </a:rPr>
-              <a:t>mrzocchi.com</a:t>
-            </a:r>
-            <a:endParaRPr lang="en-US" sz="800" dirty="0"/>
+              <a:t>Convert to improper fractions first. 2¹⁄₃ + 1½ = ⁷⁄₃ + ³⁄₂ = ¹⁴⁄₆ + ⁹⁄₆ = ²³⁄₆ = 3⁵⁄₆.</a:t>
+            </a:r>
+            <a:endParaRPr lang="en-US" sz="1100" dirty="0"/>
           </a:p>
         </p:txBody>
       </p:sp>
@@ -1798,6 +2145,263 @@
 <file path=ppt/slides/slide4.xml><?xml version="1.0" encoding="utf-8"?>
 <p:sld xmlns:a="http://schemas.openxmlformats.org/drawingml/2006/main" xmlns:r="http://schemas.openxmlformats.org/officeDocument/2006/relationships" xmlns:p="http://schemas.openxmlformats.org/presentationml/2006/main">
   <p:cSld name="Slide 4">
+    <p:bg>
+      <p:bgPr>
+        <a:solidFill>
+          <a:srgbClr val="FAF8F5"/>
+        </a:solidFill>
+      </p:bgPr>
+    </p:bg>
+    <p:spTree>
+      <p:nvGrpSpPr>
+        <p:cNvPr id="1" name=""/>
+        <p:cNvGrpSpPr/>
+        <p:nvPr/>
+      </p:nvGrpSpPr>
+      <p:grpSpPr>
+        <a:xfrm>
+          <a:off x="0" y="0"/>
+          <a:ext cx="0" cy="0"/>
+          <a:chOff x="0" y="0"/>
+          <a:chExt cx="0" cy="0"/>
+        </a:xfrm>
+      </p:grpSpPr>
+      <p:sp>
+        <p:nvSpPr>
+          <p:cNvPr id="2" name="Shape 0"/>
+          <p:cNvSpPr/>
+          <p:nvPr/>
+        </p:nvSpPr>
+        <p:spPr>
+          <a:xfrm>
+            <a:off x="0" y="0"/>
+            <a:ext cx="9144000" cy="54864"/>
+          </a:xfrm>
+          <a:prstGeom prst="rect">
+            <a:avLst/>
+          </a:prstGeom>
+          <a:solidFill>
+            <a:srgbClr val="2A9D8F"/>
+          </a:solidFill>
+          <a:ln/>
+        </p:spPr>
+      </p:sp>
+      <p:sp>
+        <p:nvSpPr>
+          <p:cNvPr id="3" name="Text 1"/>
+          <p:cNvSpPr/>
+          <p:nvPr/>
+        </p:nvSpPr>
+        <p:spPr>
+          <a:xfrm>
+            <a:off x="7772400" y="4709160"/>
+            <a:ext cx="1097280" cy="320040"/>
+          </a:xfrm>
+          <a:prstGeom prst="rect">
+            <a:avLst/>
+          </a:prstGeom>
+          <a:noFill/>
+          <a:ln/>
+        </p:spPr>
+        <p:txBody>
+          <a:bodyPr wrap="square" rtlCol="0" anchor="ctr"/>
+          <a:lstStyle/>
+          <a:p>
+            <a:pPr algn="r" indent="0" marL="0">
+              <a:buNone/>
+            </a:pPr>
+            <a:r>
+              <a:rPr lang="en-US" sz="900" dirty="0">
+                <a:solidFill>
+                  <a:srgbClr val="6B6660"/>
+                </a:solidFill>
+                <a:latin typeface="Calibri" pitchFamily="34" charset="0"/>
+                <a:ea typeface="Calibri" pitchFamily="34" charset="-122"/>
+                <a:cs typeface="Calibri" pitchFamily="34" charset="-120"/>
+              </a:rPr>
+              <a:t>4 / 5</a:t>
+            </a:r>
+            <a:endParaRPr lang="en-US" sz="900" dirty="0"/>
+          </a:p>
+        </p:txBody>
+      </p:sp>
+      <p:sp>
+        <p:nvSpPr>
+          <p:cNvPr id="4" name="Text 2"/>
+          <p:cNvSpPr/>
+          <p:nvPr/>
+        </p:nvSpPr>
+        <p:spPr>
+          <a:xfrm>
+            <a:off x="457200" y="274320"/>
+            <a:ext cx="8229600" cy="640080"/>
+          </a:xfrm>
+          <a:prstGeom prst="rect">
+            <a:avLst/>
+          </a:prstGeom>
+          <a:noFill/>
+          <a:ln/>
+        </p:spPr>
+        <p:txBody>
+          <a:bodyPr wrap="square" rtlCol="0" anchor="ctr"/>
+          <a:lstStyle/>
+          <a:p>
+            <a:pPr indent="0" marL="0">
+              <a:buNone/>
+            </a:pPr>
+            <a:r>
+              <a:rPr lang="en-US" sz="2600" b="1" dirty="0">
+                <a:solidFill>
+                  <a:srgbClr val="1B2A4A"/>
+                </a:solidFill>
+                <a:latin typeface="Georgia" pitchFamily="34" charset="0"/>
+                <a:ea typeface="Georgia" pitchFamily="34" charset="-122"/>
+                <a:cs typeface="Georgia" pitchFamily="34" charset="-120"/>
+              </a:rPr>
+              <a:t>Practice Problems</a:t>
+            </a:r>
+            <a:endParaRPr lang="en-US" sz="2600" dirty="0"/>
+          </a:p>
+        </p:txBody>
+      </p:sp>
+      <p:sp>
+        <p:nvSpPr>
+          <p:cNvPr id="5" name="Text 3"/>
+          <p:cNvSpPr/>
+          <p:nvPr/>
+        </p:nvSpPr>
+        <p:spPr>
+          <a:xfrm>
+            <a:off x="457200" y="1097280"/>
+            <a:ext cx="8229600" cy="3657600"/>
+          </a:xfrm>
+          <a:prstGeom prst="rect">
+            <a:avLst/>
+          </a:prstGeom>
+          <a:noFill/>
+          <a:ln/>
+        </p:spPr>
+        <p:txBody>
+          <a:bodyPr wrap="square" rtlCol="0" anchor="t"/>
+          <a:lstStyle/>
+          <a:p>
+            <a:pPr marL="342900" indent="-342900">
+              <a:spcAft>
+                <a:spcPts val="800"/>
+              </a:spcAft>
+              <a:buSzPct val="100000"/>
+              <a:buChar char="•"/>
+            </a:pPr>
+            <a:r>
+              <a:rPr lang="en-US" sz="1400" dirty="0">
+                <a:solidFill>
+                  <a:srgbClr val="3D3A36"/>
+                </a:solidFill>
+                <a:latin typeface="Calibri" pitchFamily="34" charset="0"/>
+                <a:ea typeface="Calibri" pitchFamily="34" charset="-122"/>
+                <a:cs typeface="Calibri" pitchFamily="34" charset="-120"/>
+              </a:rPr>
+              <a:t>³⁄₅ + ¹⁄₅ = ⁴⁄₅</a:t>
+            </a:r>
+            <a:endParaRPr lang="en-US" sz="1400" dirty="0"/>
+          </a:p>
+          <a:p>
+            <a:pPr marL="342900" indent="-342900">
+              <a:spcAft>
+                <a:spcPts val="800"/>
+              </a:spcAft>
+              <a:buSzPct val="100000"/>
+              <a:buChar char="•"/>
+            </a:pPr>
+            <a:r>
+              <a:rPr lang="en-US" sz="1400" dirty="0">
+                <a:solidFill>
+                  <a:srgbClr val="3D3A36"/>
+                </a:solidFill>
+                <a:latin typeface="Calibri" pitchFamily="34" charset="0"/>
+                <a:ea typeface="Calibri" pitchFamily="34" charset="-122"/>
+                <a:cs typeface="Calibri" pitchFamily="34" charset="-120"/>
+              </a:rPr>
+              <a:t>⁷⁄₈ − ³⁄₈ = ⁴⁄₈ = ½ (simplify)</a:t>
+            </a:r>
+            <a:endParaRPr lang="en-US" sz="1400" dirty="0"/>
+          </a:p>
+          <a:p>
+            <a:pPr marL="342900" indent="-342900">
+              <a:spcAft>
+                <a:spcPts val="800"/>
+              </a:spcAft>
+              <a:buSzPct val="100000"/>
+              <a:buChar char="•"/>
+            </a:pPr>
+            <a:r>
+              <a:rPr lang="en-US" sz="1400" dirty="0">
+                <a:solidFill>
+                  <a:srgbClr val="3D3A36"/>
+                </a:solidFill>
+                <a:latin typeface="Calibri" pitchFamily="34" charset="0"/>
+                <a:ea typeface="Calibri" pitchFamily="34" charset="-122"/>
+                <a:cs typeface="Calibri" pitchFamily="34" charset="-120"/>
+              </a:rPr>
+              <a:t>¹⁄₃ + ¼ = ⁴⁄₁₂ + ³⁄₁₂ = ⁷⁄₁₂ (LCM of 3 and 4 = 12)</a:t>
+            </a:r>
+            <a:endParaRPr lang="en-US" sz="1400" dirty="0"/>
+          </a:p>
+          <a:p>
+            <a:pPr marL="342900" indent="-342900">
+              <a:spcAft>
+                <a:spcPts val="800"/>
+              </a:spcAft>
+              <a:buSzPct val="100000"/>
+              <a:buChar char="•"/>
+            </a:pPr>
+            <a:r>
+              <a:rPr lang="en-US" sz="1400" dirty="0">
+                <a:solidFill>
+                  <a:srgbClr val="3D3A36"/>
+                </a:solidFill>
+                <a:latin typeface="Calibri" pitchFamily="34" charset="0"/>
+                <a:ea typeface="Calibri" pitchFamily="34" charset="-122"/>
+                <a:cs typeface="Calibri" pitchFamily="34" charset="-120"/>
+              </a:rPr>
+              <a:t>²⁄₃ − ¹⁄₆ = ⁴⁄₆ − ¹⁄₆ = ³⁄₆ = ½</a:t>
+            </a:r>
+            <a:endParaRPr lang="en-US" sz="1400" dirty="0"/>
+          </a:p>
+          <a:p>
+            <a:pPr marL="342900" indent="-342900">
+              <a:spcAft>
+                <a:spcPts val="800"/>
+              </a:spcAft>
+              <a:buSzPct val="100000"/>
+              <a:buChar char="•"/>
+            </a:pPr>
+            <a:r>
+              <a:rPr lang="en-US" sz="1400" dirty="0">
+                <a:solidFill>
+                  <a:srgbClr val="3D3A36"/>
+                </a:solidFill>
+                <a:latin typeface="Calibri" pitchFamily="34" charset="0"/>
+                <a:ea typeface="Calibri" pitchFamily="34" charset="-122"/>
+                <a:cs typeface="Calibri" pitchFamily="34" charset="-120"/>
+              </a:rPr>
+              <a:t>1³⁄₄ + 2¹⁄₂ = ⁷⁄₄ + ⁵⁄₂ = ⁷⁄₄ + ¹⁰⁄₄ = ¹⁷⁄₄ = 4¼</a:t>
+            </a:r>
+            <a:endParaRPr lang="en-US" sz="1400" dirty="0"/>
+          </a:p>
+        </p:txBody>
+      </p:sp>
+    </p:spTree>
+  </p:cSld>
+  <p:clrMapOvr>
+    <a:masterClrMapping/>
+  </p:clrMapOvr>
+</p:sld>
+</file>
+
+<file path=ppt/slides/slide5.xml><?xml version="1.0" encoding="utf-8"?>
+<p:sld xmlns:a="http://schemas.openxmlformats.org/drawingml/2006/main" xmlns:r="http://schemas.openxmlformats.org/officeDocument/2006/relationships" xmlns:p="http://schemas.openxmlformats.org/presentationml/2006/main">
+  <p:cSld name="Slide 5">
     <p:bg>
       <p:bgPr>
         <a:solidFill>
@@ -1828,13 +2432,13 @@
         <p:spPr>
           <a:xfrm>
             <a:off x="0" y="0"/>
-            <a:ext cx="9144000" cy="54864"/>
-          </a:xfrm>
-          <a:prstGeom prst="rect">
-            <a:avLst/>
-          </a:prstGeom>
-          <a:solidFill>
-            <a:srgbClr val="2A9D8F"/>
+            <a:ext cx="109728" cy="5143500"/>
+          </a:xfrm>
+          <a:prstGeom prst="rect">
+            <a:avLst/>
+          </a:prstGeom>
+          <a:solidFill>
+            <a:srgbClr val="E9C46A"/>
           </a:solidFill>
           <a:ln/>
         </p:spPr>
@@ -1847,8 +2451,8 @@
         </p:nvSpPr>
         <p:spPr>
           <a:xfrm>
-            <a:off x="548640" y="457200"/>
-            <a:ext cx="8046720" cy="640080"/>
+            <a:off x="731520" y="457200"/>
+            <a:ext cx="7772400" cy="731520"/>
           </a:xfrm>
           <a:prstGeom prst="rect">
             <a:avLst/>
@@ -1864,7 +2468,7 @@
               <a:buNone/>
             </a:pPr>
             <a:r>
-              <a:rPr lang="en-US" sz="2800" b="1" dirty="0">
+              <a:rPr lang="en-US" sz="3200" b="1" dirty="0">
                 <a:solidFill>
                   <a:srgbClr val="FFFFFF"/>
                 </a:solidFill>
@@ -1874,7 +2478,7 @@
               </a:rPr>
               <a:t>Key Takeaways</a:t>
             </a:r>
-            <a:endParaRPr lang="en-US" sz="2800" dirty="0"/>
+            <a:endParaRPr lang="en-US" sz="3200" dirty="0"/>
           </a:p>
         </p:txBody>
       </p:sp>
@@ -1886,8 +2490,8 @@
         </p:nvSpPr>
         <p:spPr>
           <a:xfrm>
-            <a:off x="731520" y="1371600"/>
-            <a:ext cx="7680960" cy="3200400"/>
+            <a:off x="731520" y="1463040"/>
+            <a:ext cx="7772400" cy="3200400"/>
           </a:xfrm>
           <a:prstGeom prst="rect">
             <a:avLst/>
@@ -1907,7 +2511,7 @@
               <a:buChar char="•"/>
             </a:pPr>
             <a:r>
-              <a:rPr lang="en-US" sz="1600" dirty="0">
+              <a:rPr lang="en-US" sz="1500" dirty="0">
                 <a:solidFill>
                   <a:srgbClr val="CADCFC"/>
                 </a:solidFill>
@@ -1915,9 +2519,9 @@
                 <a:ea typeface="Calibri" pitchFamily="34" charset="-122"/>
                 <a:cs typeface="Calibri" pitchFamily="34" charset="-120"/>
               </a:rPr>
-              <a:t>Same denominators: add/subtract numerators, keep denominator</a:t>
-            </a:r>
-            <a:endParaRPr lang="en-US" sz="1600" dirty="0"/>
+              <a:t>Same denominators: add/subtract numerators only</a:t>
+            </a:r>
+            <a:endParaRPr lang="en-US" sz="1500" dirty="0"/>
           </a:p>
           <a:p>
             <a:pPr marL="342900" indent="-342900">
@@ -1928,7 +2532,7 @@
               <a:buChar char="•"/>
             </a:pPr>
             <a:r>
-              <a:rPr lang="en-US" sz="1600" dirty="0">
+              <a:rPr lang="en-US" sz="1500" dirty="0">
                 <a:solidFill>
                   <a:srgbClr val="CADCFC"/>
                 </a:solidFill>
@@ -1938,7 +2542,7 @@
               </a:rPr>
               <a:t>Different denominators: find LCM, convert, then add/subtract</a:t>
             </a:r>
-            <a:endParaRPr lang="en-US" sz="1600" dirty="0"/>
+            <a:endParaRPr lang="en-US" sz="1500" dirty="0"/>
           </a:p>
           <a:p>
             <a:pPr marL="342900" indent="-342900">
@@ -1949,7 +2553,49 @@
               <a:buChar char="•"/>
             </a:pPr>
             <a:r>
-              <a:rPr lang="en-US" sz="1600" dirty="0">
+              <a:rPr lang="en-US" sz="1500" dirty="0">
+                <a:solidFill>
+                  <a:srgbClr val="CADCFC"/>
+                </a:solidFill>
+                <a:latin typeface="Calibri" pitchFamily="34" charset="0"/>
+                <a:ea typeface="Calibri" pitchFamily="34" charset="-122"/>
+                <a:cs typeface="Calibri" pitchFamily="34" charset="-120"/>
+              </a:rPr>
+              <a:t>Mixed numbers: convert to improper fractions first</a:t>
+            </a:r>
+            <a:endParaRPr lang="en-US" sz="1500" dirty="0"/>
+          </a:p>
+          <a:p>
+            <a:pPr marL="342900" indent="-342900">
+              <a:spcAft>
+                <a:spcPts val="1000"/>
+              </a:spcAft>
+              <a:buSzPct val="100000"/>
+              <a:buChar char="•"/>
+            </a:pPr>
+            <a:r>
+              <a:rPr lang="en-US" sz="1500" dirty="0">
+                <a:solidFill>
+                  <a:srgbClr val="CADCFC"/>
+                </a:solidFill>
+                <a:latin typeface="Calibri" pitchFamily="34" charset="0"/>
+                <a:ea typeface="Calibri" pitchFamily="34" charset="-122"/>
+                <a:cs typeface="Calibri" pitchFamily="34" charset="-120"/>
+              </a:rPr>
+              <a:t>NEVER add or change the denominators</a:t>
+            </a:r>
+            <a:endParaRPr lang="en-US" sz="1500" dirty="0"/>
+          </a:p>
+          <a:p>
+            <a:pPr marL="342900" indent="-342900">
+              <a:spcAft>
+                <a:spcPts val="1000"/>
+              </a:spcAft>
+              <a:buSzPct val="100000"/>
+              <a:buChar char="•"/>
+            </a:pPr>
+            <a:r>
+              <a:rPr lang="en-US" sz="1500" dirty="0">
                 <a:solidFill>
                   <a:srgbClr val="CADCFC"/>
                 </a:solidFill>
@@ -1959,64 +2605,46 @@
               </a:rPr>
               <a:t>Always simplify your final answer</a:t>
             </a:r>
-            <a:endParaRPr lang="en-US" sz="1600" dirty="0"/>
-          </a:p>
-          <a:p>
-            <a:pPr marL="342900" indent="-342900">
-              <a:spcAft>
-                <a:spcPts val="1000"/>
-              </a:spcAft>
-              <a:buSzPct val="100000"/>
-              <a:buChar char="•"/>
+            <a:endParaRPr lang="en-US" sz="1500" dirty="0"/>
+          </a:p>
+        </p:txBody>
+      </p:sp>
+      <p:sp>
+        <p:nvSpPr>
+          <p:cNvPr id="5" name="Text 3"/>
+          <p:cNvSpPr/>
+          <p:nvPr/>
+        </p:nvSpPr>
+        <p:spPr>
+          <a:xfrm>
+            <a:off x="731520" y="4572000"/>
+            <a:ext cx="7772400" cy="365760"/>
+          </a:xfrm>
+          <a:prstGeom prst="rect">
+            <a:avLst/>
+          </a:prstGeom>
+          <a:noFill/>
+          <a:ln/>
+        </p:spPr>
+        <p:txBody>
+          <a:bodyPr wrap="square" rtlCol="0" anchor="ctr"/>
+          <a:lstStyle/>
+          <a:p>
+            <a:pPr indent="0" marL="0">
+              <a:buNone/>
             </a:pPr>
             <a:r>
-              <a:rPr lang="en-US" sz="1600" dirty="0">
+              <a:rPr lang="en-US" sz="1100" dirty="0">
                 <a:solidFill>
-                  <a:srgbClr val="CADCFC"/>
+                  <a:srgbClr val="E9C46A"/>
                 </a:solidFill>
                 <a:latin typeface="Calibri" pitchFamily="34" charset="0"/>
                 <a:ea typeface="Calibri" pitchFamily="34" charset="-122"/>
                 <a:cs typeface="Calibri" pitchFamily="34" charset="-120"/>
               </a:rPr>
-              <a:t>Mixed numbers: convert to improper first, or add whole parts separately</a:t>
-            </a:r>
-            <a:endParaRPr lang="en-US" sz="1600" dirty="0"/>
-          </a:p>
-        </p:txBody>
-      </p:sp>
-      <p:sp>
-        <p:nvSpPr>
-          <p:cNvPr id="5" name="Text 3"/>
-          <p:cNvSpPr/>
-          <p:nvPr/>
-        </p:nvSpPr>
-        <p:spPr>
-          <a:xfrm>
-            <a:off x="548640" y="4572000"/>
-            <a:ext cx="3657600" cy="274320"/>
-          </a:xfrm>
-          <a:prstGeom prst="rect">
-            <a:avLst/>
-          </a:prstGeom>
-          <a:noFill/>
-          <a:ln/>
-        </p:spPr>
-        <p:txBody>
-          <a:bodyPr wrap="square" rtlCol="0" anchor="ctr"/>
-          <a:lstStyle/>
-          <a:p>
-            <a:pPr indent="0" marL="0">
-              <a:buNone/>
-            </a:pPr>
-            <a:r>
-              <a:rPr lang="en-US" sz="1000" dirty="0">
-                <a:solidFill>
-                  <a:srgbClr val="6B6660"/>
-                </a:solidFill>
-              </a:rPr>
               <a:t>mrzocchi.com</a:t>
             </a:r>
-            <a:endParaRPr lang="en-US" sz="1000" dirty="0"/>
+            <a:endParaRPr lang="en-US" sz="1100" dirty="0"/>
           </a:p>
         </p:txBody>
       </p:sp>

--- a/static/ppts/G6_Math_T2_Add_Sub_Fractions.pptx
+++ b/static/ppts/G6_Math_T2_Add_Sub_Fractions.pptx
@@ -10,9 +10,11 @@
     <p:sldId id="258" r:id="rId4"/>
     <p:sldId id="259" r:id="rId5"/>
     <p:sldId id="260" r:id="rId6"/>
+    <p:sldId id="261" r:id="rId7"/>
+    <p:sldId id="262" r:id="rId8"/>
   </p:sldIdLst>
   <p:notesMasterIdLst>
-    <p:notesMasterId r:id="rId7"/>
+    <p:notesMasterId r:id="rId9"/>
   </p:notesMasterIdLst>
   <p:sldSz cx="9144000" cy="5143500"/>
   <p:notesSz cx="5143500" cy="9144000"/>
@@ -900,6 +902,182 @@
 </p:notes>
 </file>
 
+<file path=ppt/notesSlides/notesSlide6.xml><?xml version="1.0" encoding="utf-8"?>
+<p:notes xmlns:a="http://schemas.openxmlformats.org/drawingml/2006/main" xmlns:r="http://schemas.openxmlformats.org/officeDocument/2006/relationships" xmlns:p="http://schemas.openxmlformats.org/presentationml/2006/main">
+  <p:cSld>
+    <p:spTree>
+      <p:nvGrpSpPr>
+        <p:cNvPr id="1" name=""/>
+        <p:cNvGrpSpPr/>
+        <p:nvPr/>
+      </p:nvGrpSpPr>
+      <p:grpSpPr>
+        <a:xfrm>
+          <a:off x="0" y="0"/>
+          <a:ext cx="0" cy="0"/>
+          <a:chOff x="0" y="0"/>
+          <a:chExt cx="0" cy="0"/>
+        </a:xfrm>
+      </p:grpSpPr>
+      <p:sp>
+        <p:nvSpPr>
+          <p:cNvPr id="2" name="Slide Image Placeholder 1"/>
+          <p:cNvSpPr>
+            <a:spLocks noGrp="1" noRot="1" noChangeAspect="1"/>
+          </p:cNvSpPr>
+          <p:nvPr>
+            <p:ph type="sldImg"/>
+          </p:nvPr>
+        </p:nvSpPr>
+        <p:spPr/>
+      </p:sp>
+      <p:sp>
+        <p:nvSpPr>
+          <p:cNvPr id="3" name="Notes Placeholder 2"/>
+          <p:cNvSpPr>
+            <a:spLocks noGrp="1"/>
+          </p:cNvSpPr>
+          <p:nvPr>
+            <p:ph type="body" idx="1"/>
+          </p:nvPr>
+        </p:nvSpPr>
+        <p:spPr/>
+        <p:txBody>
+          <a:bodyPr/>
+          <a:lstStyle/>
+          <a:p>
+            <a:r>
+              <a:rPr lang="en-US" dirty="0"/>
+              <a:t/>
+            </a:r>
+            <a:endParaRPr lang="en-US" dirty="0"/>
+          </a:p>
+        </p:txBody>
+      </p:sp>
+      <p:sp>
+        <p:nvSpPr>
+          <p:cNvPr id="4" name="Slide Number Placeholder 3"/>
+          <p:cNvSpPr>
+            <a:spLocks noGrp="1"/>
+          </p:cNvSpPr>
+          <p:nvPr>
+            <p:ph type="sldNum" sz="quarter" idx="10"/>
+          </p:nvPr>
+        </p:nvSpPr>
+        <p:spPr/>
+        <p:txBody>
+          <a:bodyPr/>
+          <a:lstStyle/>
+          <a:p>
+            <a:fld id="{F7021451-1387-4CA6-816F-3879F97B5CBC}" type="slidenum">
+              <a:rPr lang="en-US"/>
+              <a:t>6</a:t>
+            </a:fld>
+            <a:endParaRPr lang="en-US"/>
+          </a:p>
+        </p:txBody>
+      </p:sp>
+    </p:spTree>
+    <p:extLst>
+      <p:ext uri="{BB962C8B-B14F-4D97-AF65-F5344CB8AC3E}">
+        <p14:creationId xmlns:p14="http://schemas.microsoft.com/office/powerpoint/2010/main" val="1024086991"/>
+      </p:ext>
+    </p:extLst>
+  </p:cSld>
+  <p:clrMapOvr>
+    <a:masterClrMapping/>
+  </p:clrMapOvr>
+</p:notes>
+</file>
+
+<file path=ppt/notesSlides/notesSlide7.xml><?xml version="1.0" encoding="utf-8"?>
+<p:notes xmlns:a="http://schemas.openxmlformats.org/drawingml/2006/main" xmlns:r="http://schemas.openxmlformats.org/officeDocument/2006/relationships" xmlns:p="http://schemas.openxmlformats.org/presentationml/2006/main">
+  <p:cSld>
+    <p:spTree>
+      <p:nvGrpSpPr>
+        <p:cNvPr id="1" name=""/>
+        <p:cNvGrpSpPr/>
+        <p:nvPr/>
+      </p:nvGrpSpPr>
+      <p:grpSpPr>
+        <a:xfrm>
+          <a:off x="0" y="0"/>
+          <a:ext cx="0" cy="0"/>
+          <a:chOff x="0" y="0"/>
+          <a:chExt cx="0" cy="0"/>
+        </a:xfrm>
+      </p:grpSpPr>
+      <p:sp>
+        <p:nvSpPr>
+          <p:cNvPr id="2" name="Slide Image Placeholder 1"/>
+          <p:cNvSpPr>
+            <a:spLocks noGrp="1" noRot="1" noChangeAspect="1"/>
+          </p:cNvSpPr>
+          <p:nvPr>
+            <p:ph type="sldImg"/>
+          </p:nvPr>
+        </p:nvSpPr>
+        <p:spPr/>
+      </p:sp>
+      <p:sp>
+        <p:nvSpPr>
+          <p:cNvPr id="3" name="Notes Placeholder 2"/>
+          <p:cNvSpPr>
+            <a:spLocks noGrp="1"/>
+          </p:cNvSpPr>
+          <p:nvPr>
+            <p:ph type="body" idx="1"/>
+          </p:nvPr>
+        </p:nvSpPr>
+        <p:spPr/>
+        <p:txBody>
+          <a:bodyPr/>
+          <a:lstStyle/>
+          <a:p>
+            <a:r>
+              <a:rPr lang="en-US" dirty="0"/>
+              <a:t/>
+            </a:r>
+            <a:endParaRPr lang="en-US" dirty="0"/>
+          </a:p>
+        </p:txBody>
+      </p:sp>
+      <p:sp>
+        <p:nvSpPr>
+          <p:cNvPr id="4" name="Slide Number Placeholder 3"/>
+          <p:cNvSpPr>
+            <a:spLocks noGrp="1"/>
+          </p:cNvSpPr>
+          <p:nvPr>
+            <p:ph type="sldNum" sz="quarter" idx="10"/>
+          </p:nvPr>
+        </p:nvSpPr>
+        <p:spPr/>
+        <p:txBody>
+          <a:bodyPr/>
+          <a:lstStyle/>
+          <a:p>
+            <a:fld id="{F7021451-1387-4CA6-816F-3879F97B5CBC}" type="slidenum">
+              <a:rPr lang="en-US"/>
+              <a:t>7</a:t>
+            </a:fld>
+            <a:endParaRPr lang="en-US"/>
+          </a:p>
+        </p:txBody>
+      </p:sp>
+    </p:spTree>
+    <p:extLst>
+      <p:ext uri="{BB962C8B-B14F-4D97-AF65-F5344CB8AC3E}">
+        <p14:creationId xmlns:p14="http://schemas.microsoft.com/office/powerpoint/2010/main" val="1024086991"/>
+      </p:ext>
+    </p:extLst>
+  </p:cSld>
+  <p:clrMapOvr>
+    <a:masterClrMapping/>
+  </p:clrMapOvr>
+</p:notes>
+</file>
+
 <file path=ppt/slideLayouts/slideLayout1.xml><?xml version="1.0" encoding="utf-8"?>
 <p:sldLayout xmlns:a="http://schemas.openxmlformats.org/drawingml/2006/main" xmlns:r="http://schemas.openxmlformats.org/officeDocument/2006/relationships" xmlns:p="http://schemas.openxmlformats.org/presentationml/2006/main" preserve="1">
   <p:cSld name="DEFAULT">
@@ -1210,13 +1388,6 @@
 <file path=ppt/slides/slide1.xml><?xml version="1.0" encoding="utf-8"?>
 <p:sld xmlns:a="http://schemas.openxmlformats.org/drawingml/2006/main" xmlns:r="http://schemas.openxmlformats.org/officeDocument/2006/relationships" xmlns:p="http://schemas.openxmlformats.org/presentationml/2006/main">
   <p:cSld name="Slide 1">
-    <p:bg>
-      <p:bgPr>
-        <a:solidFill>
-          <a:srgbClr val="1B2A4A"/>
-        </a:solidFill>
-      </p:bgPr>
-    </p:bg>
     <p:spTree>
       <p:nvGrpSpPr>
         <p:cNvPr id="1" name=""/>
@@ -1240,7 +1411,27 @@
         <p:spPr>
           <a:xfrm>
             <a:off x="0" y="0"/>
-            <a:ext cx="109728" cy="5143500"/>
+            <a:ext cx="9144000" cy="5143500"/>
+          </a:xfrm>
+          <a:prstGeom prst="rect">
+            <a:avLst/>
+          </a:prstGeom>
+          <a:solidFill>
+            <a:srgbClr val="1B2A4A"/>
+          </a:solidFill>
+          <a:ln/>
+        </p:spPr>
+      </p:sp>
+      <p:sp>
+        <p:nvSpPr>
+          <p:cNvPr id="3" name="Shape 1"/>
+          <p:cNvSpPr/>
+          <p:nvPr/>
+        </p:nvSpPr>
+        <p:spPr>
+          <a:xfrm>
+            <a:off x="0" y="4777740"/>
+            <a:ext cx="9144000" cy="365760"/>
           </a:xfrm>
           <a:prstGeom prst="rect">
             <a:avLst/>
@@ -1253,14 +1444,36 @@
       </p:sp>
       <p:sp>
         <p:nvSpPr>
-          <p:cNvPr id="3" name="Text 1"/>
-          <p:cNvSpPr/>
-          <p:nvPr/>
-        </p:nvSpPr>
-        <p:spPr>
-          <a:xfrm>
-            <a:off x="731520" y="1097280"/>
-            <a:ext cx="7772400" cy="1371600"/>
+          <p:cNvPr id="4" name="Shape 2"/>
+          <p:cNvSpPr/>
+          <p:nvPr/>
+        </p:nvSpPr>
+        <p:spPr>
+          <a:xfrm>
+            <a:off x="6858000" y="-1371600"/>
+            <a:ext cx="4572000" cy="4572000"/>
+          </a:xfrm>
+          <a:prstGeom prst="ellipse">
+            <a:avLst/>
+          </a:prstGeom>
+          <a:solidFill>
+            <a:srgbClr val="2A9D8F">
+              <a:alpha val="12000"/>
+            </a:srgbClr>
+          </a:solidFill>
+          <a:ln/>
+        </p:spPr>
+      </p:sp>
+      <p:sp>
+        <p:nvSpPr>
+          <p:cNvPr id="5" name="Text 3"/>
+          <p:cNvSpPr/>
+          <p:nvPr/>
+        </p:nvSpPr>
+        <p:spPr>
+          <a:xfrm>
+            <a:off x="731520" y="914400"/>
+            <a:ext cx="7680960" cy="457200"/>
           </a:xfrm>
           <a:prstGeom prst="rect">
             <a:avLst/>
@@ -1276,7 +1489,46 @@
               <a:buNone/>
             </a:pPr>
             <a:r>
-              <a:rPr lang="en-US" sz="4000" b="1" dirty="0">
+              <a:rPr lang="en-US" sz="1300" b="1" spc="500" kern="0" dirty="0">
+                <a:solidFill>
+                  <a:srgbClr val="2A9D8F"/>
+                </a:solidFill>
+                <a:latin typeface="Calibri" pitchFamily="34" charset="0"/>
+                <a:ea typeface="Calibri" pitchFamily="34" charset="-122"/>
+                <a:cs typeface="Calibri" pitchFamily="34" charset="-120"/>
+              </a:rPr>
+              <a:t>GRADE 6 MATHEMATICS</a:t>
+            </a:r>
+            <a:endParaRPr lang="en-US" sz="1300" dirty="0"/>
+          </a:p>
+        </p:txBody>
+      </p:sp>
+      <p:sp>
+        <p:nvSpPr>
+          <p:cNvPr id="6" name="Text 4"/>
+          <p:cNvSpPr/>
+          <p:nvPr/>
+        </p:nvSpPr>
+        <p:spPr>
+          <a:xfrm>
+            <a:off x="731520" y="1463040"/>
+            <a:ext cx="6858000" cy="1645920"/>
+          </a:xfrm>
+          <a:prstGeom prst="rect">
+            <a:avLst/>
+          </a:prstGeom>
+          <a:noFill/>
+          <a:ln/>
+        </p:spPr>
+        <p:txBody>
+          <a:bodyPr wrap="square" rtlCol="0" anchor="t"/>
+          <a:lstStyle/>
+          <a:p>
+            <a:pPr indent="0" marL="0">
+              <a:buNone/>
+            </a:pPr>
+            <a:r>
+              <a:rPr lang="en-US" sz="3800" b="1" dirty="0">
                 <a:solidFill>
                   <a:srgbClr val="FFFFFF"/>
                 </a:solidFill>
@@ -1284,46 +1536,63 @@
                 <a:ea typeface="Georgia" pitchFamily="34" charset="-122"/>
                 <a:cs typeface="Georgia" pitchFamily="34" charset="-120"/>
               </a:rPr>
-              <a:t>Adding &amp; Subtracting Fractions</a:t>
-            </a:r>
-            <a:endParaRPr lang="en-US" sz="4000" dirty="0"/>
-          </a:p>
-        </p:txBody>
-      </p:sp>
-      <p:sp>
-        <p:nvSpPr>
-          <p:cNvPr id="4" name="Text 2"/>
-          <p:cNvSpPr/>
-          <p:nvPr/>
-        </p:nvSpPr>
-        <p:spPr>
-          <a:xfrm>
-            <a:off x="731520" y="2560320"/>
-            <a:ext cx="7772400" cy="548640"/>
-          </a:xfrm>
-          <a:prstGeom prst="rect">
-            <a:avLst/>
-          </a:prstGeom>
-          <a:noFill/>
-          <a:ln/>
-        </p:spPr>
-        <p:txBody>
-          <a:bodyPr wrap="square" rtlCol="0" anchor="ctr"/>
-          <a:lstStyle/>
+              <a:t>Adding &amp; Subtracting</a:t>
+            </a:r>
+            <a:endParaRPr lang="en-US" sz="3800" dirty="0"/>
+          </a:p>
           <a:p>
             <a:pPr indent="0" marL="0">
               <a:buNone/>
             </a:pPr>
             <a:r>
-              <a:rPr lang="en-US" sz="1600" dirty="0">
-                <a:solidFill>
-                  <a:srgbClr val="E9C46A"/>
+              <a:rPr lang="en-US" sz="3800" b="1" dirty="0">
+                <a:solidFill>
+                  <a:srgbClr val="FFFFFF"/>
+                </a:solidFill>
+                <a:latin typeface="Georgia" pitchFamily="34" charset="0"/>
+                <a:ea typeface="Georgia" pitchFamily="34" charset="-122"/>
+                <a:cs typeface="Georgia" pitchFamily="34" charset="-120"/>
+              </a:rPr>
+              <a:t>Fractions</a:t>
+            </a:r>
+            <a:endParaRPr lang="en-US" sz="3800" dirty="0"/>
+          </a:p>
+        </p:txBody>
+      </p:sp>
+      <p:sp>
+        <p:nvSpPr>
+          <p:cNvPr id="7" name="Text 5"/>
+          <p:cNvSpPr/>
+          <p:nvPr/>
+        </p:nvSpPr>
+        <p:spPr>
+          <a:xfrm>
+            <a:off x="731520" y="3200400"/>
+            <a:ext cx="6400800" cy="548640"/>
+          </a:xfrm>
+          <a:prstGeom prst="rect">
+            <a:avLst/>
+          </a:prstGeom>
+          <a:noFill/>
+          <a:ln/>
+        </p:spPr>
+        <p:txBody>
+          <a:bodyPr wrap="square" rtlCol="0" anchor="ctr"/>
+          <a:lstStyle/>
+          <a:p>
+            <a:pPr indent="0" marL="0">
+              <a:buNone/>
+            </a:pPr>
+            <a:r>
+              <a:rPr lang="en-US" sz="1600" i="1" dirty="0">
+                <a:solidFill>
+                  <a:srgbClr val="9B9690"/>
                 </a:solidFill>
                 <a:latin typeface="Calibri" pitchFamily="34" charset="0"/>
                 <a:ea typeface="Calibri" pitchFamily="34" charset="-122"/>
                 <a:cs typeface="Calibri" pitchFamily="34" charset="-120"/>
               </a:rPr>
-              <a:t>Grade 6 Mathematics · Mr Zocchi</a:t>
+              <a:t>Combining and finding differences between fractions</a:t>
             </a:r>
             <a:endParaRPr lang="en-US" sz="1600" dirty="0"/>
           </a:p>
@@ -1331,36 +1600,14 @@
       </p:sp>
       <p:sp>
         <p:nvSpPr>
-          <p:cNvPr id="5" name="Shape 3"/>
-          <p:cNvSpPr/>
-          <p:nvPr/>
-        </p:nvSpPr>
-        <p:spPr>
-          <a:xfrm>
-            <a:off x="731520" y="3474720"/>
-            <a:ext cx="2011680" cy="411480"/>
-          </a:xfrm>
-          <a:prstGeom prst="roundRect">
-            <a:avLst>
-              <a:gd name="adj" fmla="val 17778"/>
-            </a:avLst>
-          </a:prstGeom>
-          <a:solidFill>
-            <a:srgbClr val="2A9D8F"/>
-          </a:solidFill>
-          <a:ln/>
-        </p:spPr>
-      </p:sp>
-      <p:sp>
-        <p:nvSpPr>
-          <p:cNvPr id="6" name="Text 4"/>
-          <p:cNvSpPr/>
-          <p:nvPr/>
-        </p:nvSpPr>
-        <p:spPr>
-          <a:xfrm>
-            <a:off x="731520" y="3474720"/>
-            <a:ext cx="2011680" cy="411480"/>
+          <p:cNvPr id="8" name="Text 6"/>
+          <p:cNvSpPr/>
+          <p:nvPr/>
+        </p:nvSpPr>
+        <p:spPr>
+          <a:xfrm>
+            <a:off x="731520" y="4297680"/>
+            <a:ext cx="2743200" cy="365760"/>
           </a:xfrm>
           <a:prstGeom prst="rect">
             <a:avLst/>
@@ -1372,21 +1619,21 @@
           <a:bodyPr wrap="square" rtlCol="0" anchor="ctr"/>
           <a:lstStyle/>
           <a:p>
-            <a:pPr algn="ctr" indent="0" marL="0">
+            <a:pPr indent="0" marL="0">
               <a:buNone/>
             </a:pPr>
             <a:r>
-              <a:rPr lang="en-US" sz="1200" b="1" dirty="0">
-                <a:solidFill>
-                  <a:srgbClr val="FFFFFF"/>
+              <a:rPr lang="en-US" sz="1100" dirty="0">
+                <a:solidFill>
+                  <a:srgbClr val="9B9690"/>
                 </a:solidFill>
                 <a:latin typeface="Calibri" pitchFamily="34" charset="0"/>
                 <a:ea typeface="Calibri" pitchFamily="34" charset="-122"/>
                 <a:cs typeface="Calibri" pitchFamily="34" charset="-120"/>
               </a:rPr>
-              <a:t>Term 2 · Fractions &amp; Decimals</a:t>
-            </a:r>
-            <a:endParaRPr lang="en-US" sz="1200" dirty="0"/>
+              <a:t>mrzocchi.com</a:t>
+            </a:r>
+            <a:endParaRPr lang="en-US" sz="1100" dirty="0"/>
           </a:p>
         </p:txBody>
       </p:sp>
@@ -1431,7 +1678,47 @@
         <p:spPr>
           <a:xfrm>
             <a:off x="0" y="0"/>
-            <a:ext cx="9144000" cy="54864"/>
+            <a:ext cx="9144000" cy="822960"/>
+          </a:xfrm>
+          <a:prstGeom prst="rect">
+            <a:avLst/>
+          </a:prstGeom>
+          <a:solidFill>
+            <a:srgbClr val="FFFFFF"/>
+          </a:solidFill>
+          <a:ln/>
+        </p:spPr>
+      </p:sp>
+      <p:sp>
+        <p:nvSpPr>
+          <p:cNvPr id="3" name="Shape 1"/>
+          <p:cNvSpPr/>
+          <p:nvPr/>
+        </p:nvSpPr>
+        <p:spPr>
+          <a:xfrm>
+            <a:off x="0" y="804672"/>
+            <a:ext cx="9144000" cy="27432"/>
+          </a:xfrm>
+          <a:prstGeom prst="rect">
+            <a:avLst/>
+          </a:prstGeom>
+          <a:solidFill>
+            <a:srgbClr val="E5E2DC"/>
+          </a:solidFill>
+          <a:ln/>
+        </p:spPr>
+      </p:sp>
+      <p:sp>
+        <p:nvSpPr>
+          <p:cNvPr id="4" name="Shape 2"/>
+          <p:cNvSpPr/>
+          <p:nvPr/>
+        </p:nvSpPr>
+        <p:spPr>
+          <a:xfrm>
+            <a:off x="548640" y="201168"/>
+            <a:ext cx="54864" cy="420624"/>
           </a:xfrm>
           <a:prstGeom prst="rect">
             <a:avLst/>
@@ -1444,14 +1731,14 @@
       </p:sp>
       <p:sp>
         <p:nvSpPr>
-          <p:cNvPr id="3" name="Text 1"/>
-          <p:cNvSpPr/>
-          <p:nvPr/>
-        </p:nvSpPr>
-        <p:spPr>
-          <a:xfrm>
-            <a:off x="7772400" y="4709160"/>
-            <a:ext cx="1097280" cy="320040"/>
+          <p:cNvPr id="5" name="Text 3"/>
+          <p:cNvSpPr/>
+          <p:nvPr/>
+        </p:nvSpPr>
+        <p:spPr>
+          <a:xfrm>
+            <a:off x="777240" y="137160"/>
+            <a:ext cx="7772400" cy="548640"/>
           </a:xfrm>
           <a:prstGeom prst="rect">
             <a:avLst/>
@@ -1460,37 +1747,37 @@
           <a:ln/>
         </p:spPr>
         <p:txBody>
-          <a:bodyPr wrap="square" rtlCol="0" anchor="ctr"/>
-          <a:lstStyle/>
-          <a:p>
-            <a:pPr algn="r" indent="0" marL="0">
+          <a:bodyPr wrap="square" lIns="0" tIns="0" rIns="0" bIns="0" rtlCol="0" anchor="ctr"/>
+          <a:lstStyle/>
+          <a:p>
+            <a:pPr indent="0" marL="0">
               <a:buNone/>
             </a:pPr>
             <a:r>
-              <a:rPr lang="en-US" sz="900" dirty="0">
-                <a:solidFill>
-                  <a:srgbClr val="6B6660"/>
-                </a:solidFill>
-                <a:latin typeface="Calibri" pitchFamily="34" charset="0"/>
-                <a:ea typeface="Calibri" pitchFamily="34" charset="-122"/>
-                <a:cs typeface="Calibri" pitchFamily="34" charset="-120"/>
-              </a:rPr>
-              <a:t>2 / 5</a:t>
-            </a:r>
-            <a:endParaRPr lang="en-US" sz="900" dirty="0"/>
-          </a:p>
-        </p:txBody>
-      </p:sp>
-      <p:sp>
-        <p:nvSpPr>
-          <p:cNvPr id="4" name="Shape 2"/>
-          <p:cNvSpPr/>
-          <p:nvPr/>
-        </p:nvSpPr>
-        <p:spPr>
-          <a:xfrm>
-            <a:off x="1371600" y="914400"/>
-            <a:ext cx="6400800" cy="3200400"/>
+              <a:rPr lang="en-US" sz="2000" b="1" dirty="0">
+                <a:solidFill>
+                  <a:srgbClr val="1B2A4A"/>
+                </a:solidFill>
+                <a:latin typeface="Georgia" pitchFamily="34" charset="0"/>
+                <a:ea typeface="Georgia" pitchFamily="34" charset="-122"/>
+                <a:cs typeface="Georgia" pitchFamily="34" charset="-120"/>
+              </a:rPr>
+              <a:t>Key Vocabulary</a:t>
+            </a:r>
+            <a:endParaRPr lang="en-US" sz="2000" dirty="0"/>
+          </a:p>
+        </p:txBody>
+      </p:sp>
+      <p:sp>
+        <p:nvSpPr>
+          <p:cNvPr id="6" name="Shape 4"/>
+          <p:cNvSpPr/>
+          <p:nvPr/>
+        </p:nvSpPr>
+        <p:spPr>
+          <a:xfrm>
+            <a:off x="731520" y="1051560"/>
+            <a:ext cx="3657600" cy="658368"/>
           </a:xfrm>
           <a:prstGeom prst="rect">
             <a:avLst/>
@@ -1498,12 +1785,7 @@
           <a:solidFill>
             <a:srgbClr val="FFFFFF"/>
           </a:solidFill>
-          <a:ln w="12700">
-            <a:solidFill>
-              <a:srgbClr val="E5E2DC"/>
-            </a:solidFill>
-            <a:prstDash val="solid"/>
-          </a:ln>
+          <a:ln/>
           <a:effectLst>
             <a:outerShdw sx="100000" sy="100000" kx="0" ky="0" algn="bl" rotWithShape="0" blurRad="50800" dist="25400" dir="8100000">
               <a:srgbClr val="000000">
@@ -1515,14 +1797,14 @@
       </p:sp>
       <p:sp>
         <p:nvSpPr>
-          <p:cNvPr id="5" name="Shape 3"/>
-          <p:cNvSpPr/>
-          <p:nvPr/>
-        </p:nvSpPr>
-        <p:spPr>
-          <a:xfrm>
-            <a:off x="1371600" y="914400"/>
-            <a:ext cx="91440" cy="3200400"/>
+          <p:cNvPr id="7" name="Shape 5"/>
+          <p:cNvSpPr/>
+          <p:nvPr/>
+        </p:nvSpPr>
+        <p:spPr>
+          <a:xfrm>
+            <a:off x="731520" y="1051560"/>
+            <a:ext cx="54864" cy="658368"/>
           </a:xfrm>
           <a:prstGeom prst="rect">
             <a:avLst/>
@@ -1535,14 +1817,14 @@
       </p:sp>
       <p:sp>
         <p:nvSpPr>
-          <p:cNvPr id="6" name="Text 4"/>
-          <p:cNvSpPr/>
-          <p:nvPr/>
-        </p:nvSpPr>
-        <p:spPr>
-          <a:xfrm>
-            <a:off x="1828800" y="1097280"/>
-            <a:ext cx="5669280" cy="640080"/>
+          <p:cNvPr id="8" name="Text 6"/>
+          <p:cNvSpPr/>
+          <p:nvPr/>
+        </p:nvSpPr>
+        <p:spPr>
+          <a:xfrm>
+            <a:off x="914400" y="1051560"/>
+            <a:ext cx="1463040" cy="658368"/>
           </a:xfrm>
           <a:prstGeom prst="rect">
             <a:avLst/>
@@ -1551,14 +1833,14 @@
           <a:ln/>
         </p:spPr>
         <p:txBody>
-          <a:bodyPr wrap="square" rtlCol="0" anchor="ctr"/>
+          <a:bodyPr wrap="square" lIns="0" tIns="0" rIns="0" bIns="0" rtlCol="0" anchor="ctr"/>
           <a:lstStyle/>
           <a:p>
             <a:pPr indent="0" marL="0">
               <a:buNone/>
             </a:pPr>
             <a:r>
-              <a:rPr lang="en-US" sz="2400" b="1" dirty="0">
+              <a:rPr lang="en-US" sz="1300" b="1" dirty="0">
                 <a:solidFill>
                   <a:srgbClr val="1B2A4A"/>
                 </a:solidFill>
@@ -1566,22 +1848,22 @@
                 <a:ea typeface="Georgia" pitchFamily="34" charset="-122"/>
                 <a:cs typeface="Georgia" pitchFamily="34" charset="-120"/>
               </a:rPr>
-              <a:t>Adding and Subtracting Fractions</a:t>
-            </a:r>
-            <a:endParaRPr lang="en-US" sz="2400" dirty="0"/>
-          </a:p>
-        </p:txBody>
-      </p:sp>
-      <p:sp>
-        <p:nvSpPr>
-          <p:cNvPr id="7" name="Text 5"/>
-          <p:cNvSpPr/>
-          <p:nvPr/>
-        </p:nvSpPr>
-        <p:spPr>
-          <a:xfrm>
-            <a:off x="1828800" y="1828800"/>
-            <a:ext cx="5669280" cy="2011680"/>
+              <a:t>Common denom.</a:t>
+            </a:r>
+            <a:endParaRPr lang="en-US" sz="1300" dirty="0"/>
+          </a:p>
+        </p:txBody>
+      </p:sp>
+      <p:sp>
+        <p:nvSpPr>
+          <p:cNvPr id="9" name="Text 7"/>
+          <p:cNvSpPr/>
+          <p:nvPr/>
+        </p:nvSpPr>
+        <p:spPr>
+          <a:xfrm>
+            <a:off x="2377440" y="1051560"/>
+            <a:ext cx="1920240" cy="658368"/>
           </a:xfrm>
           <a:prstGeom prst="rect">
             <a:avLst/>
@@ -1590,27 +1872,399 @@
           <a:ln/>
         </p:spPr>
         <p:txBody>
-          <a:bodyPr wrap="square" rtlCol="0" anchor="t"/>
+          <a:bodyPr wrap="square" lIns="0" tIns="0" rIns="0" bIns="0" rtlCol="0" anchor="ctr"/>
           <a:lstStyle/>
           <a:p>
             <a:pPr indent="0" marL="0">
-              <a:lnSpc>
-                <a:spcPct val="130000"/>
-              </a:lnSpc>
               <a:buNone/>
             </a:pPr>
             <a:r>
-              <a:rPr lang="en-US" sz="1500" dirty="0">
-                <a:solidFill>
-                  <a:srgbClr val="3D3A36"/>
+              <a:rPr lang="en-US" sz="1100" dirty="0">
+                <a:solidFill>
+                  <a:srgbClr val="6B6660"/>
                 </a:solidFill>
                 <a:latin typeface="Calibri" pitchFamily="34" charset="0"/>
                 <a:ea typeface="Calibri" pitchFamily="34" charset="-122"/>
                 <a:cs typeface="Calibri" pitchFamily="34" charset="-120"/>
               </a:rPr>
-              <a:t>To add or subtract fractions, the denominators must be THE SAME. If they're different, find a common denominator first. Then add or subtract the numerators only — the denominator stays the same. Always simplify your answer.</a:t>
-            </a:r>
-            <a:endParaRPr lang="en-US" sz="1500" dirty="0"/>
+              <a:t>Same denominator on both fractions</a:t>
+            </a:r>
+            <a:endParaRPr lang="en-US" sz="1100" dirty="0"/>
+          </a:p>
+        </p:txBody>
+      </p:sp>
+      <p:sp>
+        <p:nvSpPr>
+          <p:cNvPr id="10" name="Shape 8"/>
+          <p:cNvSpPr/>
+          <p:nvPr/>
+        </p:nvSpPr>
+        <p:spPr>
+          <a:xfrm>
+            <a:off x="4754880" y="1051560"/>
+            <a:ext cx="3657600" cy="658368"/>
+          </a:xfrm>
+          <a:prstGeom prst="rect">
+            <a:avLst/>
+          </a:prstGeom>
+          <a:solidFill>
+            <a:srgbClr val="FFFFFF"/>
+          </a:solidFill>
+          <a:ln/>
+          <a:effectLst>
+            <a:outerShdw sx="100000" sy="100000" kx="0" ky="0" algn="bl" rotWithShape="0" blurRad="50800" dist="25400" dir="8100000">
+              <a:srgbClr val="000000">
+                <a:alpha val="10000"/>
+              </a:srgbClr>
+            </a:outerShdw>
+          </a:effectLst>
+        </p:spPr>
+      </p:sp>
+      <p:sp>
+        <p:nvSpPr>
+          <p:cNvPr id="11" name="Shape 9"/>
+          <p:cNvSpPr/>
+          <p:nvPr/>
+        </p:nvSpPr>
+        <p:spPr>
+          <a:xfrm>
+            <a:off x="4754880" y="1051560"/>
+            <a:ext cx="54864" cy="658368"/>
+          </a:xfrm>
+          <a:prstGeom prst="rect">
+            <a:avLst/>
+          </a:prstGeom>
+          <a:solidFill>
+            <a:srgbClr val="2A9D8F"/>
+          </a:solidFill>
+          <a:ln/>
+        </p:spPr>
+      </p:sp>
+      <p:sp>
+        <p:nvSpPr>
+          <p:cNvPr id="12" name="Text 10"/>
+          <p:cNvSpPr/>
+          <p:nvPr/>
+        </p:nvSpPr>
+        <p:spPr>
+          <a:xfrm>
+            <a:off x="4937760" y="1051560"/>
+            <a:ext cx="1463040" cy="658368"/>
+          </a:xfrm>
+          <a:prstGeom prst="rect">
+            <a:avLst/>
+          </a:prstGeom>
+          <a:noFill/>
+          <a:ln/>
+        </p:spPr>
+        <p:txBody>
+          <a:bodyPr wrap="square" lIns="0" tIns="0" rIns="0" bIns="0" rtlCol="0" anchor="ctr"/>
+          <a:lstStyle/>
+          <a:p>
+            <a:pPr indent="0" marL="0">
+              <a:buNone/>
+            </a:pPr>
+            <a:r>
+              <a:rPr lang="en-US" sz="1300" b="1" dirty="0">
+                <a:solidFill>
+                  <a:srgbClr val="1B2A4A"/>
+                </a:solidFill>
+                <a:latin typeface="Georgia" pitchFamily="34" charset="0"/>
+                <a:ea typeface="Georgia" pitchFamily="34" charset="-122"/>
+                <a:cs typeface="Georgia" pitchFamily="34" charset="-120"/>
+              </a:rPr>
+              <a:t>LCM</a:t>
+            </a:r>
+            <a:endParaRPr lang="en-US" sz="1300" dirty="0"/>
+          </a:p>
+        </p:txBody>
+      </p:sp>
+      <p:sp>
+        <p:nvSpPr>
+          <p:cNvPr id="13" name="Text 11"/>
+          <p:cNvSpPr/>
+          <p:nvPr/>
+        </p:nvSpPr>
+        <p:spPr>
+          <a:xfrm>
+            <a:off x="6400800" y="1051560"/>
+            <a:ext cx="1920240" cy="658368"/>
+          </a:xfrm>
+          <a:prstGeom prst="rect">
+            <a:avLst/>
+          </a:prstGeom>
+          <a:noFill/>
+          <a:ln/>
+        </p:spPr>
+        <p:txBody>
+          <a:bodyPr wrap="square" lIns="0" tIns="0" rIns="0" bIns="0" rtlCol="0" anchor="ctr"/>
+          <a:lstStyle/>
+          <a:p>
+            <a:pPr indent="0" marL="0">
+              <a:buNone/>
+            </a:pPr>
+            <a:r>
+              <a:rPr lang="en-US" sz="1100" dirty="0">
+                <a:solidFill>
+                  <a:srgbClr val="6B6660"/>
+                </a:solidFill>
+                <a:latin typeface="Calibri" pitchFamily="34" charset="0"/>
+                <a:ea typeface="Calibri" pitchFamily="34" charset="-122"/>
+                <a:cs typeface="Calibri" pitchFamily="34" charset="-120"/>
+              </a:rPr>
+              <a:t>Lowest Common Multiple — best choice for common denominator</a:t>
+            </a:r>
+            <a:endParaRPr lang="en-US" sz="1100" dirty="0"/>
+          </a:p>
+        </p:txBody>
+      </p:sp>
+      <p:sp>
+        <p:nvSpPr>
+          <p:cNvPr id="14" name="Shape 12"/>
+          <p:cNvSpPr/>
+          <p:nvPr/>
+        </p:nvSpPr>
+        <p:spPr>
+          <a:xfrm>
+            <a:off x="731520" y="1819656"/>
+            <a:ext cx="3657600" cy="658368"/>
+          </a:xfrm>
+          <a:prstGeom prst="rect">
+            <a:avLst/>
+          </a:prstGeom>
+          <a:solidFill>
+            <a:srgbClr val="FFFFFF"/>
+          </a:solidFill>
+          <a:ln/>
+          <a:effectLst>
+            <a:outerShdw sx="100000" sy="100000" kx="0" ky="0" algn="bl" rotWithShape="0" blurRad="50800" dist="25400" dir="8100000">
+              <a:srgbClr val="000000">
+                <a:alpha val="10000"/>
+              </a:srgbClr>
+            </a:outerShdw>
+          </a:effectLst>
+        </p:spPr>
+      </p:sp>
+      <p:sp>
+        <p:nvSpPr>
+          <p:cNvPr id="15" name="Shape 13"/>
+          <p:cNvSpPr/>
+          <p:nvPr/>
+        </p:nvSpPr>
+        <p:spPr>
+          <a:xfrm>
+            <a:off x="731520" y="1819656"/>
+            <a:ext cx="54864" cy="658368"/>
+          </a:xfrm>
+          <a:prstGeom prst="rect">
+            <a:avLst/>
+          </a:prstGeom>
+          <a:solidFill>
+            <a:srgbClr val="2A9D8F"/>
+          </a:solidFill>
+          <a:ln/>
+        </p:spPr>
+      </p:sp>
+      <p:sp>
+        <p:nvSpPr>
+          <p:cNvPr id="16" name="Text 14"/>
+          <p:cNvSpPr/>
+          <p:nvPr/>
+        </p:nvSpPr>
+        <p:spPr>
+          <a:xfrm>
+            <a:off x="914400" y="1819656"/>
+            <a:ext cx="1463040" cy="658368"/>
+          </a:xfrm>
+          <a:prstGeom prst="rect">
+            <a:avLst/>
+          </a:prstGeom>
+          <a:noFill/>
+          <a:ln/>
+        </p:spPr>
+        <p:txBody>
+          <a:bodyPr wrap="square" lIns="0" tIns="0" rIns="0" bIns="0" rtlCol="0" anchor="ctr"/>
+          <a:lstStyle/>
+          <a:p>
+            <a:pPr indent="0" marL="0">
+              <a:buNone/>
+            </a:pPr>
+            <a:r>
+              <a:rPr lang="en-US" sz="1300" b="1" dirty="0">
+                <a:solidFill>
+                  <a:srgbClr val="1B2A4A"/>
+                </a:solidFill>
+                <a:latin typeface="Georgia" pitchFamily="34" charset="0"/>
+                <a:ea typeface="Georgia" pitchFamily="34" charset="-122"/>
+                <a:cs typeface="Georgia" pitchFamily="34" charset="-120"/>
+              </a:rPr>
+              <a:t>Convert</a:t>
+            </a:r>
+            <a:endParaRPr lang="en-US" sz="1300" dirty="0"/>
+          </a:p>
+        </p:txBody>
+      </p:sp>
+      <p:sp>
+        <p:nvSpPr>
+          <p:cNvPr id="17" name="Text 15"/>
+          <p:cNvSpPr/>
+          <p:nvPr/>
+        </p:nvSpPr>
+        <p:spPr>
+          <a:xfrm>
+            <a:off x="2377440" y="1819656"/>
+            <a:ext cx="1920240" cy="658368"/>
+          </a:xfrm>
+          <a:prstGeom prst="rect">
+            <a:avLst/>
+          </a:prstGeom>
+          <a:noFill/>
+          <a:ln/>
+        </p:spPr>
+        <p:txBody>
+          <a:bodyPr wrap="square" lIns="0" tIns="0" rIns="0" bIns="0" rtlCol="0" anchor="ctr"/>
+          <a:lstStyle/>
+          <a:p>
+            <a:pPr indent="0" marL="0">
+              <a:buNone/>
+            </a:pPr>
+            <a:r>
+              <a:rPr lang="en-US" sz="1100" dirty="0">
+                <a:solidFill>
+                  <a:srgbClr val="6B6660"/>
+                </a:solidFill>
+                <a:latin typeface="Calibri" pitchFamily="34" charset="0"/>
+                <a:ea typeface="Calibri" pitchFamily="34" charset="-122"/>
+                <a:cs typeface="Calibri" pitchFamily="34" charset="-120"/>
+              </a:rPr>
+              <a:t>Change to an equivalent fraction</a:t>
+            </a:r>
+            <a:endParaRPr lang="en-US" sz="1100" dirty="0"/>
+          </a:p>
+        </p:txBody>
+      </p:sp>
+      <p:sp>
+        <p:nvSpPr>
+          <p:cNvPr id="18" name="Shape 16"/>
+          <p:cNvSpPr/>
+          <p:nvPr/>
+        </p:nvSpPr>
+        <p:spPr>
+          <a:xfrm>
+            <a:off x="4754880" y="1819656"/>
+            <a:ext cx="3657600" cy="658368"/>
+          </a:xfrm>
+          <a:prstGeom prst="rect">
+            <a:avLst/>
+          </a:prstGeom>
+          <a:solidFill>
+            <a:srgbClr val="FFFFFF"/>
+          </a:solidFill>
+          <a:ln/>
+          <a:effectLst>
+            <a:outerShdw sx="100000" sy="100000" kx="0" ky="0" algn="bl" rotWithShape="0" blurRad="50800" dist="25400" dir="8100000">
+              <a:srgbClr val="000000">
+                <a:alpha val="10000"/>
+              </a:srgbClr>
+            </a:outerShdw>
+          </a:effectLst>
+        </p:spPr>
+      </p:sp>
+      <p:sp>
+        <p:nvSpPr>
+          <p:cNvPr id="19" name="Shape 17"/>
+          <p:cNvSpPr/>
+          <p:nvPr/>
+        </p:nvSpPr>
+        <p:spPr>
+          <a:xfrm>
+            <a:off x="4754880" y="1819656"/>
+            <a:ext cx="54864" cy="658368"/>
+          </a:xfrm>
+          <a:prstGeom prst="rect">
+            <a:avLst/>
+          </a:prstGeom>
+          <a:solidFill>
+            <a:srgbClr val="2A9D8F"/>
+          </a:solidFill>
+          <a:ln/>
+        </p:spPr>
+      </p:sp>
+      <p:sp>
+        <p:nvSpPr>
+          <p:cNvPr id="20" name="Text 18"/>
+          <p:cNvSpPr/>
+          <p:nvPr/>
+        </p:nvSpPr>
+        <p:spPr>
+          <a:xfrm>
+            <a:off x="4937760" y="1819656"/>
+            <a:ext cx="1463040" cy="658368"/>
+          </a:xfrm>
+          <a:prstGeom prst="rect">
+            <a:avLst/>
+          </a:prstGeom>
+          <a:noFill/>
+          <a:ln/>
+        </p:spPr>
+        <p:txBody>
+          <a:bodyPr wrap="square" lIns="0" tIns="0" rIns="0" bIns="0" rtlCol="0" anchor="ctr"/>
+          <a:lstStyle/>
+          <a:p>
+            <a:pPr indent="0" marL="0">
+              <a:buNone/>
+            </a:pPr>
+            <a:r>
+              <a:rPr lang="en-US" sz="1300" b="1" dirty="0">
+                <a:solidFill>
+                  <a:srgbClr val="1B2A4A"/>
+                </a:solidFill>
+                <a:latin typeface="Georgia" pitchFamily="34" charset="0"/>
+                <a:ea typeface="Georgia" pitchFamily="34" charset="-122"/>
+                <a:cs typeface="Georgia" pitchFamily="34" charset="-120"/>
+              </a:rPr>
+              <a:t>Simplify</a:t>
+            </a:r>
+            <a:endParaRPr lang="en-US" sz="1300" dirty="0"/>
+          </a:p>
+        </p:txBody>
+      </p:sp>
+      <p:sp>
+        <p:nvSpPr>
+          <p:cNvPr id="21" name="Text 19"/>
+          <p:cNvSpPr/>
+          <p:nvPr/>
+        </p:nvSpPr>
+        <p:spPr>
+          <a:xfrm>
+            <a:off x="6400800" y="1819656"/>
+            <a:ext cx="1920240" cy="658368"/>
+          </a:xfrm>
+          <a:prstGeom prst="rect">
+            <a:avLst/>
+          </a:prstGeom>
+          <a:noFill/>
+          <a:ln/>
+        </p:spPr>
+        <p:txBody>
+          <a:bodyPr wrap="square" lIns="0" tIns="0" rIns="0" bIns="0" rtlCol="0" anchor="ctr"/>
+          <a:lstStyle/>
+          <a:p>
+            <a:pPr indent="0" marL="0">
+              <a:buNone/>
+            </a:pPr>
+            <a:r>
+              <a:rPr lang="en-US" sz="1100" dirty="0">
+                <a:solidFill>
+                  <a:srgbClr val="6B6660"/>
+                </a:solidFill>
+                <a:latin typeface="Calibri" pitchFamily="34" charset="0"/>
+                <a:ea typeface="Calibri" pitchFamily="34" charset="-122"/>
+                <a:cs typeface="Calibri" pitchFamily="34" charset="-120"/>
+              </a:rPr>
+              <a:t>Reduce the answer to lowest terms</a:t>
+            </a:r>
+            <a:endParaRPr lang="en-US" sz="1100" dirty="0"/>
           </a:p>
         </p:txBody>
       </p:sp>
@@ -1655,7 +2309,47 @@
         <p:spPr>
           <a:xfrm>
             <a:off x="0" y="0"/>
-            <a:ext cx="9144000" cy="54864"/>
+            <a:ext cx="9144000" cy="822960"/>
+          </a:xfrm>
+          <a:prstGeom prst="rect">
+            <a:avLst/>
+          </a:prstGeom>
+          <a:solidFill>
+            <a:srgbClr val="FFFFFF"/>
+          </a:solidFill>
+          <a:ln/>
+        </p:spPr>
+      </p:sp>
+      <p:sp>
+        <p:nvSpPr>
+          <p:cNvPr id="3" name="Shape 1"/>
+          <p:cNvSpPr/>
+          <p:nvPr/>
+        </p:nvSpPr>
+        <p:spPr>
+          <a:xfrm>
+            <a:off x="0" y="804672"/>
+            <a:ext cx="9144000" cy="27432"/>
+          </a:xfrm>
+          <a:prstGeom prst="rect">
+            <a:avLst/>
+          </a:prstGeom>
+          <a:solidFill>
+            <a:srgbClr val="E5E2DC"/>
+          </a:solidFill>
+          <a:ln/>
+        </p:spPr>
+      </p:sp>
+      <p:sp>
+        <p:nvSpPr>
+          <p:cNvPr id="4" name="Shape 2"/>
+          <p:cNvSpPr/>
+          <p:nvPr/>
+        </p:nvSpPr>
+        <p:spPr>
+          <a:xfrm>
+            <a:off x="548640" y="201168"/>
+            <a:ext cx="54864" cy="420624"/>
           </a:xfrm>
           <a:prstGeom prst="rect">
             <a:avLst/>
@@ -1668,14 +2362,14 @@
       </p:sp>
       <p:sp>
         <p:nvSpPr>
-          <p:cNvPr id="3" name="Text 1"/>
-          <p:cNvSpPr/>
-          <p:nvPr/>
-        </p:nvSpPr>
-        <p:spPr>
-          <a:xfrm>
-            <a:off x="7772400" y="4709160"/>
-            <a:ext cx="1097280" cy="320040"/>
+          <p:cNvPr id="5" name="Text 3"/>
+          <p:cNvSpPr/>
+          <p:nvPr/>
+        </p:nvSpPr>
+        <p:spPr>
+          <a:xfrm>
+            <a:off x="777240" y="137160"/>
+            <a:ext cx="7772400" cy="548640"/>
           </a:xfrm>
           <a:prstGeom prst="rect">
             <a:avLst/>
@@ -1684,53 +2378,14 @@
           <a:ln/>
         </p:spPr>
         <p:txBody>
-          <a:bodyPr wrap="square" rtlCol="0" anchor="ctr"/>
-          <a:lstStyle/>
-          <a:p>
-            <a:pPr algn="r" indent="0" marL="0">
-              <a:buNone/>
-            </a:pPr>
-            <a:r>
-              <a:rPr lang="en-US" sz="900" dirty="0">
-                <a:solidFill>
-                  <a:srgbClr val="6B6660"/>
-                </a:solidFill>
-                <a:latin typeface="Calibri" pitchFamily="34" charset="0"/>
-                <a:ea typeface="Calibri" pitchFamily="34" charset="-122"/>
-                <a:cs typeface="Calibri" pitchFamily="34" charset="-120"/>
-              </a:rPr>
-              <a:t>3 / 5</a:t>
-            </a:r>
-            <a:endParaRPr lang="en-US" sz="900" dirty="0"/>
-          </a:p>
-        </p:txBody>
-      </p:sp>
-      <p:sp>
-        <p:nvSpPr>
-          <p:cNvPr id="4" name="Text 2"/>
-          <p:cNvSpPr/>
-          <p:nvPr/>
-        </p:nvSpPr>
-        <p:spPr>
-          <a:xfrm>
-            <a:off x="457200" y="274320"/>
-            <a:ext cx="8229600" cy="640080"/>
-          </a:xfrm>
-          <a:prstGeom prst="rect">
-            <a:avLst/>
-          </a:prstGeom>
-          <a:noFill/>
-          <a:ln/>
-        </p:spPr>
-        <p:txBody>
-          <a:bodyPr wrap="square" rtlCol="0" anchor="ctr"/>
+          <a:bodyPr wrap="square" lIns="0" tIns="0" rIns="0" bIns="0" rtlCol="0" anchor="ctr"/>
           <a:lstStyle/>
           <a:p>
             <a:pPr indent="0" marL="0">
               <a:buNone/>
             </a:pPr>
             <a:r>
-              <a:rPr lang="en-US" sz="2600" b="1" dirty="0">
+              <a:rPr lang="en-US" sz="2000" b="1" dirty="0">
                 <a:solidFill>
                   <a:srgbClr val="1B2A4A"/>
                 </a:solidFill>
@@ -1738,22 +2393,22 @@
                 <a:ea typeface="Georgia" pitchFamily="34" charset="-122"/>
                 <a:cs typeface="Georgia" pitchFamily="34" charset="-120"/>
               </a:rPr>
-              <a:t>Step by Step</a:t>
-            </a:r>
-            <a:endParaRPr lang="en-US" sz="2600" dirty="0"/>
-          </a:p>
-        </p:txBody>
-      </p:sp>
-      <p:sp>
-        <p:nvSpPr>
-          <p:cNvPr id="5" name="Shape 3"/>
-          <p:cNvSpPr/>
-          <p:nvPr/>
-        </p:nvSpPr>
-        <p:spPr>
-          <a:xfrm>
-            <a:off x="457200" y="1188720"/>
-            <a:ext cx="2560320" cy="1828800"/>
+              <a:t>Three Steps to Add/Subtract Fractions</a:t>
+            </a:r>
+            <a:endParaRPr lang="en-US" sz="2000" dirty="0"/>
+          </a:p>
+        </p:txBody>
+      </p:sp>
+      <p:sp>
+        <p:nvSpPr>
+          <p:cNvPr id="6" name="Shape 4"/>
+          <p:cNvSpPr/>
+          <p:nvPr/>
+        </p:nvSpPr>
+        <p:spPr>
+          <a:xfrm>
+            <a:off x="640080" y="1051560"/>
+            <a:ext cx="2468880" cy="3657600"/>
           </a:xfrm>
           <a:prstGeom prst="rect">
             <a:avLst/>
@@ -1761,12 +2416,7 @@
           <a:solidFill>
             <a:srgbClr val="FFFFFF"/>
           </a:solidFill>
-          <a:ln w="12700">
-            <a:solidFill>
-              <a:srgbClr val="E5E2DC"/>
-            </a:solidFill>
-            <a:prstDash val="solid"/>
-          </a:ln>
+          <a:ln/>
           <a:effectLst>
             <a:outerShdw sx="100000" sy="100000" kx="0" ky="0" algn="bl" rotWithShape="0" blurRad="50800" dist="25400" dir="8100000">
               <a:srgbClr val="000000">
@@ -1778,14 +2428,14 @@
       </p:sp>
       <p:sp>
         <p:nvSpPr>
-          <p:cNvPr id="6" name="Shape 4"/>
-          <p:cNvSpPr/>
-          <p:nvPr/>
-        </p:nvSpPr>
-        <p:spPr>
-          <a:xfrm>
-            <a:off x="457200" y="1188720"/>
-            <a:ext cx="2560320" cy="54864"/>
+          <p:cNvPr id="7" name="Shape 5"/>
+          <p:cNvSpPr/>
+          <p:nvPr/>
+        </p:nvSpPr>
+        <p:spPr>
+          <a:xfrm>
+            <a:off x="640080" y="1051560"/>
+            <a:ext cx="2468880" cy="54864"/>
           </a:xfrm>
           <a:prstGeom prst="rect">
             <a:avLst/>
@@ -1798,14 +2448,14 @@
       </p:sp>
       <p:sp>
         <p:nvSpPr>
-          <p:cNvPr id="7" name="Text 5"/>
-          <p:cNvSpPr/>
-          <p:nvPr/>
-        </p:nvSpPr>
-        <p:spPr>
-          <a:xfrm>
-            <a:off x="594360" y="1325880"/>
-            <a:ext cx="2286000" cy="365760"/>
+          <p:cNvPr id="8" name="Text 6"/>
+          <p:cNvSpPr/>
+          <p:nvPr/>
+        </p:nvSpPr>
+        <p:spPr>
+          <a:xfrm>
+            <a:off x="777240" y="1234440"/>
+            <a:ext cx="2194560" cy="457200"/>
           </a:xfrm>
           <a:prstGeom prst="rect">
             <a:avLst/>
@@ -1817,73 +2467,161 @@
           <a:bodyPr wrap="square" rtlCol="0" anchor="ctr"/>
           <a:lstStyle/>
           <a:p>
-            <a:pPr indent="0" marL="0">
+            <a:pPr algn="ctr" indent="0" marL="0">
               <a:buNone/>
             </a:pPr>
             <a:r>
               <a:rPr lang="en-US" sz="1400" b="1" dirty="0">
                 <a:solidFill>
                   <a:srgbClr val="1B2A4A"/>
+                </a:solidFill>
+                <a:latin typeface="Georgia" pitchFamily="34" charset="0"/>
+                <a:ea typeface="Georgia" pitchFamily="34" charset="-122"/>
+                <a:cs typeface="Georgia" pitchFamily="34" charset="-120"/>
+              </a:rPr>
+              <a:t>Step 1: Same Denominator</a:t>
+            </a:r>
+            <a:endParaRPr lang="en-US" sz="1400" dirty="0"/>
+          </a:p>
+        </p:txBody>
+      </p:sp>
+      <p:sp>
+        <p:nvSpPr>
+          <p:cNvPr id="9" name="Text 7"/>
+          <p:cNvSpPr/>
+          <p:nvPr/>
+        </p:nvSpPr>
+        <p:spPr>
+          <a:xfrm>
+            <a:off x="777240" y="1737360"/>
+            <a:ext cx="2194560" cy="2834640"/>
+          </a:xfrm>
+          <a:prstGeom prst="rect">
+            <a:avLst/>
+          </a:prstGeom>
+          <a:noFill/>
+          <a:ln/>
+        </p:spPr>
+        <p:txBody>
+          <a:bodyPr wrap="square" rtlCol="0" anchor="t"/>
+          <a:lstStyle/>
+          <a:p>
+            <a:pPr marL="342900" indent="-342900">
+              <a:spcAft>
+                <a:spcPts val="400"/>
+              </a:spcAft>
+              <a:buSzPct val="100000"/>
+              <a:buChar char="•"/>
+            </a:pPr>
+            <a:r>
+              <a:rPr lang="en-US" sz="1100" dirty="0">
+                <a:solidFill>
+                  <a:srgbClr val="6B6660"/>
                 </a:solidFill>
                 <a:latin typeface="Calibri" pitchFamily="34" charset="0"/>
                 <a:ea typeface="Calibri" pitchFamily="34" charset="-122"/>
                 <a:cs typeface="Calibri" pitchFamily="34" charset="-120"/>
               </a:rPr>
-              <a:t>Same Denominator</a:t>
-            </a:r>
-            <a:endParaRPr lang="en-US" sz="1400" dirty="0"/>
-          </a:p>
-        </p:txBody>
-      </p:sp>
-      <p:sp>
-        <p:nvSpPr>
-          <p:cNvPr id="8" name="Text 6"/>
-          <p:cNvSpPr/>
-          <p:nvPr/>
-        </p:nvSpPr>
-        <p:spPr>
-          <a:xfrm>
-            <a:off x="594360" y="1737360"/>
-            <a:ext cx="2286000" cy="1097280"/>
-          </a:xfrm>
-          <a:prstGeom prst="rect">
-            <a:avLst/>
-          </a:prstGeom>
-          <a:noFill/>
-          <a:ln/>
-        </p:spPr>
-        <p:txBody>
-          <a:bodyPr wrap="square" rtlCol="0" anchor="t"/>
-          <a:lstStyle/>
-          <a:p>
-            <a:pPr indent="0" marL="0">
-              <a:buNone/>
+              <a:t>Find the LCM of both denominators</a:t>
+            </a:r>
+            <a:endParaRPr lang="en-US" sz="1100" dirty="0"/>
+          </a:p>
+          <a:p>
+            <a:pPr marL="342900" indent="-342900">
+              <a:spcAft>
+                <a:spcPts val="400"/>
+              </a:spcAft>
+              <a:buSzPct val="100000"/>
+              <a:buChar char="•"/>
             </a:pPr>
             <a:r>
               <a:rPr lang="en-US" sz="1100" dirty="0">
                 <a:solidFill>
-                  <a:srgbClr val="3D3A36"/>
+                  <a:srgbClr val="6B6660"/>
                 </a:solidFill>
                 <a:latin typeface="Calibri" pitchFamily="34" charset="0"/>
                 <a:ea typeface="Calibri" pitchFamily="34" charset="-122"/>
                 <a:cs typeface="Calibri" pitchFamily="34" charset="-120"/>
               </a:rPr>
-              <a:t>Just add/subtract the numerators. ²⁄₇ + ³⁄₇ = ⁵⁄₇. ⁵⁄₈ − ³⁄₈ = ²⁄₈ = ¼ (simplify!). The denominator NEVER changes.</a:t>
+              <a:t>Convert both fractions</a:t>
             </a:r>
             <a:endParaRPr lang="en-US" sz="1100" dirty="0"/>
           </a:p>
-        </p:txBody>
-      </p:sp>
-      <p:sp>
-        <p:nvSpPr>
-          <p:cNvPr id="9" name="Shape 7"/>
-          <p:cNvSpPr/>
-          <p:nvPr/>
-        </p:nvSpPr>
-        <p:spPr>
-          <a:xfrm>
-            <a:off x="3291840" y="1188720"/>
-            <a:ext cx="2560320" cy="1828800"/>
+          <a:p>
+            <a:pPr marL="342900" indent="-342900">
+              <a:spcAft>
+                <a:spcPts val="400"/>
+              </a:spcAft>
+              <a:buSzPct val="100000"/>
+              <a:buChar char="•"/>
+            </a:pPr>
+            <a:r>
+              <a:rPr lang="en-US" sz="1100" dirty="0">
+                <a:solidFill>
+                  <a:srgbClr val="6B6660"/>
+                </a:solidFill>
+                <a:latin typeface="Calibri" pitchFamily="34" charset="0"/>
+                <a:ea typeface="Calibri" pitchFamily="34" charset="-122"/>
+                <a:cs typeface="Calibri" pitchFamily="34" charset="-120"/>
+              </a:rPr>
+              <a:t>Example: ⅓ + ¼</a:t>
+            </a:r>
+            <a:endParaRPr lang="en-US" sz="1100" dirty="0"/>
+          </a:p>
+          <a:p>
+            <a:pPr marL="342900" indent="-342900">
+              <a:spcAft>
+                <a:spcPts val="400"/>
+              </a:spcAft>
+              <a:buSzPct val="100000"/>
+              <a:buChar char="•"/>
+            </a:pPr>
+            <a:r>
+              <a:rPr lang="en-US" sz="1100" dirty="0">
+                <a:solidFill>
+                  <a:srgbClr val="6B6660"/>
+                </a:solidFill>
+                <a:latin typeface="Calibri" pitchFamily="34" charset="0"/>
+                <a:ea typeface="Calibri" pitchFamily="34" charset="-122"/>
+                <a:cs typeface="Calibri" pitchFamily="34" charset="-120"/>
+              </a:rPr>
+              <a:t>LCM of 3 and 4 = 12</a:t>
+            </a:r>
+            <a:endParaRPr lang="en-US" sz="1100" dirty="0"/>
+          </a:p>
+          <a:p>
+            <a:pPr marL="342900" indent="-342900">
+              <a:spcAft>
+                <a:spcPts val="400"/>
+              </a:spcAft>
+              <a:buSzPct val="100000"/>
+              <a:buChar char="•"/>
+            </a:pPr>
+            <a:r>
+              <a:rPr lang="en-US" sz="1100" dirty="0">
+                <a:solidFill>
+                  <a:srgbClr val="6B6660"/>
+                </a:solidFill>
+                <a:latin typeface="Calibri" pitchFamily="34" charset="0"/>
+                <a:ea typeface="Calibri" pitchFamily="34" charset="-122"/>
+                <a:cs typeface="Calibri" pitchFamily="34" charset="-120"/>
+              </a:rPr>
+              <a:t>→ 4/12 + 3/12</a:t>
+            </a:r>
+            <a:endParaRPr lang="en-US" sz="1100" dirty="0"/>
+          </a:p>
+        </p:txBody>
+      </p:sp>
+      <p:sp>
+        <p:nvSpPr>
+          <p:cNvPr id="10" name="Shape 8"/>
+          <p:cNvSpPr/>
+          <p:nvPr/>
+        </p:nvSpPr>
+        <p:spPr>
+          <a:xfrm>
+            <a:off x="3246120" y="1051560"/>
+            <a:ext cx="2468880" cy="3657600"/>
           </a:xfrm>
           <a:prstGeom prst="rect">
             <a:avLst/>
@@ -1891,12 +2629,7 @@
           <a:solidFill>
             <a:srgbClr val="FFFFFF"/>
           </a:solidFill>
-          <a:ln w="12700">
-            <a:solidFill>
-              <a:srgbClr val="E5E2DC"/>
-            </a:solidFill>
-            <a:prstDash val="solid"/>
-          </a:ln>
+          <a:ln/>
           <a:effectLst>
             <a:outerShdw sx="100000" sy="100000" kx="0" ky="0" algn="bl" rotWithShape="0" blurRad="50800" dist="25400" dir="8100000">
               <a:srgbClr val="000000">
@@ -1908,34 +2641,34 @@
       </p:sp>
       <p:sp>
         <p:nvSpPr>
-          <p:cNvPr id="10" name="Shape 8"/>
-          <p:cNvSpPr/>
-          <p:nvPr/>
-        </p:nvSpPr>
-        <p:spPr>
-          <a:xfrm>
-            <a:off x="3291840" y="1188720"/>
-            <a:ext cx="2560320" cy="54864"/>
-          </a:xfrm>
-          <a:prstGeom prst="rect">
-            <a:avLst/>
-          </a:prstGeom>
-          <a:solidFill>
-            <a:srgbClr val="2A9D8F"/>
-          </a:solidFill>
-          <a:ln/>
-        </p:spPr>
-      </p:sp>
-      <p:sp>
-        <p:nvSpPr>
-          <p:cNvPr id="11" name="Text 9"/>
-          <p:cNvSpPr/>
-          <p:nvPr/>
-        </p:nvSpPr>
-        <p:spPr>
-          <a:xfrm>
-            <a:off x="3429000" y="1325880"/>
-            <a:ext cx="2286000" cy="365760"/>
+          <p:cNvPr id="11" name="Shape 9"/>
+          <p:cNvSpPr/>
+          <p:nvPr/>
+        </p:nvSpPr>
+        <p:spPr>
+          <a:xfrm>
+            <a:off x="3246120" y="1051560"/>
+            <a:ext cx="2468880" cy="54864"/>
+          </a:xfrm>
+          <a:prstGeom prst="rect">
+            <a:avLst/>
+          </a:prstGeom>
+          <a:solidFill>
+            <a:srgbClr val="E9C46A"/>
+          </a:solidFill>
+          <a:ln/>
+        </p:spPr>
+      </p:sp>
+      <p:sp>
+        <p:nvSpPr>
+          <p:cNvPr id="12" name="Text 10"/>
+          <p:cNvSpPr/>
+          <p:nvPr/>
+        </p:nvSpPr>
+        <p:spPr>
+          <a:xfrm>
+            <a:off x="3383280" y="1234440"/>
+            <a:ext cx="2194560" cy="457200"/>
           </a:xfrm>
           <a:prstGeom prst="rect">
             <a:avLst/>
@@ -1947,73 +2680,140 @@
           <a:bodyPr wrap="square" rtlCol="0" anchor="ctr"/>
           <a:lstStyle/>
           <a:p>
-            <a:pPr indent="0" marL="0">
+            <a:pPr algn="ctr" indent="0" marL="0">
               <a:buNone/>
             </a:pPr>
             <a:r>
               <a:rPr lang="en-US" sz="1400" b="1" dirty="0">
                 <a:solidFill>
                   <a:srgbClr val="1B2A4A"/>
+                </a:solidFill>
+                <a:latin typeface="Georgia" pitchFamily="34" charset="0"/>
+                <a:ea typeface="Georgia" pitchFamily="34" charset="-122"/>
+                <a:cs typeface="Georgia" pitchFamily="34" charset="-120"/>
+              </a:rPr>
+              <a:t>Step 2: Add or Subtract</a:t>
+            </a:r>
+            <a:endParaRPr lang="en-US" sz="1400" dirty="0"/>
+          </a:p>
+        </p:txBody>
+      </p:sp>
+      <p:sp>
+        <p:nvSpPr>
+          <p:cNvPr id="13" name="Text 11"/>
+          <p:cNvSpPr/>
+          <p:nvPr/>
+        </p:nvSpPr>
+        <p:spPr>
+          <a:xfrm>
+            <a:off x="3383280" y="1737360"/>
+            <a:ext cx="2194560" cy="2834640"/>
+          </a:xfrm>
+          <a:prstGeom prst="rect">
+            <a:avLst/>
+          </a:prstGeom>
+          <a:noFill/>
+          <a:ln/>
+        </p:spPr>
+        <p:txBody>
+          <a:bodyPr wrap="square" rtlCol="0" anchor="t"/>
+          <a:lstStyle/>
+          <a:p>
+            <a:pPr marL="342900" indent="-342900">
+              <a:spcAft>
+                <a:spcPts val="400"/>
+              </a:spcAft>
+              <a:buSzPct val="100000"/>
+              <a:buChar char="•"/>
+            </a:pPr>
+            <a:r>
+              <a:rPr lang="en-US" sz="1100" dirty="0">
+                <a:solidFill>
+                  <a:srgbClr val="6B6660"/>
                 </a:solidFill>
                 <a:latin typeface="Calibri" pitchFamily="34" charset="0"/>
                 <a:ea typeface="Calibri" pitchFamily="34" charset="-122"/>
                 <a:cs typeface="Calibri" pitchFamily="34" charset="-120"/>
               </a:rPr>
-              <a:t>Different Denominators</a:t>
-            </a:r>
-            <a:endParaRPr lang="en-US" sz="1400" dirty="0"/>
-          </a:p>
-        </p:txBody>
-      </p:sp>
-      <p:sp>
-        <p:nvSpPr>
-          <p:cNvPr id="12" name="Text 10"/>
-          <p:cNvSpPr/>
-          <p:nvPr/>
-        </p:nvSpPr>
-        <p:spPr>
-          <a:xfrm>
-            <a:off x="3429000" y="1737360"/>
-            <a:ext cx="2286000" cy="1097280"/>
-          </a:xfrm>
-          <a:prstGeom prst="rect">
-            <a:avLst/>
-          </a:prstGeom>
-          <a:noFill/>
-          <a:ln/>
-        </p:spPr>
-        <p:txBody>
-          <a:bodyPr wrap="square" rtlCol="0" anchor="t"/>
-          <a:lstStyle/>
-          <a:p>
-            <a:pPr indent="0" marL="0">
-              <a:buNone/>
+              <a:t>Add/subtract the NUMERATORS only</a:t>
+            </a:r>
+            <a:endParaRPr lang="en-US" sz="1100" dirty="0"/>
+          </a:p>
+          <a:p>
+            <a:pPr marL="342900" indent="-342900">
+              <a:spcAft>
+                <a:spcPts val="400"/>
+              </a:spcAft>
+              <a:buSzPct val="100000"/>
+              <a:buChar char="•"/>
             </a:pPr>
             <a:r>
               <a:rPr lang="en-US" sz="1100" dirty="0">
                 <a:solidFill>
-                  <a:srgbClr val="3D3A36"/>
+                  <a:srgbClr val="6B6660"/>
                 </a:solidFill>
                 <a:latin typeface="Calibri" pitchFamily="34" charset="0"/>
                 <a:ea typeface="Calibri" pitchFamily="34" charset="-122"/>
                 <a:cs typeface="Calibri" pitchFamily="34" charset="-120"/>
               </a:rPr>
-              <a:t>Find the LCM of denominators. Convert both fractions. Then add/subtract. ½ + ¹⁄₃: LCM(2,3)=6 → ³⁄₆ + ²⁄₆ = ⁵⁄₆.</a:t>
+              <a:t>Keep the denominator the same</a:t>
             </a:r>
             <a:endParaRPr lang="en-US" sz="1100" dirty="0"/>
           </a:p>
-        </p:txBody>
-      </p:sp>
-      <p:sp>
-        <p:nvSpPr>
-          <p:cNvPr id="13" name="Shape 11"/>
-          <p:cNvSpPr/>
-          <p:nvPr/>
-        </p:nvSpPr>
-        <p:spPr>
-          <a:xfrm>
-            <a:off x="6126480" y="1188720"/>
-            <a:ext cx="2560320" cy="1828800"/>
+          <a:p>
+            <a:pPr marL="342900" indent="-342900">
+              <a:spcAft>
+                <a:spcPts val="400"/>
+              </a:spcAft>
+              <a:buSzPct val="100000"/>
+              <a:buChar char="•"/>
+            </a:pPr>
+            <a:r>
+              <a:rPr lang="en-US" sz="1100" dirty="0">
+                <a:solidFill>
+                  <a:srgbClr val="6B6660"/>
+                </a:solidFill>
+                <a:latin typeface="Calibri" pitchFamily="34" charset="0"/>
+                <a:ea typeface="Calibri" pitchFamily="34" charset="-122"/>
+                <a:cs typeface="Calibri" pitchFamily="34" charset="-120"/>
+              </a:rPr>
+              <a:t>4/12 + 3/12 = 7/12</a:t>
+            </a:r>
+            <a:endParaRPr lang="en-US" sz="1100" dirty="0"/>
+          </a:p>
+          <a:p>
+            <a:pPr marL="342900" indent="-342900">
+              <a:spcAft>
+                <a:spcPts val="400"/>
+              </a:spcAft>
+              <a:buSzPct val="100000"/>
+              <a:buChar char="•"/>
+            </a:pPr>
+            <a:r>
+              <a:rPr lang="en-US" sz="1100" dirty="0">
+                <a:solidFill>
+                  <a:srgbClr val="6B6660"/>
+                </a:solidFill>
+                <a:latin typeface="Calibri" pitchFamily="34" charset="0"/>
+                <a:ea typeface="Calibri" pitchFamily="34" charset="-122"/>
+                <a:cs typeface="Calibri" pitchFamily="34" charset="-120"/>
+              </a:rPr>
+              <a:t>Never add the denominators!</a:t>
+            </a:r>
+            <a:endParaRPr lang="en-US" sz="1100" dirty="0"/>
+          </a:p>
+        </p:txBody>
+      </p:sp>
+      <p:sp>
+        <p:nvSpPr>
+          <p:cNvPr id="14" name="Shape 12"/>
+          <p:cNvSpPr/>
+          <p:nvPr/>
+        </p:nvSpPr>
+        <p:spPr>
+          <a:xfrm>
+            <a:off x="5852160" y="1051560"/>
+            <a:ext cx="2468880" cy="3657600"/>
           </a:xfrm>
           <a:prstGeom prst="rect">
             <a:avLst/>
@@ -2021,12 +2821,7 @@
           <a:solidFill>
             <a:srgbClr val="FFFFFF"/>
           </a:solidFill>
-          <a:ln w="12700">
-            <a:solidFill>
-              <a:srgbClr val="E5E2DC"/>
-            </a:solidFill>
-            <a:prstDash val="solid"/>
-          </a:ln>
+          <a:ln/>
           <a:effectLst>
             <a:outerShdw sx="100000" sy="100000" kx="0" ky="0" algn="bl" rotWithShape="0" blurRad="50800" dist="25400" dir="8100000">
               <a:srgbClr val="000000">
@@ -2038,34 +2833,34 @@
       </p:sp>
       <p:sp>
         <p:nvSpPr>
-          <p:cNvPr id="14" name="Shape 12"/>
-          <p:cNvSpPr/>
-          <p:nvPr/>
-        </p:nvSpPr>
-        <p:spPr>
-          <a:xfrm>
-            <a:off x="6126480" y="1188720"/>
-            <a:ext cx="2560320" cy="54864"/>
-          </a:xfrm>
-          <a:prstGeom prst="rect">
-            <a:avLst/>
-          </a:prstGeom>
-          <a:solidFill>
-            <a:srgbClr val="2A9D8F"/>
-          </a:solidFill>
-          <a:ln/>
-        </p:spPr>
-      </p:sp>
-      <p:sp>
-        <p:nvSpPr>
-          <p:cNvPr id="15" name="Text 13"/>
-          <p:cNvSpPr/>
-          <p:nvPr/>
-        </p:nvSpPr>
-        <p:spPr>
-          <a:xfrm>
-            <a:off x="6263640" y="1325880"/>
-            <a:ext cx="2286000" cy="365760"/>
+          <p:cNvPr id="15" name="Shape 13"/>
+          <p:cNvSpPr/>
+          <p:nvPr/>
+        </p:nvSpPr>
+        <p:spPr>
+          <a:xfrm>
+            <a:off x="5852160" y="1051560"/>
+            <a:ext cx="2468880" cy="54864"/>
+          </a:xfrm>
+          <a:prstGeom prst="rect">
+            <a:avLst/>
+          </a:prstGeom>
+          <a:solidFill>
+            <a:srgbClr val="9B9690"/>
+          </a:solidFill>
+          <a:ln/>
+        </p:spPr>
+      </p:sp>
+      <p:sp>
+        <p:nvSpPr>
+          <p:cNvPr id="16" name="Text 14"/>
+          <p:cNvSpPr/>
+          <p:nvPr/>
+        </p:nvSpPr>
+        <p:spPr>
+          <a:xfrm>
+            <a:off x="5989320" y="1234440"/>
+            <a:ext cx="2194560" cy="457200"/>
           </a:xfrm>
           <a:prstGeom prst="rect">
             <a:avLst/>
@@ -2077,58 +2872,125 @@
           <a:bodyPr wrap="square" rtlCol="0" anchor="ctr"/>
           <a:lstStyle/>
           <a:p>
-            <a:pPr indent="0" marL="0">
+            <a:pPr algn="ctr" indent="0" marL="0">
               <a:buNone/>
             </a:pPr>
             <a:r>
               <a:rPr lang="en-US" sz="1400" b="1" dirty="0">
                 <a:solidFill>
                   <a:srgbClr val="1B2A4A"/>
+                </a:solidFill>
+                <a:latin typeface="Georgia" pitchFamily="34" charset="0"/>
+                <a:ea typeface="Georgia" pitchFamily="34" charset="-122"/>
+                <a:cs typeface="Georgia" pitchFamily="34" charset="-120"/>
+              </a:rPr>
+              <a:t>Step 3: Simplify</a:t>
+            </a:r>
+            <a:endParaRPr lang="en-US" sz="1400" dirty="0"/>
+          </a:p>
+        </p:txBody>
+      </p:sp>
+      <p:sp>
+        <p:nvSpPr>
+          <p:cNvPr id="17" name="Text 15"/>
+          <p:cNvSpPr/>
+          <p:nvPr/>
+        </p:nvSpPr>
+        <p:spPr>
+          <a:xfrm>
+            <a:off x="5989320" y="1737360"/>
+            <a:ext cx="2194560" cy="2834640"/>
+          </a:xfrm>
+          <a:prstGeom prst="rect">
+            <a:avLst/>
+          </a:prstGeom>
+          <a:noFill/>
+          <a:ln/>
+        </p:spPr>
+        <p:txBody>
+          <a:bodyPr wrap="square" rtlCol="0" anchor="t"/>
+          <a:lstStyle/>
+          <a:p>
+            <a:pPr marL="342900" indent="-342900">
+              <a:spcAft>
+                <a:spcPts val="400"/>
+              </a:spcAft>
+              <a:buSzPct val="100000"/>
+              <a:buChar char="•"/>
+            </a:pPr>
+            <a:r>
+              <a:rPr lang="en-US" sz="1100" dirty="0">
+                <a:solidFill>
+                  <a:srgbClr val="6B6660"/>
                 </a:solidFill>
                 <a:latin typeface="Calibri" pitchFamily="34" charset="0"/>
                 <a:ea typeface="Calibri" pitchFamily="34" charset="-122"/>
                 <a:cs typeface="Calibri" pitchFamily="34" charset="-120"/>
               </a:rPr>
-              <a:t>Mixed Numbers</a:t>
-            </a:r>
-            <a:endParaRPr lang="en-US" sz="1400" dirty="0"/>
-          </a:p>
-        </p:txBody>
-      </p:sp>
-      <p:sp>
-        <p:nvSpPr>
-          <p:cNvPr id="16" name="Text 14"/>
-          <p:cNvSpPr/>
-          <p:nvPr/>
-        </p:nvSpPr>
-        <p:spPr>
-          <a:xfrm>
-            <a:off x="6263640" y="1737360"/>
-            <a:ext cx="2286000" cy="1097280"/>
-          </a:xfrm>
-          <a:prstGeom prst="rect">
-            <a:avLst/>
-          </a:prstGeom>
-          <a:noFill/>
-          <a:ln/>
-        </p:spPr>
-        <p:txBody>
-          <a:bodyPr wrap="square" rtlCol="0" anchor="t"/>
-          <a:lstStyle/>
-          <a:p>
-            <a:pPr indent="0" marL="0">
-              <a:buNone/>
+              <a:t>Check if the answer can be simplified</a:t>
+            </a:r>
+            <a:endParaRPr lang="en-US" sz="1100" dirty="0"/>
+          </a:p>
+          <a:p>
+            <a:pPr marL="342900" indent="-342900">
+              <a:spcAft>
+                <a:spcPts val="400"/>
+              </a:spcAft>
+              <a:buSzPct val="100000"/>
+              <a:buChar char="•"/>
             </a:pPr>
             <a:r>
               <a:rPr lang="en-US" sz="1100" dirty="0">
                 <a:solidFill>
-                  <a:srgbClr val="3D3A36"/>
+                  <a:srgbClr val="6B6660"/>
                 </a:solidFill>
                 <a:latin typeface="Calibri" pitchFamily="34" charset="0"/>
                 <a:ea typeface="Calibri" pitchFamily="34" charset="-122"/>
                 <a:cs typeface="Calibri" pitchFamily="34" charset="-120"/>
               </a:rPr>
-              <a:t>Convert to improper fractions first. 2¹⁄₃ + 1½ = ⁷⁄₃ + ³⁄₂ = ¹⁴⁄₆ + ⁹⁄₆ = ²³⁄₆ = 3⁵⁄₆.</a:t>
+              <a:t>Divide by common factors</a:t>
+            </a:r>
+            <a:endParaRPr lang="en-US" sz="1100" dirty="0"/>
+          </a:p>
+          <a:p>
+            <a:pPr marL="342900" indent="-342900">
+              <a:spcAft>
+                <a:spcPts val="400"/>
+              </a:spcAft>
+              <a:buSzPct val="100000"/>
+              <a:buChar char="•"/>
+            </a:pPr>
+            <a:r>
+              <a:rPr lang="en-US" sz="1100" dirty="0">
+                <a:solidFill>
+                  <a:srgbClr val="6B6660"/>
+                </a:solidFill>
+                <a:latin typeface="Calibri" pitchFamily="34" charset="0"/>
+                <a:ea typeface="Calibri" pitchFamily="34" charset="-122"/>
+                <a:cs typeface="Calibri" pitchFamily="34" charset="-120"/>
+              </a:rPr>
+              <a:t>7/12 is already in lowest terms</a:t>
+            </a:r>
+            <a:endParaRPr lang="en-US" sz="1100" dirty="0"/>
+          </a:p>
+          <a:p>
+            <a:pPr marL="342900" indent="-342900">
+              <a:spcAft>
+                <a:spcPts val="400"/>
+              </a:spcAft>
+              <a:buSzPct val="100000"/>
+              <a:buChar char="•"/>
+            </a:pPr>
+            <a:r>
+              <a:rPr lang="en-US" sz="1100" dirty="0">
+                <a:solidFill>
+                  <a:srgbClr val="6B6660"/>
+                </a:solidFill>
+                <a:latin typeface="Calibri" pitchFamily="34" charset="0"/>
+                <a:ea typeface="Calibri" pitchFamily="34" charset="-122"/>
+                <a:cs typeface="Calibri" pitchFamily="34" charset="-120"/>
+              </a:rPr>
+              <a:t>Convert improper to mixed if needed</a:t>
             </a:r>
             <a:endParaRPr lang="en-US" sz="1100" dirty="0"/>
           </a:p>
@@ -2175,7 +3037,47 @@
         <p:spPr>
           <a:xfrm>
             <a:off x="0" y="0"/>
-            <a:ext cx="9144000" cy="54864"/>
+            <a:ext cx="9144000" cy="822960"/>
+          </a:xfrm>
+          <a:prstGeom prst="rect">
+            <a:avLst/>
+          </a:prstGeom>
+          <a:solidFill>
+            <a:srgbClr val="FFFFFF"/>
+          </a:solidFill>
+          <a:ln/>
+        </p:spPr>
+      </p:sp>
+      <p:sp>
+        <p:nvSpPr>
+          <p:cNvPr id="3" name="Shape 1"/>
+          <p:cNvSpPr/>
+          <p:nvPr/>
+        </p:nvSpPr>
+        <p:spPr>
+          <a:xfrm>
+            <a:off x="0" y="804672"/>
+            <a:ext cx="9144000" cy="27432"/>
+          </a:xfrm>
+          <a:prstGeom prst="rect">
+            <a:avLst/>
+          </a:prstGeom>
+          <a:solidFill>
+            <a:srgbClr val="E5E2DC"/>
+          </a:solidFill>
+          <a:ln/>
+        </p:spPr>
+      </p:sp>
+      <p:sp>
+        <p:nvSpPr>
+          <p:cNvPr id="4" name="Shape 2"/>
+          <p:cNvSpPr/>
+          <p:nvPr/>
+        </p:nvSpPr>
+        <p:spPr>
+          <a:xfrm>
+            <a:off x="548640" y="201168"/>
+            <a:ext cx="54864" cy="420624"/>
           </a:xfrm>
           <a:prstGeom prst="rect">
             <a:avLst/>
@@ -2188,14 +3090,14 @@
       </p:sp>
       <p:sp>
         <p:nvSpPr>
-          <p:cNvPr id="3" name="Text 1"/>
-          <p:cNvSpPr/>
-          <p:nvPr/>
-        </p:nvSpPr>
-        <p:spPr>
-          <a:xfrm>
-            <a:off x="7772400" y="4709160"/>
-            <a:ext cx="1097280" cy="320040"/>
+          <p:cNvPr id="5" name="Text 3"/>
+          <p:cNvSpPr/>
+          <p:nvPr/>
+        </p:nvSpPr>
+        <p:spPr>
+          <a:xfrm>
+            <a:off x="777240" y="137160"/>
+            <a:ext cx="7772400" cy="548640"/>
           </a:xfrm>
           <a:prstGeom prst="rect">
             <a:avLst/>
@@ -2204,53 +3106,14 @@
           <a:ln/>
         </p:spPr>
         <p:txBody>
-          <a:bodyPr wrap="square" rtlCol="0" anchor="ctr"/>
-          <a:lstStyle/>
-          <a:p>
-            <a:pPr algn="r" indent="0" marL="0">
-              <a:buNone/>
-            </a:pPr>
-            <a:r>
-              <a:rPr lang="en-US" sz="900" dirty="0">
-                <a:solidFill>
-                  <a:srgbClr val="6B6660"/>
-                </a:solidFill>
-                <a:latin typeface="Calibri" pitchFamily="34" charset="0"/>
-                <a:ea typeface="Calibri" pitchFamily="34" charset="-122"/>
-                <a:cs typeface="Calibri" pitchFamily="34" charset="-120"/>
-              </a:rPr>
-              <a:t>4 / 5</a:t>
-            </a:r>
-            <a:endParaRPr lang="en-US" sz="900" dirty="0"/>
-          </a:p>
-        </p:txBody>
-      </p:sp>
-      <p:sp>
-        <p:nvSpPr>
-          <p:cNvPr id="4" name="Text 2"/>
-          <p:cNvSpPr/>
-          <p:nvPr/>
-        </p:nvSpPr>
-        <p:spPr>
-          <a:xfrm>
-            <a:off x="457200" y="274320"/>
-            <a:ext cx="8229600" cy="640080"/>
-          </a:xfrm>
-          <a:prstGeom prst="rect">
-            <a:avLst/>
-          </a:prstGeom>
-          <a:noFill/>
-          <a:ln/>
-        </p:spPr>
-        <p:txBody>
-          <a:bodyPr wrap="square" rtlCol="0" anchor="ctr"/>
+          <a:bodyPr wrap="square" lIns="0" tIns="0" rIns="0" bIns="0" rtlCol="0" anchor="ctr"/>
           <a:lstStyle/>
           <a:p>
             <a:pPr indent="0" marL="0">
               <a:buNone/>
             </a:pPr>
             <a:r>
-              <a:rPr lang="en-US" sz="2600" b="1" dirty="0">
+              <a:rPr lang="en-US" sz="2000" b="1" dirty="0">
                 <a:solidFill>
                   <a:srgbClr val="1B2A4A"/>
                 </a:solidFill>
@@ -2258,22 +3121,22 @@
                 <a:ea typeface="Georgia" pitchFamily="34" charset="-122"/>
                 <a:cs typeface="Georgia" pitchFamily="34" charset="-120"/>
               </a:rPr>
-              <a:t>Practice Problems</a:t>
-            </a:r>
-            <a:endParaRPr lang="en-US" sz="2600" dirty="0"/>
-          </a:p>
-        </p:txBody>
-      </p:sp>
-      <p:sp>
-        <p:nvSpPr>
-          <p:cNvPr id="5" name="Text 3"/>
-          <p:cNvSpPr/>
-          <p:nvPr/>
-        </p:nvSpPr>
-        <p:spPr>
-          <a:xfrm>
-            <a:off x="457200" y="1097280"/>
-            <a:ext cx="8229600" cy="3657600"/>
+              <a:t>Adding &amp; Subtracting Mixed Numbers</a:t>
+            </a:r>
+            <a:endParaRPr lang="en-US" sz="2000" dirty="0"/>
+          </a:p>
+        </p:txBody>
+      </p:sp>
+      <p:sp>
+        <p:nvSpPr>
+          <p:cNvPr id="6" name="Text 4"/>
+          <p:cNvSpPr/>
+          <p:nvPr/>
+        </p:nvSpPr>
+        <p:spPr>
+          <a:xfrm>
+            <a:off x="731520" y="1051560"/>
+            <a:ext cx="7680960" cy="3108960"/>
           </a:xfrm>
           <a:prstGeom prst="rect">
             <a:avLst/>
@@ -2293,7 +3156,7 @@
               <a:buChar char="•"/>
             </a:pPr>
             <a:r>
-              <a:rPr lang="en-US" sz="1400" dirty="0">
+              <a:rPr lang="en-US" sz="1500" dirty="0">
                 <a:solidFill>
                   <a:srgbClr val="3D3A36"/>
                 </a:solidFill>
@@ -2301,9 +3164,9 @@
                 <a:ea typeface="Calibri" pitchFamily="34" charset="-122"/>
                 <a:cs typeface="Calibri" pitchFamily="34" charset="-120"/>
               </a:rPr>
-              <a:t>³⁄₅ + ¹⁄₅ = ⁴⁄₅</a:t>
-            </a:r>
-            <a:endParaRPr lang="en-US" sz="1400" dirty="0"/>
+              <a:t>Method 1: Convert to improper fractions, then add/subtract normally.</a:t>
+            </a:r>
+            <a:endParaRPr lang="en-US" sz="1500" dirty="0"/>
           </a:p>
           <a:p>
             <a:pPr marL="342900" indent="-342900">
@@ -2314,7 +3177,7 @@
               <a:buChar char="•"/>
             </a:pPr>
             <a:r>
-              <a:rPr lang="en-US" sz="1400" dirty="0">
+              <a:rPr lang="en-US" sz="1500" dirty="0">
                 <a:solidFill>
                   <a:srgbClr val="3D3A36"/>
                 </a:solidFill>
@@ -2322,9 +3185,9 @@
                 <a:ea typeface="Calibri" pitchFamily="34" charset="-122"/>
                 <a:cs typeface="Calibri" pitchFamily="34" charset="-120"/>
               </a:rPr>
-              <a:t>⁷⁄₈ − ³⁄₈ = ⁴⁄₈ = ½ (simplify)</a:t>
-            </a:r>
-            <a:endParaRPr lang="en-US" sz="1400" dirty="0"/>
+              <a:t>Method 2: Add whole numbers separately, then add fractions separately.</a:t>
+            </a:r>
+            <a:endParaRPr lang="en-US" sz="1500" dirty="0"/>
           </a:p>
           <a:p>
             <a:pPr marL="342900" indent="-342900">
@@ -2335,7 +3198,7 @@
               <a:buChar char="•"/>
             </a:pPr>
             <a:r>
-              <a:rPr lang="en-US" sz="1400" dirty="0">
+              <a:rPr lang="en-US" sz="1500" dirty="0">
                 <a:solidFill>
                   <a:srgbClr val="3D3A36"/>
                 </a:solidFill>
@@ -2343,9 +3206,9 @@
                 <a:ea typeface="Calibri" pitchFamily="34" charset="-122"/>
                 <a:cs typeface="Calibri" pitchFamily="34" charset="-120"/>
               </a:rPr>
-              <a:t>¹⁄₃ + ¼ = ⁴⁄₁₂ + ³⁄₁₂ = ⁷⁄₁₂ (LCM of 3 and 4 = 12)</a:t>
-            </a:r>
-            <a:endParaRPr lang="en-US" sz="1400" dirty="0"/>
+              <a:t>Example: 2¾ + 1⅔ → Convert: 11/4 + 5/3 → Common denom 12: 33/12 + 20/12 = 53/12 = 4 5/12.</a:t>
+            </a:r>
+            <a:endParaRPr lang="en-US" sz="1500" dirty="0"/>
           </a:p>
           <a:p>
             <a:pPr marL="342900" indent="-342900">
@@ -2356,7 +3219,7 @@
               <a:buChar char="•"/>
             </a:pPr>
             <a:r>
-              <a:rPr lang="en-US" sz="1400" dirty="0">
+              <a:rPr lang="en-US" sz="1500" dirty="0">
                 <a:solidFill>
                   <a:srgbClr val="3D3A36"/>
                 </a:solidFill>
@@ -2364,9 +3227,9 @@
                 <a:ea typeface="Calibri" pitchFamily="34" charset="-122"/>
                 <a:cs typeface="Calibri" pitchFamily="34" charset="-120"/>
               </a:rPr>
-              <a:t>²⁄₃ − ¹⁄₆ = ⁴⁄₆ − ¹⁄₆ = ³⁄₆ = ½</a:t>
-            </a:r>
-            <a:endParaRPr lang="en-US" sz="1400" dirty="0"/>
+              <a:t>For subtraction, you may need to 'borrow' from the whole number.</a:t>
+            </a:r>
+            <a:endParaRPr lang="en-US" sz="1500" dirty="0"/>
           </a:p>
           <a:p>
             <a:pPr marL="342900" indent="-342900">
@@ -2377,7 +3240,7 @@
               <a:buChar char="•"/>
             </a:pPr>
             <a:r>
-              <a:rPr lang="en-US" sz="1400" dirty="0">
+              <a:rPr lang="en-US" sz="1500" dirty="0">
                 <a:solidFill>
                   <a:srgbClr val="3D3A36"/>
                 </a:solidFill>
@@ -2385,9 +3248,89 @@
                 <a:ea typeface="Calibri" pitchFamily="34" charset="-122"/>
                 <a:cs typeface="Calibri" pitchFamily="34" charset="-120"/>
               </a:rPr>
-              <a:t>1³⁄₄ + 2¹⁄₂ = ⁷⁄₄ + ⁵⁄₂ = ⁷⁄₄ + ¹⁰⁄₄ = ¹⁷⁄₄ = 4¼</a:t>
-            </a:r>
-            <a:endParaRPr lang="en-US" sz="1400" dirty="0"/>
+              <a:t>Always simplify your final answer.</a:t>
+            </a:r>
+            <a:endParaRPr lang="en-US" sz="1500" dirty="0"/>
+          </a:p>
+        </p:txBody>
+      </p:sp>
+      <p:sp>
+        <p:nvSpPr>
+          <p:cNvPr id="7" name="Shape 5"/>
+          <p:cNvSpPr/>
+          <p:nvPr/>
+        </p:nvSpPr>
+        <p:spPr>
+          <a:xfrm>
+            <a:off x="731520" y="4206240"/>
+            <a:ext cx="7680960" cy="640080"/>
+          </a:xfrm>
+          <a:prstGeom prst="rect">
+            <a:avLst/>
+          </a:prstGeom>
+          <a:solidFill>
+            <a:srgbClr val="E8F5F3"/>
+          </a:solidFill>
+          <a:ln/>
+          <a:effectLst>
+            <a:outerShdw sx="100000" sy="100000" kx="0" ky="0" algn="bl" rotWithShape="0" blurRad="50800" dist="25400" dir="8100000">
+              <a:srgbClr val="000000">
+                <a:alpha val="10000"/>
+              </a:srgbClr>
+            </a:outerShdw>
+          </a:effectLst>
+        </p:spPr>
+      </p:sp>
+      <p:sp>
+        <p:nvSpPr>
+          <p:cNvPr id="8" name="Text 6"/>
+          <p:cNvSpPr/>
+          <p:nvPr/>
+        </p:nvSpPr>
+        <p:spPr>
+          <a:xfrm>
+            <a:off x="914400" y="4251960"/>
+            <a:ext cx="7315200" cy="548640"/>
+          </a:xfrm>
+          <a:prstGeom prst="rect">
+            <a:avLst/>
+          </a:prstGeom>
+          <a:noFill/>
+          <a:ln/>
+        </p:spPr>
+        <p:txBody>
+          <a:bodyPr wrap="square" rtlCol="0" anchor="ctr"/>
+          <a:lstStyle/>
+          <a:p>
+            <a:pPr indent="0" marL="0">
+              <a:buNone/>
+            </a:pPr>
+            <a:r>
+              <a:rPr lang="en-US" sz="1200" b="1" dirty="0">
+                <a:solidFill>
+                  <a:srgbClr val="2A9D8F"/>
+                </a:solidFill>
+                <a:latin typeface="Calibri" pitchFamily="34" charset="0"/>
+                <a:ea typeface="Calibri" pitchFamily="34" charset="-122"/>
+                <a:cs typeface="Calibri" pitchFamily="34" charset="-120"/>
+              </a:rPr>
+              <a:t>Key Idea: </a:t>
+            </a:r>
+            <a:pPr indent="0" marL="0">
+              <a:buNone/>
+            </a:pPr>
+            <a:r>
+              <a:rPr lang="en-US" sz="1200" i="1" dirty="0">
+                <a:solidFill>
+                  <a:srgbClr val="3D3A36"/>
+                </a:solidFill>
+                <a:latin typeface="Calibri" pitchFamily="34" charset="0"/>
+                <a:ea typeface="Calibri" pitchFamily="34" charset="-122"/>
+                <a:cs typeface="Calibri" pitchFamily="34" charset="-120"/>
+              </a:rPr>
+              <a:t>Most students find Method 1 (convert to improper) more reliable.</a:t>
+            </a:r>
+            <a:endParaRPr lang="en-US" sz="1200" dirty="0"/>
           </a:p>
         </p:txBody>
       </p:sp>
@@ -2405,7 +3348,7 @@
     <p:bg>
       <p:bgPr>
         <a:solidFill>
-          <a:srgbClr val="1B2A4A"/>
+          <a:srgbClr val="FAF8F5"/>
         </a:solidFill>
       </p:bgPr>
     </p:bg>
@@ -2432,27 +3375,67 @@
         <p:spPr>
           <a:xfrm>
             <a:off x="0" y="0"/>
-            <a:ext cx="109728" cy="5143500"/>
-          </a:xfrm>
-          <a:prstGeom prst="rect">
-            <a:avLst/>
-          </a:prstGeom>
-          <a:solidFill>
-            <a:srgbClr val="E9C46A"/>
-          </a:solidFill>
-          <a:ln/>
-        </p:spPr>
-      </p:sp>
-      <p:sp>
-        <p:nvSpPr>
-          <p:cNvPr id="3" name="Text 1"/>
-          <p:cNvSpPr/>
-          <p:nvPr/>
-        </p:nvSpPr>
-        <p:spPr>
-          <a:xfrm>
-            <a:off x="731520" y="457200"/>
-            <a:ext cx="7772400" cy="731520"/>
+            <a:ext cx="9144000" cy="822960"/>
+          </a:xfrm>
+          <a:prstGeom prst="rect">
+            <a:avLst/>
+          </a:prstGeom>
+          <a:solidFill>
+            <a:srgbClr val="FFFFFF"/>
+          </a:solidFill>
+          <a:ln/>
+        </p:spPr>
+      </p:sp>
+      <p:sp>
+        <p:nvSpPr>
+          <p:cNvPr id="3" name="Shape 1"/>
+          <p:cNvSpPr/>
+          <p:nvPr/>
+        </p:nvSpPr>
+        <p:spPr>
+          <a:xfrm>
+            <a:off x="0" y="804672"/>
+            <a:ext cx="9144000" cy="27432"/>
+          </a:xfrm>
+          <a:prstGeom prst="rect">
+            <a:avLst/>
+          </a:prstGeom>
+          <a:solidFill>
+            <a:srgbClr val="E5E2DC"/>
+          </a:solidFill>
+          <a:ln/>
+        </p:spPr>
+      </p:sp>
+      <p:sp>
+        <p:nvSpPr>
+          <p:cNvPr id="4" name="Shape 2"/>
+          <p:cNvSpPr/>
+          <p:nvPr/>
+        </p:nvSpPr>
+        <p:spPr>
+          <a:xfrm>
+            <a:off x="548640" y="201168"/>
+            <a:ext cx="54864" cy="420624"/>
+          </a:xfrm>
+          <a:prstGeom prst="rect">
+            <a:avLst/>
+          </a:prstGeom>
+          <a:solidFill>
+            <a:srgbClr val="2A9D8F"/>
+          </a:solidFill>
+          <a:ln/>
+        </p:spPr>
+      </p:sp>
+      <p:sp>
+        <p:nvSpPr>
+          <p:cNvPr id="5" name="Text 3"/>
+          <p:cNvSpPr/>
+          <p:nvPr/>
+        </p:nvSpPr>
+        <p:spPr>
+          <a:xfrm>
+            <a:off x="777240" y="137160"/>
+            <a:ext cx="7772400" cy="548640"/>
           </a:xfrm>
           <a:prstGeom prst="rect">
             <a:avLst/>
@@ -2461,37 +3444,37 @@
           <a:ln/>
         </p:spPr>
         <p:txBody>
-          <a:bodyPr wrap="square" rtlCol="0" anchor="ctr"/>
+          <a:bodyPr wrap="square" lIns="0" tIns="0" rIns="0" bIns="0" rtlCol="0" anchor="ctr"/>
           <a:lstStyle/>
           <a:p>
             <a:pPr indent="0" marL="0">
               <a:buNone/>
             </a:pPr>
             <a:r>
-              <a:rPr lang="en-US" sz="3200" b="1" dirty="0">
-                <a:solidFill>
-                  <a:srgbClr val="FFFFFF"/>
+              <a:rPr lang="en-US" sz="2000" b="1" dirty="0">
+                <a:solidFill>
+                  <a:srgbClr val="1B2A4A"/>
                 </a:solidFill>
                 <a:latin typeface="Georgia" pitchFamily="34" charset="0"/>
                 <a:ea typeface="Georgia" pitchFamily="34" charset="-122"/>
                 <a:cs typeface="Georgia" pitchFamily="34" charset="-120"/>
               </a:rPr>
-              <a:t>Key Takeaways</a:t>
-            </a:r>
-            <a:endParaRPr lang="en-US" sz="3200" dirty="0"/>
-          </a:p>
-        </p:txBody>
-      </p:sp>
-      <p:sp>
-        <p:nvSpPr>
-          <p:cNvPr id="4" name="Text 2"/>
-          <p:cNvSpPr/>
-          <p:nvPr/>
-        </p:nvSpPr>
-        <p:spPr>
-          <a:xfrm>
-            <a:off x="731520" y="1463040"/>
-            <a:ext cx="7772400" cy="3200400"/>
+              <a:t>Common Mistakes</a:t>
+            </a:r>
+            <a:endParaRPr lang="en-US" sz="2000" dirty="0"/>
+          </a:p>
+        </p:txBody>
+      </p:sp>
+      <p:sp>
+        <p:nvSpPr>
+          <p:cNvPr id="6" name="Text 4"/>
+          <p:cNvSpPr/>
+          <p:nvPr/>
+        </p:nvSpPr>
+        <p:spPr>
+          <a:xfrm>
+            <a:off x="731520" y="1051560"/>
+            <a:ext cx="7680960" cy="3108960"/>
           </a:xfrm>
           <a:prstGeom prst="rect">
             <a:avLst/>
@@ -2505,7 +3488,7 @@
           <a:p>
             <a:pPr marL="342900" indent="-342900">
               <a:spcAft>
-                <a:spcPts val="1000"/>
+                <a:spcPts val="800"/>
               </a:spcAft>
               <a:buSzPct val="100000"/>
               <a:buChar char="•"/>
@@ -2513,20 +3496,20 @@
             <a:r>
               <a:rPr lang="en-US" sz="1500" dirty="0">
                 <a:solidFill>
-                  <a:srgbClr val="CADCFC"/>
+                  <a:srgbClr val="3D3A36"/>
                 </a:solidFill>
                 <a:latin typeface="Calibri" pitchFamily="34" charset="0"/>
                 <a:ea typeface="Calibri" pitchFamily="34" charset="-122"/>
                 <a:cs typeface="Calibri" pitchFamily="34" charset="-120"/>
               </a:rPr>
-              <a:t>Same denominators: add/subtract numerators only</a:t>
+              <a:t>Adding denominators: ½ + ⅓ ≠ 2/5 (WRONG! → correct answer is 5/6).</a:t>
             </a:r>
             <a:endParaRPr lang="en-US" sz="1500" dirty="0"/>
           </a:p>
           <a:p>
             <a:pPr marL="342900" indent="-342900">
               <a:spcAft>
-                <a:spcPts val="1000"/>
+                <a:spcPts val="800"/>
               </a:spcAft>
               <a:buSzPct val="100000"/>
               <a:buChar char="•"/>
@@ -2534,20 +3517,20 @@
             <a:r>
               <a:rPr lang="en-US" sz="1500" dirty="0">
                 <a:solidFill>
-                  <a:srgbClr val="CADCFC"/>
+                  <a:srgbClr val="3D3A36"/>
                 </a:solidFill>
                 <a:latin typeface="Calibri" pitchFamily="34" charset="0"/>
                 <a:ea typeface="Calibri" pitchFamily="34" charset="-122"/>
                 <a:cs typeface="Calibri" pitchFamily="34" charset="-120"/>
               </a:rPr>
-              <a:t>Different denominators: find LCM, convert, then add/subtract</a:t>
+              <a:t>Forgetting to find a common denominator before adding.</a:t>
             </a:r>
             <a:endParaRPr lang="en-US" sz="1500" dirty="0"/>
           </a:p>
           <a:p>
             <a:pPr marL="342900" indent="-342900">
               <a:spcAft>
-                <a:spcPts val="1000"/>
+                <a:spcPts val="800"/>
               </a:spcAft>
               <a:buSzPct val="100000"/>
               <a:buChar char="•"/>
@@ -2555,20 +3538,20 @@
             <a:r>
               <a:rPr lang="en-US" sz="1500" dirty="0">
                 <a:solidFill>
-                  <a:srgbClr val="CADCFC"/>
+                  <a:srgbClr val="3D3A36"/>
                 </a:solidFill>
                 <a:latin typeface="Calibri" pitchFamily="34" charset="0"/>
                 <a:ea typeface="Calibri" pitchFamily="34" charset="-122"/>
                 <a:cs typeface="Calibri" pitchFamily="34" charset="-120"/>
               </a:rPr>
-              <a:t>Mixed numbers: convert to improper fractions first</a:t>
+              <a:t>Not simplifying the final answer.</a:t>
             </a:r>
             <a:endParaRPr lang="en-US" sz="1500" dirty="0"/>
           </a:p>
           <a:p>
             <a:pPr marL="342900" indent="-342900">
               <a:spcAft>
-                <a:spcPts val="1000"/>
+                <a:spcPts val="800"/>
               </a:spcAft>
               <a:buSzPct val="100000"/>
               <a:buChar char="•"/>
@@ -2576,20 +3559,20 @@
             <a:r>
               <a:rPr lang="en-US" sz="1500" dirty="0">
                 <a:solidFill>
-                  <a:srgbClr val="CADCFC"/>
+                  <a:srgbClr val="3D3A36"/>
                 </a:solidFill>
                 <a:latin typeface="Calibri" pitchFamily="34" charset="0"/>
                 <a:ea typeface="Calibri" pitchFamily="34" charset="-122"/>
                 <a:cs typeface="Calibri" pitchFamily="34" charset="-120"/>
               </a:rPr>
-              <a:t>NEVER add or change the denominators</a:t>
+              <a:t>Forgetting to convert back from improper to mixed number.</a:t>
             </a:r>
             <a:endParaRPr lang="en-US" sz="1500" dirty="0"/>
           </a:p>
           <a:p>
             <a:pPr marL="342900" indent="-342900">
               <a:spcAft>
-                <a:spcPts val="1000"/>
+                <a:spcPts val="800"/>
               </a:spcAft>
               <a:buSzPct val="100000"/>
               <a:buChar char="•"/>
@@ -2597,18 +3580,110 @@
             <a:r>
               <a:rPr lang="en-US" sz="1500" dirty="0">
                 <a:solidFill>
-                  <a:srgbClr val="CADCFC"/>
+                  <a:srgbClr val="3D3A36"/>
                 </a:solidFill>
                 <a:latin typeface="Calibri" pitchFamily="34" charset="0"/>
                 <a:ea typeface="Calibri" pitchFamily="34" charset="-122"/>
                 <a:cs typeface="Calibri" pitchFamily="34" charset="-120"/>
               </a:rPr>
-              <a:t>Always simplify your final answer</a:t>
+              <a:t>Always check: does my answer make sense?</a:t>
             </a:r>
             <a:endParaRPr lang="en-US" sz="1500" dirty="0"/>
           </a:p>
         </p:txBody>
       </p:sp>
+    </p:spTree>
+  </p:cSld>
+  <p:clrMapOvr>
+    <a:masterClrMapping/>
+  </p:clrMapOvr>
+</p:sld>
+</file>
+
+<file path=ppt/slides/slide6.xml><?xml version="1.0" encoding="utf-8"?>
+<p:sld xmlns:a="http://schemas.openxmlformats.org/drawingml/2006/main" xmlns:r="http://schemas.openxmlformats.org/officeDocument/2006/relationships" xmlns:p="http://schemas.openxmlformats.org/presentationml/2006/main">
+  <p:cSld name="Slide 6">
+    <p:bg>
+      <p:bgPr>
+        <a:solidFill>
+          <a:srgbClr val="FAF8F5"/>
+        </a:solidFill>
+      </p:bgPr>
+    </p:bg>
+    <p:spTree>
+      <p:nvGrpSpPr>
+        <p:cNvPr id="1" name=""/>
+        <p:cNvGrpSpPr/>
+        <p:nvPr/>
+      </p:nvGrpSpPr>
+      <p:grpSpPr>
+        <a:xfrm>
+          <a:off x="0" y="0"/>
+          <a:ext cx="0" cy="0"/>
+          <a:chOff x="0" y="0"/>
+          <a:chExt cx="0" cy="0"/>
+        </a:xfrm>
+      </p:grpSpPr>
+      <p:sp>
+        <p:nvSpPr>
+          <p:cNvPr id="2" name="Shape 0"/>
+          <p:cNvSpPr/>
+          <p:nvPr/>
+        </p:nvSpPr>
+        <p:spPr>
+          <a:xfrm>
+            <a:off x="0" y="0"/>
+            <a:ext cx="9144000" cy="822960"/>
+          </a:xfrm>
+          <a:prstGeom prst="rect">
+            <a:avLst/>
+          </a:prstGeom>
+          <a:solidFill>
+            <a:srgbClr val="FFFFFF"/>
+          </a:solidFill>
+          <a:ln/>
+        </p:spPr>
+      </p:sp>
+      <p:sp>
+        <p:nvSpPr>
+          <p:cNvPr id="3" name="Shape 1"/>
+          <p:cNvSpPr/>
+          <p:nvPr/>
+        </p:nvSpPr>
+        <p:spPr>
+          <a:xfrm>
+            <a:off x="0" y="804672"/>
+            <a:ext cx="9144000" cy="27432"/>
+          </a:xfrm>
+          <a:prstGeom prst="rect">
+            <a:avLst/>
+          </a:prstGeom>
+          <a:solidFill>
+            <a:srgbClr val="E5E2DC"/>
+          </a:solidFill>
+          <a:ln/>
+        </p:spPr>
+      </p:sp>
+      <p:sp>
+        <p:nvSpPr>
+          <p:cNvPr id="4" name="Shape 2"/>
+          <p:cNvSpPr/>
+          <p:nvPr/>
+        </p:nvSpPr>
+        <p:spPr>
+          <a:xfrm>
+            <a:off x="548640" y="201168"/>
+            <a:ext cx="54864" cy="420624"/>
+          </a:xfrm>
+          <a:prstGeom prst="rect">
+            <a:avLst/>
+          </a:prstGeom>
+          <a:solidFill>
+            <a:srgbClr val="2A9D8F"/>
+          </a:solidFill>
+          <a:ln/>
+        </p:spPr>
+      </p:sp>
       <p:sp>
         <p:nvSpPr>
           <p:cNvPr id="5" name="Text 3"/>
@@ -2617,8 +3692,8 @@
         </p:nvSpPr>
         <p:spPr>
           <a:xfrm>
-            <a:off x="731520" y="4572000"/>
-            <a:ext cx="7772400" cy="365760"/>
+            <a:off x="777240" y="137160"/>
+            <a:ext cx="7772400" cy="548640"/>
           </a:xfrm>
           <a:prstGeom prst="rect">
             <a:avLst/>
@@ -2627,24 +3702,783 @@
           <a:ln/>
         </p:spPr>
         <p:txBody>
-          <a:bodyPr wrap="square" rtlCol="0" anchor="ctr"/>
+          <a:bodyPr wrap="square" lIns="0" tIns="0" rIns="0" bIns="0" rtlCol="0" anchor="ctr"/>
           <a:lstStyle/>
           <a:p>
             <a:pPr indent="0" marL="0">
               <a:buNone/>
             </a:pPr>
             <a:r>
-              <a:rPr lang="en-US" sz="1100" dirty="0">
-                <a:solidFill>
-                  <a:srgbClr val="E9C46A"/>
+              <a:rPr lang="en-US" sz="2000" b="1" dirty="0">
+                <a:solidFill>
+                  <a:srgbClr val="1B2A4A"/>
+                </a:solidFill>
+                <a:latin typeface="Georgia" pitchFamily="34" charset="0"/>
+                <a:ea typeface="Georgia" pitchFamily="34" charset="-122"/>
+                <a:cs typeface="Georgia" pitchFamily="34" charset="-120"/>
+              </a:rPr>
+              <a:t>Check Your Understanding</a:t>
+            </a:r>
+            <a:endParaRPr lang="en-US" sz="2000" dirty="0"/>
+          </a:p>
+        </p:txBody>
+      </p:sp>
+      <p:sp>
+        <p:nvSpPr>
+          <p:cNvPr id="6" name="Shape 4"/>
+          <p:cNvSpPr/>
+          <p:nvPr/>
+        </p:nvSpPr>
+        <p:spPr>
+          <a:xfrm>
+            <a:off x="731520" y="1051560"/>
+            <a:ext cx="7680960" cy="438912"/>
+          </a:xfrm>
+          <a:prstGeom prst="rect">
+            <a:avLst/>
+          </a:prstGeom>
+          <a:solidFill>
+            <a:srgbClr val="FFFFFF"/>
+          </a:solidFill>
+          <a:ln/>
+        </p:spPr>
+      </p:sp>
+      <p:sp>
+        <p:nvSpPr>
+          <p:cNvPr id="7" name="Text 5"/>
+          <p:cNvSpPr/>
+          <p:nvPr/>
+        </p:nvSpPr>
+        <p:spPr>
+          <a:xfrm>
+            <a:off x="868680" y="1051560"/>
+            <a:ext cx="320040" cy="438912"/>
+          </a:xfrm>
+          <a:prstGeom prst="rect">
+            <a:avLst/>
+          </a:prstGeom>
+          <a:noFill/>
+          <a:ln/>
+        </p:spPr>
+        <p:txBody>
+          <a:bodyPr wrap="square" rtlCol="0" anchor="ctr"/>
+          <a:lstStyle/>
+          <a:p>
+            <a:pPr indent="0" marL="0">
+              <a:buNone/>
+            </a:pPr>
+            <a:r>
+              <a:rPr lang="en-US" sz="1400" dirty="0">
+                <a:solidFill>
+                  <a:srgbClr val="2A9D8F"/>
+                </a:solidFill>
+              </a:rPr>
+              <a:t>☐</a:t>
+            </a:r>
+            <a:endParaRPr lang="en-US" sz="1400" dirty="0"/>
+          </a:p>
+        </p:txBody>
+      </p:sp>
+      <p:sp>
+        <p:nvSpPr>
+          <p:cNvPr id="8" name="Text 6"/>
+          <p:cNvSpPr/>
+          <p:nvPr/>
+        </p:nvSpPr>
+        <p:spPr>
+          <a:xfrm>
+            <a:off x="1234440" y="1051560"/>
+            <a:ext cx="6949440" cy="438912"/>
+          </a:xfrm>
+          <a:prstGeom prst="rect">
+            <a:avLst/>
+          </a:prstGeom>
+          <a:noFill/>
+          <a:ln/>
+        </p:spPr>
+        <p:txBody>
+          <a:bodyPr wrap="square" rtlCol="0" anchor="ctr"/>
+          <a:lstStyle/>
+          <a:p>
+            <a:pPr indent="0" marL="0">
+              <a:buNone/>
+            </a:pPr>
+            <a:r>
+              <a:rPr lang="en-US" sz="1300" dirty="0">
+                <a:solidFill>
+                  <a:srgbClr val="3D3A36"/>
                 </a:solidFill>
                 <a:latin typeface="Calibri" pitchFamily="34" charset="0"/>
                 <a:ea typeface="Calibri" pitchFamily="34" charset="-122"/>
                 <a:cs typeface="Calibri" pitchFamily="34" charset="-120"/>
               </a:rPr>
+              <a:t>I can add fractions with the same denominator</a:t>
+            </a:r>
+            <a:endParaRPr lang="en-US" sz="1300" dirty="0"/>
+          </a:p>
+        </p:txBody>
+      </p:sp>
+      <p:sp>
+        <p:nvSpPr>
+          <p:cNvPr id="9" name="Shape 7"/>
+          <p:cNvSpPr/>
+          <p:nvPr/>
+        </p:nvSpPr>
+        <p:spPr>
+          <a:xfrm>
+            <a:off x="731520" y="1554480"/>
+            <a:ext cx="7680960" cy="438912"/>
+          </a:xfrm>
+          <a:prstGeom prst="rect">
+            <a:avLst/>
+          </a:prstGeom>
+          <a:solidFill>
+            <a:srgbClr val="F8F6F3"/>
+          </a:solidFill>
+          <a:ln/>
+        </p:spPr>
+      </p:sp>
+      <p:sp>
+        <p:nvSpPr>
+          <p:cNvPr id="10" name="Text 8"/>
+          <p:cNvSpPr/>
+          <p:nvPr/>
+        </p:nvSpPr>
+        <p:spPr>
+          <a:xfrm>
+            <a:off x="868680" y="1554480"/>
+            <a:ext cx="320040" cy="438912"/>
+          </a:xfrm>
+          <a:prstGeom prst="rect">
+            <a:avLst/>
+          </a:prstGeom>
+          <a:noFill/>
+          <a:ln/>
+        </p:spPr>
+        <p:txBody>
+          <a:bodyPr wrap="square" rtlCol="0" anchor="ctr"/>
+          <a:lstStyle/>
+          <a:p>
+            <a:pPr indent="0" marL="0">
+              <a:buNone/>
+            </a:pPr>
+            <a:r>
+              <a:rPr lang="en-US" sz="1400" dirty="0">
+                <a:solidFill>
+                  <a:srgbClr val="2A9D8F"/>
+                </a:solidFill>
+              </a:rPr>
+              <a:t>☐</a:t>
+            </a:r>
+            <a:endParaRPr lang="en-US" sz="1400" dirty="0"/>
+          </a:p>
+        </p:txBody>
+      </p:sp>
+      <p:sp>
+        <p:nvSpPr>
+          <p:cNvPr id="11" name="Text 9"/>
+          <p:cNvSpPr/>
+          <p:nvPr/>
+        </p:nvSpPr>
+        <p:spPr>
+          <a:xfrm>
+            <a:off x="1234440" y="1554480"/>
+            <a:ext cx="6949440" cy="438912"/>
+          </a:xfrm>
+          <a:prstGeom prst="rect">
+            <a:avLst/>
+          </a:prstGeom>
+          <a:noFill/>
+          <a:ln/>
+        </p:spPr>
+        <p:txBody>
+          <a:bodyPr wrap="square" rtlCol="0" anchor="ctr"/>
+          <a:lstStyle/>
+          <a:p>
+            <a:pPr indent="0" marL="0">
+              <a:buNone/>
+            </a:pPr>
+            <a:r>
+              <a:rPr lang="en-US" sz="1300" dirty="0">
+                <a:solidFill>
+                  <a:srgbClr val="3D3A36"/>
+                </a:solidFill>
+                <a:latin typeface="Calibri" pitchFamily="34" charset="0"/>
+                <a:ea typeface="Calibri" pitchFamily="34" charset="-122"/>
+                <a:cs typeface="Calibri" pitchFamily="34" charset="-120"/>
+              </a:rPr>
+              <a:t>I can add fractions with different denominators (find LCM)</a:t>
+            </a:r>
+            <a:endParaRPr lang="en-US" sz="1300" dirty="0"/>
+          </a:p>
+        </p:txBody>
+      </p:sp>
+      <p:sp>
+        <p:nvSpPr>
+          <p:cNvPr id="12" name="Shape 10"/>
+          <p:cNvSpPr/>
+          <p:nvPr/>
+        </p:nvSpPr>
+        <p:spPr>
+          <a:xfrm>
+            <a:off x="731520" y="2057400"/>
+            <a:ext cx="7680960" cy="438912"/>
+          </a:xfrm>
+          <a:prstGeom prst="rect">
+            <a:avLst/>
+          </a:prstGeom>
+          <a:solidFill>
+            <a:srgbClr val="FFFFFF"/>
+          </a:solidFill>
+          <a:ln/>
+        </p:spPr>
+      </p:sp>
+      <p:sp>
+        <p:nvSpPr>
+          <p:cNvPr id="13" name="Text 11"/>
+          <p:cNvSpPr/>
+          <p:nvPr/>
+        </p:nvSpPr>
+        <p:spPr>
+          <a:xfrm>
+            <a:off x="868680" y="2057400"/>
+            <a:ext cx="320040" cy="438912"/>
+          </a:xfrm>
+          <a:prstGeom prst="rect">
+            <a:avLst/>
+          </a:prstGeom>
+          <a:noFill/>
+          <a:ln/>
+        </p:spPr>
+        <p:txBody>
+          <a:bodyPr wrap="square" rtlCol="0" anchor="ctr"/>
+          <a:lstStyle/>
+          <a:p>
+            <a:pPr indent="0" marL="0">
+              <a:buNone/>
+            </a:pPr>
+            <a:r>
+              <a:rPr lang="en-US" sz="1400" dirty="0">
+                <a:solidFill>
+                  <a:srgbClr val="2A9D8F"/>
+                </a:solidFill>
+              </a:rPr>
+              <a:t>☐</a:t>
+            </a:r>
+            <a:endParaRPr lang="en-US" sz="1400" dirty="0"/>
+          </a:p>
+        </p:txBody>
+      </p:sp>
+      <p:sp>
+        <p:nvSpPr>
+          <p:cNvPr id="14" name="Text 12"/>
+          <p:cNvSpPr/>
+          <p:nvPr/>
+        </p:nvSpPr>
+        <p:spPr>
+          <a:xfrm>
+            <a:off x="1234440" y="2057400"/>
+            <a:ext cx="6949440" cy="438912"/>
+          </a:xfrm>
+          <a:prstGeom prst="rect">
+            <a:avLst/>
+          </a:prstGeom>
+          <a:noFill/>
+          <a:ln/>
+        </p:spPr>
+        <p:txBody>
+          <a:bodyPr wrap="square" rtlCol="0" anchor="ctr"/>
+          <a:lstStyle/>
+          <a:p>
+            <a:pPr indent="0" marL="0">
+              <a:buNone/>
+            </a:pPr>
+            <a:r>
+              <a:rPr lang="en-US" sz="1300" dirty="0">
+                <a:solidFill>
+                  <a:srgbClr val="3D3A36"/>
+                </a:solidFill>
+                <a:latin typeface="Calibri" pitchFamily="34" charset="0"/>
+                <a:ea typeface="Calibri" pitchFamily="34" charset="-122"/>
+                <a:cs typeface="Calibri" pitchFamily="34" charset="-120"/>
+              </a:rPr>
+              <a:t>I can subtract fractions</a:t>
+            </a:r>
+            <a:endParaRPr lang="en-US" sz="1300" dirty="0"/>
+          </a:p>
+        </p:txBody>
+      </p:sp>
+      <p:sp>
+        <p:nvSpPr>
+          <p:cNvPr id="15" name="Shape 13"/>
+          <p:cNvSpPr/>
+          <p:nvPr/>
+        </p:nvSpPr>
+        <p:spPr>
+          <a:xfrm>
+            <a:off x="731520" y="2560320"/>
+            <a:ext cx="7680960" cy="438912"/>
+          </a:xfrm>
+          <a:prstGeom prst="rect">
+            <a:avLst/>
+          </a:prstGeom>
+          <a:solidFill>
+            <a:srgbClr val="F8F6F3"/>
+          </a:solidFill>
+          <a:ln/>
+        </p:spPr>
+      </p:sp>
+      <p:sp>
+        <p:nvSpPr>
+          <p:cNvPr id="16" name="Text 14"/>
+          <p:cNvSpPr/>
+          <p:nvPr/>
+        </p:nvSpPr>
+        <p:spPr>
+          <a:xfrm>
+            <a:off x="868680" y="2560320"/>
+            <a:ext cx="320040" cy="438912"/>
+          </a:xfrm>
+          <a:prstGeom prst="rect">
+            <a:avLst/>
+          </a:prstGeom>
+          <a:noFill/>
+          <a:ln/>
+        </p:spPr>
+        <p:txBody>
+          <a:bodyPr wrap="square" rtlCol="0" anchor="ctr"/>
+          <a:lstStyle/>
+          <a:p>
+            <a:pPr indent="0" marL="0">
+              <a:buNone/>
+            </a:pPr>
+            <a:r>
+              <a:rPr lang="en-US" sz="1400" dirty="0">
+                <a:solidFill>
+                  <a:srgbClr val="2A9D8F"/>
+                </a:solidFill>
+              </a:rPr>
+              <a:t>☐</a:t>
+            </a:r>
+            <a:endParaRPr lang="en-US" sz="1400" dirty="0"/>
+          </a:p>
+        </p:txBody>
+      </p:sp>
+      <p:sp>
+        <p:nvSpPr>
+          <p:cNvPr id="17" name="Text 15"/>
+          <p:cNvSpPr/>
+          <p:nvPr/>
+        </p:nvSpPr>
+        <p:spPr>
+          <a:xfrm>
+            <a:off x="1234440" y="2560320"/>
+            <a:ext cx="6949440" cy="438912"/>
+          </a:xfrm>
+          <a:prstGeom prst="rect">
+            <a:avLst/>
+          </a:prstGeom>
+          <a:noFill/>
+          <a:ln/>
+        </p:spPr>
+        <p:txBody>
+          <a:bodyPr wrap="square" rtlCol="0" anchor="ctr"/>
+          <a:lstStyle/>
+          <a:p>
+            <a:pPr indent="0" marL="0">
+              <a:buNone/>
+            </a:pPr>
+            <a:r>
+              <a:rPr lang="en-US" sz="1300" dirty="0">
+                <a:solidFill>
+                  <a:srgbClr val="3D3A36"/>
+                </a:solidFill>
+                <a:latin typeface="Calibri" pitchFamily="34" charset="0"/>
+                <a:ea typeface="Calibri" pitchFamily="34" charset="-122"/>
+                <a:cs typeface="Calibri" pitchFamily="34" charset="-120"/>
+              </a:rPr>
+              <a:t>I can add and subtract mixed numbers</a:t>
+            </a:r>
+            <a:endParaRPr lang="en-US" sz="1300" dirty="0"/>
+          </a:p>
+        </p:txBody>
+      </p:sp>
+      <p:sp>
+        <p:nvSpPr>
+          <p:cNvPr id="18" name="Shape 16"/>
+          <p:cNvSpPr/>
+          <p:nvPr/>
+        </p:nvSpPr>
+        <p:spPr>
+          <a:xfrm>
+            <a:off x="731520" y="3063240"/>
+            <a:ext cx="7680960" cy="438912"/>
+          </a:xfrm>
+          <a:prstGeom prst="rect">
+            <a:avLst/>
+          </a:prstGeom>
+          <a:solidFill>
+            <a:srgbClr val="FFFFFF"/>
+          </a:solidFill>
+          <a:ln/>
+        </p:spPr>
+      </p:sp>
+      <p:sp>
+        <p:nvSpPr>
+          <p:cNvPr id="19" name="Text 17"/>
+          <p:cNvSpPr/>
+          <p:nvPr/>
+        </p:nvSpPr>
+        <p:spPr>
+          <a:xfrm>
+            <a:off x="868680" y="3063240"/>
+            <a:ext cx="320040" cy="438912"/>
+          </a:xfrm>
+          <a:prstGeom prst="rect">
+            <a:avLst/>
+          </a:prstGeom>
+          <a:noFill/>
+          <a:ln/>
+        </p:spPr>
+        <p:txBody>
+          <a:bodyPr wrap="square" rtlCol="0" anchor="ctr"/>
+          <a:lstStyle/>
+          <a:p>
+            <a:pPr indent="0" marL="0">
+              <a:buNone/>
+            </a:pPr>
+            <a:r>
+              <a:rPr lang="en-US" sz="1400" dirty="0">
+                <a:solidFill>
+                  <a:srgbClr val="2A9D8F"/>
+                </a:solidFill>
+              </a:rPr>
+              <a:t>☐</a:t>
+            </a:r>
+            <a:endParaRPr lang="en-US" sz="1400" dirty="0"/>
+          </a:p>
+        </p:txBody>
+      </p:sp>
+      <p:sp>
+        <p:nvSpPr>
+          <p:cNvPr id="20" name="Text 18"/>
+          <p:cNvSpPr/>
+          <p:nvPr/>
+        </p:nvSpPr>
+        <p:spPr>
+          <a:xfrm>
+            <a:off x="1234440" y="3063240"/>
+            <a:ext cx="6949440" cy="438912"/>
+          </a:xfrm>
+          <a:prstGeom prst="rect">
+            <a:avLst/>
+          </a:prstGeom>
+          <a:noFill/>
+          <a:ln/>
+        </p:spPr>
+        <p:txBody>
+          <a:bodyPr wrap="square" rtlCol="0" anchor="ctr"/>
+          <a:lstStyle/>
+          <a:p>
+            <a:pPr indent="0" marL="0">
+              <a:buNone/>
+            </a:pPr>
+            <a:r>
+              <a:rPr lang="en-US" sz="1300" dirty="0">
+                <a:solidFill>
+                  <a:srgbClr val="3D3A36"/>
+                </a:solidFill>
+                <a:latin typeface="Calibri" pitchFamily="34" charset="0"/>
+                <a:ea typeface="Calibri" pitchFamily="34" charset="-122"/>
+                <a:cs typeface="Calibri" pitchFamily="34" charset="-120"/>
+              </a:rPr>
+              <a:t>I always simplify my final answer</a:t>
+            </a:r>
+            <a:endParaRPr lang="en-US" sz="1300" dirty="0"/>
+          </a:p>
+        </p:txBody>
+      </p:sp>
+      <p:sp>
+        <p:nvSpPr>
+          <p:cNvPr id="21" name="Shape 19"/>
+          <p:cNvSpPr/>
+          <p:nvPr/>
+        </p:nvSpPr>
+        <p:spPr>
+          <a:xfrm>
+            <a:off x="731520" y="3749040"/>
+            <a:ext cx="7680960" cy="594360"/>
+          </a:xfrm>
+          <a:prstGeom prst="rect">
+            <a:avLst/>
+          </a:prstGeom>
+          <a:solidFill>
+            <a:srgbClr val="E8F5F3"/>
+          </a:solidFill>
+          <a:ln/>
+          <a:effectLst>
+            <a:outerShdw sx="100000" sy="100000" kx="0" ky="0" algn="bl" rotWithShape="0" blurRad="50800" dist="25400" dir="8100000">
+              <a:srgbClr val="000000">
+                <a:alpha val="10000"/>
+              </a:srgbClr>
+            </a:outerShdw>
+          </a:effectLst>
+        </p:spPr>
+      </p:sp>
+      <p:sp>
+        <p:nvSpPr>
+          <p:cNvPr id="22" name="Text 20"/>
+          <p:cNvSpPr/>
+          <p:nvPr/>
+        </p:nvSpPr>
+        <p:spPr>
+          <a:xfrm>
+            <a:off x="914400" y="3749040"/>
+            <a:ext cx="7315200" cy="594360"/>
+          </a:xfrm>
+          <a:prstGeom prst="rect">
+            <a:avLst/>
+          </a:prstGeom>
+          <a:noFill/>
+          <a:ln/>
+        </p:spPr>
+        <p:txBody>
+          <a:bodyPr wrap="square" rtlCol="0" anchor="ctr"/>
+          <a:lstStyle/>
+          <a:p>
+            <a:pPr indent="0" marL="0">
+              <a:buNone/>
+            </a:pPr>
+            <a:r>
+              <a:rPr lang="en-US" sz="1200" b="1" dirty="0">
+                <a:solidFill>
+                  <a:srgbClr val="2A9D8F"/>
+                </a:solidFill>
+                <a:latin typeface="Calibri" pitchFamily="34" charset="0"/>
+                <a:ea typeface="Calibri" pitchFamily="34" charset="-122"/>
+                <a:cs typeface="Calibri" pitchFamily="34" charset="-120"/>
+              </a:rPr>
+              <a:t>Key Idea: </a:t>
+            </a:r>
+            <a:pPr indent="0" marL="0">
+              <a:buNone/>
+            </a:pPr>
+            <a:r>
+              <a:rPr lang="en-US" sz="1200" i="1" dirty="0">
+                <a:solidFill>
+                  <a:srgbClr val="3D3A36"/>
+                </a:solidFill>
+                <a:latin typeface="Calibri" pitchFamily="34" charset="0"/>
+                <a:ea typeface="Calibri" pitchFamily="34" charset="-122"/>
+                <a:cs typeface="Calibri" pitchFamily="34" charset="-120"/>
+              </a:rPr>
+              <a:t>Never add denominators — only add numerators after making denominators the same.</a:t>
+            </a:r>
+            <a:endParaRPr lang="en-US" sz="1200" dirty="0"/>
+          </a:p>
+        </p:txBody>
+      </p:sp>
+    </p:spTree>
+  </p:cSld>
+  <p:clrMapOvr>
+    <a:masterClrMapping/>
+  </p:clrMapOvr>
+</p:sld>
+</file>
+
+<file path=ppt/slides/slide7.xml><?xml version="1.0" encoding="utf-8"?>
+<p:sld xmlns:a="http://schemas.openxmlformats.org/drawingml/2006/main" xmlns:r="http://schemas.openxmlformats.org/officeDocument/2006/relationships" xmlns:p="http://schemas.openxmlformats.org/presentationml/2006/main">
+  <p:cSld name="Slide 7">
+    <p:spTree>
+      <p:nvGrpSpPr>
+        <p:cNvPr id="1" name=""/>
+        <p:cNvGrpSpPr/>
+        <p:nvPr/>
+      </p:nvGrpSpPr>
+      <p:grpSpPr>
+        <a:xfrm>
+          <a:off x="0" y="0"/>
+          <a:ext cx="0" cy="0"/>
+          <a:chOff x="0" y="0"/>
+          <a:chExt cx="0" cy="0"/>
+        </a:xfrm>
+      </p:grpSpPr>
+      <p:sp>
+        <p:nvSpPr>
+          <p:cNvPr id="2" name="Shape 0"/>
+          <p:cNvSpPr/>
+          <p:nvPr/>
+        </p:nvSpPr>
+        <p:spPr>
+          <a:xfrm>
+            <a:off x="0" y="0"/>
+            <a:ext cx="9144000" cy="5143500"/>
+          </a:xfrm>
+          <a:prstGeom prst="rect">
+            <a:avLst/>
+          </a:prstGeom>
+          <a:solidFill>
+            <a:srgbClr val="1B2A4A"/>
+          </a:solidFill>
+          <a:ln/>
+        </p:spPr>
+      </p:sp>
+      <p:sp>
+        <p:nvSpPr>
+          <p:cNvPr id="3" name="Shape 1"/>
+          <p:cNvSpPr/>
+          <p:nvPr/>
+        </p:nvSpPr>
+        <p:spPr>
+          <a:xfrm>
+            <a:off x="0" y="4777740"/>
+            <a:ext cx="9144000" cy="365760"/>
+          </a:xfrm>
+          <a:prstGeom prst="rect">
+            <a:avLst/>
+          </a:prstGeom>
+          <a:solidFill>
+            <a:srgbClr val="2A9D8F"/>
+          </a:solidFill>
+          <a:ln/>
+        </p:spPr>
+      </p:sp>
+      <p:sp>
+        <p:nvSpPr>
+          <p:cNvPr id="4" name="Shape 2"/>
+          <p:cNvSpPr/>
+          <p:nvPr/>
+        </p:nvSpPr>
+        <p:spPr>
+          <a:xfrm>
+            <a:off x="-914400" y="-914400"/>
+            <a:ext cx="3657600" cy="3657600"/>
+          </a:xfrm>
+          <a:prstGeom prst="ellipse">
+            <a:avLst/>
+          </a:prstGeom>
+          <a:solidFill>
+            <a:srgbClr val="2A9D8F">
+              <a:alpha val="10000"/>
+            </a:srgbClr>
+          </a:solidFill>
+          <a:ln/>
+        </p:spPr>
+      </p:sp>
+      <p:sp>
+        <p:nvSpPr>
+          <p:cNvPr id="5" name="Text 3"/>
+          <p:cNvSpPr/>
+          <p:nvPr/>
+        </p:nvSpPr>
+        <p:spPr>
+          <a:xfrm>
+            <a:off x="731520" y="1463040"/>
+            <a:ext cx="7680960" cy="822960"/>
+          </a:xfrm>
+          <a:prstGeom prst="rect">
+            <a:avLst/>
+          </a:prstGeom>
+          <a:noFill/>
+          <a:ln/>
+        </p:spPr>
+        <p:txBody>
+          <a:bodyPr wrap="square" rtlCol="0" anchor="ctr"/>
+          <a:lstStyle/>
+          <a:p>
+            <a:pPr algn="ctr" indent="0" marL="0">
+              <a:buNone/>
+            </a:pPr>
+            <a:r>
+              <a:rPr lang="en-US" sz="3400" b="1" dirty="0">
+                <a:solidFill>
+                  <a:srgbClr val="FFFFFF"/>
+                </a:solidFill>
+                <a:latin typeface="Georgia" pitchFamily="34" charset="0"/>
+                <a:ea typeface="Georgia" pitchFamily="34" charset="-122"/>
+                <a:cs typeface="Georgia" pitchFamily="34" charset="-120"/>
+              </a:rPr>
+              <a:t>Review &amp; Practise</a:t>
+            </a:r>
+            <a:endParaRPr lang="en-US" sz="3400" dirty="0"/>
+          </a:p>
+        </p:txBody>
+      </p:sp>
+      <p:sp>
+        <p:nvSpPr>
+          <p:cNvPr id="6" name="Text 4"/>
+          <p:cNvSpPr/>
+          <p:nvPr/>
+        </p:nvSpPr>
+        <p:spPr>
+          <a:xfrm>
+            <a:off x="731520" y="2468880"/>
+            <a:ext cx="7680960" cy="457200"/>
+          </a:xfrm>
+          <a:prstGeom prst="rect">
+            <a:avLst/>
+          </a:prstGeom>
+          <a:noFill/>
+          <a:ln/>
+        </p:spPr>
+        <p:txBody>
+          <a:bodyPr wrap="square" rtlCol="0" anchor="ctr"/>
+          <a:lstStyle/>
+          <a:p>
+            <a:pPr algn="ctr" indent="0" marL="0">
+              <a:buNone/>
+            </a:pPr>
+            <a:r>
+              <a:rPr lang="en-US" sz="1800" dirty="0">
+                <a:solidFill>
+                  <a:srgbClr val="2A9D8F"/>
+                </a:solidFill>
+                <a:latin typeface="Calibri" pitchFamily="34" charset="0"/>
+                <a:ea typeface="Calibri" pitchFamily="34" charset="-122"/>
+                <a:cs typeface="Calibri" pitchFamily="34" charset="-120"/>
+              </a:rPr>
               <a:t>mrzocchi.com</a:t>
             </a:r>
-            <a:endParaRPr lang="en-US" sz="1100" dirty="0"/>
+            <a:endParaRPr lang="en-US" sz="1800" dirty="0"/>
+          </a:p>
+        </p:txBody>
+      </p:sp>
+      <p:sp>
+        <p:nvSpPr>
+          <p:cNvPr id="7" name="Text 5"/>
+          <p:cNvSpPr/>
+          <p:nvPr/>
+        </p:nvSpPr>
+        <p:spPr>
+          <a:xfrm>
+            <a:off x="731520" y="3108960"/>
+            <a:ext cx="7680960" cy="457200"/>
+          </a:xfrm>
+          <a:prstGeom prst="rect">
+            <a:avLst/>
+          </a:prstGeom>
+          <a:noFill/>
+          <a:ln/>
+        </p:spPr>
+        <p:txBody>
+          <a:bodyPr wrap="square" rtlCol="0" anchor="ctr"/>
+          <a:lstStyle/>
+          <a:p>
+            <a:pPr algn="ctr" indent="0" marL="0">
+              <a:buNone/>
+            </a:pPr>
+            <a:r>
+              <a:rPr lang="en-US" sz="1300" dirty="0">
+                <a:solidFill>
+                  <a:srgbClr val="9B9690"/>
+                </a:solidFill>
+                <a:latin typeface="Calibri" pitchFamily="34" charset="0"/>
+                <a:ea typeface="Calibri" pitchFamily="34" charset="-122"/>
+                <a:cs typeface="Calibri" pitchFamily="34" charset="-120"/>
+              </a:rPr>
+              <a:t>Use the Self-Quiz, Review Games, and Practice Builder to test yourself.</a:t>
+            </a:r>
+            <a:endParaRPr lang="en-US" sz="1300" dirty="0"/>
           </a:p>
         </p:txBody>
       </p:sp>

--- a/static/ppts/G6_Math_T2_Add_Sub_Fractions.pptx
+++ b/static/ppts/G6_Math_T2_Add_Sub_Fractions.pptx
@@ -16,8 +16,8 @@
   <p:notesMasterIdLst>
     <p:notesMasterId r:id="rId9"/>
   </p:notesMasterIdLst>
-  <p:sldSz cx="9144000" cy="5143500"/>
-  <p:notesSz cx="5143500" cy="9144000"/>
+  <p:sldSz cx="12192000" cy="6858000"/>
+  <p:notesSz cx="6858000" cy="12192000"/>
   <p:defaultTextStyle>
     <a:lvl1pPr marL="0" algn="l" defTabSz="914400" rtl="0" eaLnBrk="1" latinLnBrk="0" hangingPunct="1">
       <a:defRPr sz="1800" kern="1200">
@@ -1388,6 +1388,13 @@
 <file path=ppt/slides/slide1.xml><?xml version="1.0" encoding="utf-8"?>
 <p:sld xmlns:a="http://schemas.openxmlformats.org/drawingml/2006/main" xmlns:r="http://schemas.openxmlformats.org/officeDocument/2006/relationships" xmlns:p="http://schemas.openxmlformats.org/presentationml/2006/main">
   <p:cSld name="Slide 1">
+    <p:bg>
+      <p:bgPr>
+        <a:solidFill>
+          <a:srgbClr val="2A9D8F"/>
+        </a:solidFill>
+      </p:bgPr>
+    </p:bg>
     <p:spTree>
       <p:nvGrpSpPr>
         <p:cNvPr id="1" name=""/>
@@ -1410,55 +1417,15 @@
         </p:nvSpPr>
         <p:spPr>
           <a:xfrm>
-            <a:off x="0" y="0"/>
-            <a:ext cx="9144000" cy="5143500"/>
-          </a:xfrm>
-          <a:prstGeom prst="rect">
+            <a:off x="7772400" y="-914400"/>
+            <a:ext cx="3657600" cy="3657600"/>
+          </a:xfrm>
+          <a:prstGeom prst="ellipse">
             <a:avLst/>
           </a:prstGeom>
           <a:solidFill>
-            <a:srgbClr val="1B2A4A"/>
-          </a:solidFill>
-          <a:ln/>
-        </p:spPr>
-      </p:sp>
-      <p:sp>
-        <p:nvSpPr>
-          <p:cNvPr id="3" name="Shape 1"/>
-          <p:cNvSpPr/>
-          <p:nvPr/>
-        </p:nvSpPr>
-        <p:spPr>
-          <a:xfrm>
-            <a:off x="0" y="4777740"/>
-            <a:ext cx="9144000" cy="365760"/>
-          </a:xfrm>
-          <a:prstGeom prst="rect">
-            <a:avLst/>
-          </a:prstGeom>
-          <a:solidFill>
-            <a:srgbClr val="2A9D8F"/>
-          </a:solidFill>
-          <a:ln/>
-        </p:spPr>
-      </p:sp>
-      <p:sp>
-        <p:nvSpPr>
-          <p:cNvPr id="4" name="Shape 2"/>
-          <p:cNvSpPr/>
-          <p:nvPr/>
-        </p:nvSpPr>
-        <p:spPr>
-          <a:xfrm>
-            <a:off x="6858000" y="-1371600"/>
-            <a:ext cx="4572000" cy="4572000"/>
-          </a:xfrm>
-          <a:prstGeom prst="ellipse">
-            <a:avLst/>
-          </a:prstGeom>
-          <a:solidFill>
-            <a:srgbClr val="2A9D8F">
-              <a:alpha val="12000"/>
+            <a:srgbClr val="FFFFFF">
+              <a:alpha val="8000"/>
             </a:srgbClr>
           </a:solidFill>
           <a:ln/>
@@ -1466,14 +1433,14 @@
       </p:sp>
       <p:sp>
         <p:nvSpPr>
-          <p:cNvPr id="5" name="Text 3"/>
-          <p:cNvSpPr/>
-          <p:nvPr/>
-        </p:nvSpPr>
-        <p:spPr>
-          <a:xfrm>
-            <a:off x="731520" y="914400"/>
-            <a:ext cx="7680960" cy="457200"/>
+          <p:cNvPr id="3" name="Text 1"/>
+          <p:cNvSpPr/>
+          <p:nvPr/>
+        </p:nvSpPr>
+        <p:spPr>
+          <a:xfrm>
+            <a:off x="731520" y="548640"/>
+            <a:ext cx="7315200" cy="365760"/>
           </a:xfrm>
           <a:prstGeom prst="rect">
             <a:avLst/>
@@ -1489,30 +1456,30 @@
               <a:buNone/>
             </a:pPr>
             <a:r>
-              <a:rPr lang="en-US" sz="1300" b="1" spc="500" kern="0" dirty="0">
-                <a:solidFill>
-                  <a:srgbClr val="2A9D8F"/>
-                </a:solidFill>
-                <a:latin typeface="Calibri" pitchFamily="34" charset="0"/>
-                <a:ea typeface="Calibri" pitchFamily="34" charset="-122"/>
-                <a:cs typeface="Calibri" pitchFamily="34" charset="-120"/>
+              <a:rPr lang="en-US" sz="1100" b="1" dirty="0">
+                <a:solidFill>
+                  <a:srgbClr val="F2D68A"/>
+                </a:solidFill>
+                <a:latin typeface="Arial" pitchFamily="34" charset="0"/>
+                <a:ea typeface="Arial" pitchFamily="34" charset="-122"/>
+                <a:cs typeface="Arial" pitchFamily="34" charset="-120"/>
               </a:rPr>
               <a:t>GRADE 6 MATHEMATICS</a:t>
             </a:r>
-            <a:endParaRPr lang="en-US" sz="1300" dirty="0"/>
-          </a:p>
-        </p:txBody>
-      </p:sp>
-      <p:sp>
-        <p:nvSpPr>
-          <p:cNvPr id="6" name="Text 4"/>
-          <p:cNvSpPr/>
-          <p:nvPr/>
-        </p:nvSpPr>
-        <p:spPr>
-          <a:xfrm>
-            <a:off x="731520" y="1463040"/>
-            <a:ext cx="6858000" cy="1645920"/>
+            <a:endParaRPr lang="en-US" sz="1100" dirty="0"/>
+          </a:p>
+        </p:txBody>
+      </p:sp>
+      <p:sp>
+        <p:nvSpPr>
+          <p:cNvPr id="4" name="Text 2"/>
+          <p:cNvSpPr/>
+          <p:nvPr/>
+        </p:nvSpPr>
+        <p:spPr>
+          <a:xfrm>
+            <a:off x="731520" y="1371600"/>
+            <a:ext cx="9144000" cy="1645920"/>
           </a:xfrm>
           <a:prstGeom prst="rect">
             <a:avLst/>
@@ -1521,14 +1488,17 @@
           <a:ln/>
         </p:spPr>
         <p:txBody>
-          <a:bodyPr wrap="square" rtlCol="0" anchor="t"/>
+          <a:bodyPr wrap="square" rtlCol="0" anchor="ctr"/>
           <a:lstStyle/>
           <a:p>
             <a:pPr indent="0" marL="0">
+              <a:lnSpc>
+                <a:spcPct val="110000"/>
+              </a:lnSpc>
               <a:buNone/>
             </a:pPr>
             <a:r>
-              <a:rPr lang="en-US" sz="3800" b="1" dirty="0">
+              <a:rPr lang="en-US" sz="3600" b="1" dirty="0">
                 <a:solidFill>
                   <a:srgbClr val="FFFFFF"/>
                 </a:solidFill>
@@ -1536,39 +1506,63 @@
                 <a:ea typeface="Georgia" pitchFamily="34" charset="-122"/>
                 <a:cs typeface="Georgia" pitchFamily="34" charset="-120"/>
               </a:rPr>
-              <a:t>Adding &amp; Subtracting</a:t>
-            </a:r>
-            <a:endParaRPr lang="en-US" sz="3800" dirty="0"/>
-          </a:p>
+              <a:t>Adding &amp; Subtracting Fractions</a:t>
+            </a:r>
+            <a:endParaRPr lang="en-US" sz="3600" dirty="0"/>
+          </a:p>
+        </p:txBody>
+      </p:sp>
+      <p:sp>
+        <p:nvSpPr>
+          <p:cNvPr id="5" name="Text 3"/>
+          <p:cNvSpPr/>
+          <p:nvPr/>
+        </p:nvSpPr>
+        <p:spPr>
+          <a:xfrm>
+            <a:off x="731520" y="3200400"/>
+            <a:ext cx="7315200" cy="548640"/>
+          </a:xfrm>
+          <a:prstGeom prst="rect">
+            <a:avLst/>
+          </a:prstGeom>
+          <a:noFill/>
+          <a:ln/>
+        </p:spPr>
+        <p:txBody>
+          <a:bodyPr wrap="square" rtlCol="0" anchor="ctr"/>
+          <a:lstStyle/>
           <a:p>
             <a:pPr indent="0" marL="0">
               <a:buNone/>
             </a:pPr>
             <a:r>
-              <a:rPr lang="en-US" sz="3800" b="1" dirty="0">
-                <a:solidFill>
-                  <a:srgbClr val="FFFFFF"/>
-                </a:solidFill>
-                <a:latin typeface="Georgia" pitchFamily="34" charset="0"/>
-                <a:ea typeface="Georgia" pitchFamily="34" charset="-122"/>
-                <a:cs typeface="Georgia" pitchFamily="34" charset="-120"/>
-              </a:rPr>
-              <a:t>Fractions</a:t>
-            </a:r>
-            <a:endParaRPr lang="en-US" sz="3800" dirty="0"/>
-          </a:p>
-        </p:txBody>
-      </p:sp>
-      <p:sp>
-        <p:nvSpPr>
-          <p:cNvPr id="7" name="Text 5"/>
-          <p:cNvSpPr/>
-          <p:nvPr/>
-        </p:nvSpPr>
-        <p:spPr>
-          <a:xfrm>
-            <a:off x="731520" y="3200400"/>
-            <a:ext cx="6400800" cy="548640"/>
+              <a:rPr lang="en-US" sz="1600" dirty="0">
+                <a:solidFill>
+                  <a:srgbClr val="FFFFFF">
+                    <a:alpha val="65000"/>
+                  </a:srgbClr>
+                </a:solidFill>
+                <a:latin typeface="Arial" pitchFamily="34" charset="0"/>
+                <a:ea typeface="Arial" pitchFamily="34" charset="-122"/>
+                <a:cs typeface="Arial" pitchFamily="34" charset="-120"/>
+              </a:rPr>
+              <a:t>Combining parts of a whole</a:t>
+            </a:r>
+            <a:endParaRPr lang="en-US" sz="1600" dirty="0"/>
+          </a:p>
+        </p:txBody>
+      </p:sp>
+      <p:sp>
+        <p:nvSpPr>
+          <p:cNvPr id="6" name="Text 4"/>
+          <p:cNvSpPr/>
+          <p:nvPr/>
+        </p:nvSpPr>
+        <p:spPr>
+          <a:xfrm>
+            <a:off x="731520" y="4389120"/>
+            <a:ext cx="2743200" cy="320040"/>
           </a:xfrm>
           <a:prstGeom prst="rect">
             <a:avLst/>
@@ -1584,56 +1578,19 @@
               <a:buNone/>
             </a:pPr>
             <a:r>
-              <a:rPr lang="en-US" sz="1600" i="1" dirty="0">
-                <a:solidFill>
-                  <a:srgbClr val="9B9690"/>
-                </a:solidFill>
-                <a:latin typeface="Calibri" pitchFamily="34" charset="0"/>
-                <a:ea typeface="Calibri" pitchFamily="34" charset="-122"/>
-                <a:cs typeface="Calibri" pitchFamily="34" charset="-120"/>
-              </a:rPr>
-              <a:t>Combining and finding differences between fractions</a:t>
-            </a:r>
-            <a:endParaRPr lang="en-US" sz="1600" dirty="0"/>
-          </a:p>
-        </p:txBody>
-      </p:sp>
-      <p:sp>
-        <p:nvSpPr>
-          <p:cNvPr id="8" name="Text 6"/>
-          <p:cNvSpPr/>
-          <p:nvPr/>
-        </p:nvSpPr>
-        <p:spPr>
-          <a:xfrm>
-            <a:off x="731520" y="4297680"/>
-            <a:ext cx="2743200" cy="365760"/>
-          </a:xfrm>
-          <a:prstGeom prst="rect">
-            <a:avLst/>
-          </a:prstGeom>
-          <a:noFill/>
-          <a:ln/>
-        </p:spPr>
-        <p:txBody>
-          <a:bodyPr wrap="square" rtlCol="0" anchor="ctr"/>
-          <a:lstStyle/>
-          <a:p>
-            <a:pPr indent="0" marL="0">
-              <a:buNone/>
-            </a:pPr>
-            <a:r>
-              <a:rPr lang="en-US" sz="1100" dirty="0">
-                <a:solidFill>
-                  <a:srgbClr val="9B9690"/>
-                </a:solidFill>
-                <a:latin typeface="Calibri" pitchFamily="34" charset="0"/>
-                <a:ea typeface="Calibri" pitchFamily="34" charset="-122"/>
-                <a:cs typeface="Calibri" pitchFamily="34" charset="-120"/>
+              <a:rPr lang="en-US" sz="1000" dirty="0">
+                <a:solidFill>
+                  <a:srgbClr val="FFFFFF">
+                    <a:alpha val="40000"/>
+                  </a:srgbClr>
+                </a:solidFill>
+                <a:latin typeface="Arial" pitchFamily="34" charset="0"/>
+                <a:ea typeface="Arial" pitchFamily="34" charset="-122"/>
+                <a:cs typeface="Arial" pitchFamily="34" charset="-120"/>
               </a:rPr>
               <a:t>mrzocchi.com</a:t>
             </a:r>
-            <a:endParaRPr lang="en-US" sz="1100" dirty="0"/>
+            <a:endParaRPr lang="en-US" sz="1000" dirty="0"/>
           </a:p>
         </p:txBody>
       </p:sp>
@@ -1678,47 +1635,7 @@
         <p:spPr>
           <a:xfrm>
             <a:off x="0" y="0"/>
-            <a:ext cx="9144000" cy="822960"/>
-          </a:xfrm>
-          <a:prstGeom prst="rect">
-            <a:avLst/>
-          </a:prstGeom>
-          <a:solidFill>
-            <a:srgbClr val="FFFFFF"/>
-          </a:solidFill>
-          <a:ln/>
-        </p:spPr>
-      </p:sp>
-      <p:sp>
-        <p:nvSpPr>
-          <p:cNvPr id="3" name="Shape 1"/>
-          <p:cNvSpPr/>
-          <p:nvPr/>
-        </p:nvSpPr>
-        <p:spPr>
-          <a:xfrm>
-            <a:off x="0" y="804672"/>
-            <a:ext cx="9144000" cy="27432"/>
-          </a:xfrm>
-          <a:prstGeom prst="rect">
-            <a:avLst/>
-          </a:prstGeom>
-          <a:solidFill>
-            <a:srgbClr val="E5E2DC"/>
-          </a:solidFill>
-          <a:ln/>
-        </p:spPr>
-      </p:sp>
-      <p:sp>
-        <p:nvSpPr>
-          <p:cNvPr id="4" name="Shape 2"/>
-          <p:cNvSpPr/>
-          <p:nvPr/>
-        </p:nvSpPr>
-        <p:spPr>
-          <a:xfrm>
-            <a:off x="548640" y="201168"/>
-            <a:ext cx="54864" cy="420624"/>
+            <a:ext cx="73152" cy="5148072"/>
           </a:xfrm>
           <a:prstGeom prst="rect">
             <a:avLst/>
@@ -1731,14 +1648,14 @@
       </p:sp>
       <p:sp>
         <p:nvSpPr>
-          <p:cNvPr id="5" name="Text 3"/>
-          <p:cNvSpPr/>
-          <p:nvPr/>
-        </p:nvSpPr>
-        <p:spPr>
-          <a:xfrm>
-            <a:off x="777240" y="137160"/>
-            <a:ext cx="7772400" cy="548640"/>
+          <p:cNvPr id="3" name="Text 1"/>
+          <p:cNvSpPr/>
+          <p:nvPr/>
+        </p:nvSpPr>
+        <p:spPr>
+          <a:xfrm>
+            <a:off x="548640" y="274320"/>
+            <a:ext cx="9144000" cy="640080"/>
           </a:xfrm>
           <a:prstGeom prst="rect">
             <a:avLst/>
@@ -1747,14 +1664,14 @@
           <a:ln/>
         </p:spPr>
         <p:txBody>
-          <a:bodyPr wrap="square" lIns="0" tIns="0" rIns="0" bIns="0" rtlCol="0" anchor="ctr"/>
+          <a:bodyPr wrap="square" rtlCol="0" anchor="ctr"/>
           <a:lstStyle/>
           <a:p>
             <a:pPr indent="0" marL="0">
               <a:buNone/>
             </a:pPr>
             <a:r>
-              <a:rPr lang="en-US" sz="2000" b="1" dirty="0">
+              <a:rPr lang="en-US" sz="2400" b="1" dirty="0">
                 <a:solidFill>
                   <a:srgbClr val="1B2A4A"/>
                 </a:solidFill>
@@ -1762,49 +1679,22 @@
                 <a:ea typeface="Georgia" pitchFamily="34" charset="-122"/>
                 <a:cs typeface="Georgia" pitchFamily="34" charset="-120"/>
               </a:rPr>
-              <a:t>Key Vocabulary</a:t>
-            </a:r>
-            <a:endParaRPr lang="en-US" sz="2000" dirty="0"/>
-          </a:p>
-        </p:txBody>
-      </p:sp>
-      <p:sp>
-        <p:nvSpPr>
-          <p:cNvPr id="6" name="Shape 4"/>
-          <p:cNvSpPr/>
-          <p:nvPr/>
-        </p:nvSpPr>
-        <p:spPr>
-          <a:xfrm>
-            <a:off x="731520" y="1051560"/>
-            <a:ext cx="3657600" cy="658368"/>
-          </a:xfrm>
-          <a:prstGeom prst="rect">
-            <a:avLst/>
-          </a:prstGeom>
-          <a:solidFill>
-            <a:srgbClr val="FFFFFF"/>
-          </a:solidFill>
-          <a:ln/>
-          <a:effectLst>
-            <a:outerShdw sx="100000" sy="100000" kx="0" ky="0" algn="bl" rotWithShape="0" blurRad="50800" dist="25400" dir="8100000">
-              <a:srgbClr val="000000">
-                <a:alpha val="10000"/>
-              </a:srgbClr>
-            </a:outerShdw>
-          </a:effectLst>
-        </p:spPr>
-      </p:sp>
-      <p:sp>
-        <p:nvSpPr>
-          <p:cNvPr id="7" name="Shape 5"/>
-          <p:cNvSpPr/>
-          <p:nvPr/>
-        </p:nvSpPr>
-        <p:spPr>
-          <a:xfrm>
-            <a:off x="731520" y="1051560"/>
-            <a:ext cx="54864" cy="658368"/>
+              <a:t>Same Denominator — Easy!</a:t>
+            </a:r>
+            <a:endParaRPr lang="en-US" sz="2400" dirty="0"/>
+          </a:p>
+        </p:txBody>
+      </p:sp>
+      <p:sp>
+        <p:nvSpPr>
+          <p:cNvPr id="4" name="Shape 2"/>
+          <p:cNvSpPr/>
+          <p:nvPr/>
+        </p:nvSpPr>
+        <p:spPr>
+          <a:xfrm>
+            <a:off x="548640" y="960120"/>
+            <a:ext cx="2286000" cy="36576"/>
           </a:xfrm>
           <a:prstGeom prst="rect">
             <a:avLst/>
@@ -1817,14 +1707,14 @@
       </p:sp>
       <p:sp>
         <p:nvSpPr>
-          <p:cNvPr id="8" name="Text 6"/>
-          <p:cNvSpPr/>
-          <p:nvPr/>
-        </p:nvSpPr>
-        <p:spPr>
-          <a:xfrm>
-            <a:off x="914400" y="1051560"/>
-            <a:ext cx="1463040" cy="658368"/>
+          <p:cNvPr id="5" name="Text 3"/>
+          <p:cNvSpPr/>
+          <p:nvPr/>
+        </p:nvSpPr>
+        <p:spPr>
+          <a:xfrm>
+            <a:off x="548640" y="1188720"/>
+            <a:ext cx="10058400" cy="3474720"/>
           </a:xfrm>
           <a:prstGeom prst="rect">
             <a:avLst/>
@@ -1833,438 +1723,95 @@
           <a:ln/>
         </p:spPr>
         <p:txBody>
-          <a:bodyPr wrap="square" lIns="0" tIns="0" rIns="0" bIns="0" rtlCol="0" anchor="ctr"/>
-          <a:lstStyle/>
-          <a:p>
-            <a:pPr indent="0" marL="0">
-              <a:buNone/>
-            </a:pPr>
-            <a:r>
-              <a:rPr lang="en-US" sz="1300" b="1" dirty="0">
-                <a:solidFill>
-                  <a:srgbClr val="1B2A4A"/>
-                </a:solidFill>
-                <a:latin typeface="Georgia" pitchFamily="34" charset="0"/>
-                <a:ea typeface="Georgia" pitchFamily="34" charset="-122"/>
-                <a:cs typeface="Georgia" pitchFamily="34" charset="-120"/>
-              </a:rPr>
-              <a:t>Common denom.</a:t>
-            </a:r>
-            <a:endParaRPr lang="en-US" sz="1300" dirty="0"/>
-          </a:p>
-        </p:txBody>
-      </p:sp>
-      <p:sp>
-        <p:nvSpPr>
-          <p:cNvPr id="9" name="Text 7"/>
-          <p:cNvSpPr/>
-          <p:nvPr/>
-        </p:nvSpPr>
-        <p:spPr>
-          <a:xfrm>
-            <a:off x="2377440" y="1051560"/>
-            <a:ext cx="1920240" cy="658368"/>
-          </a:xfrm>
-          <a:prstGeom prst="rect">
-            <a:avLst/>
-          </a:prstGeom>
-          <a:noFill/>
-          <a:ln/>
-        </p:spPr>
-        <p:txBody>
-          <a:bodyPr wrap="square" lIns="0" tIns="0" rIns="0" bIns="0" rtlCol="0" anchor="ctr"/>
-          <a:lstStyle/>
-          <a:p>
-            <a:pPr indent="0" marL="0">
-              <a:buNone/>
-            </a:pPr>
-            <a:r>
-              <a:rPr lang="en-US" sz="1100" dirty="0">
-                <a:solidFill>
-                  <a:srgbClr val="6B6660"/>
-                </a:solidFill>
-                <a:latin typeface="Calibri" pitchFamily="34" charset="0"/>
-                <a:ea typeface="Calibri" pitchFamily="34" charset="-122"/>
-                <a:cs typeface="Calibri" pitchFamily="34" charset="-120"/>
-              </a:rPr>
-              <a:t>Same denominator on both fractions</a:t>
-            </a:r>
-            <a:endParaRPr lang="en-US" sz="1100" dirty="0"/>
-          </a:p>
-        </p:txBody>
-      </p:sp>
-      <p:sp>
-        <p:nvSpPr>
-          <p:cNvPr id="10" name="Shape 8"/>
-          <p:cNvSpPr/>
-          <p:nvPr/>
-        </p:nvSpPr>
-        <p:spPr>
-          <a:xfrm>
-            <a:off x="4754880" y="1051560"/>
-            <a:ext cx="3657600" cy="658368"/>
-          </a:xfrm>
-          <a:prstGeom prst="rect">
-            <a:avLst/>
-          </a:prstGeom>
-          <a:solidFill>
-            <a:srgbClr val="FFFFFF"/>
-          </a:solidFill>
-          <a:ln/>
-          <a:effectLst>
-            <a:outerShdw sx="100000" sy="100000" kx="0" ky="0" algn="bl" rotWithShape="0" blurRad="50800" dist="25400" dir="8100000">
-              <a:srgbClr val="000000">
-                <a:alpha val="10000"/>
-              </a:srgbClr>
-            </a:outerShdw>
-          </a:effectLst>
-        </p:spPr>
-      </p:sp>
-      <p:sp>
-        <p:nvSpPr>
-          <p:cNvPr id="11" name="Shape 9"/>
-          <p:cNvSpPr/>
-          <p:nvPr/>
-        </p:nvSpPr>
-        <p:spPr>
-          <a:xfrm>
-            <a:off x="4754880" y="1051560"/>
-            <a:ext cx="54864" cy="658368"/>
-          </a:xfrm>
-          <a:prstGeom prst="rect">
-            <a:avLst/>
-          </a:prstGeom>
-          <a:solidFill>
-            <a:srgbClr val="2A9D8F"/>
-          </a:solidFill>
-          <a:ln/>
-        </p:spPr>
-      </p:sp>
-      <p:sp>
-        <p:nvSpPr>
-          <p:cNvPr id="12" name="Text 10"/>
-          <p:cNvSpPr/>
-          <p:nvPr/>
-        </p:nvSpPr>
-        <p:spPr>
-          <a:xfrm>
-            <a:off x="4937760" y="1051560"/>
-            <a:ext cx="1463040" cy="658368"/>
-          </a:xfrm>
-          <a:prstGeom prst="rect">
-            <a:avLst/>
-          </a:prstGeom>
-          <a:noFill/>
-          <a:ln/>
-        </p:spPr>
-        <p:txBody>
-          <a:bodyPr wrap="square" lIns="0" tIns="0" rIns="0" bIns="0" rtlCol="0" anchor="ctr"/>
-          <a:lstStyle/>
-          <a:p>
-            <a:pPr indent="0" marL="0">
-              <a:buNone/>
-            </a:pPr>
-            <a:r>
-              <a:rPr lang="en-US" sz="1300" b="1" dirty="0">
-                <a:solidFill>
-                  <a:srgbClr val="1B2A4A"/>
-                </a:solidFill>
-                <a:latin typeface="Georgia" pitchFamily="34" charset="0"/>
-                <a:ea typeface="Georgia" pitchFamily="34" charset="-122"/>
-                <a:cs typeface="Georgia" pitchFamily="34" charset="-120"/>
-              </a:rPr>
-              <a:t>LCM</a:t>
-            </a:r>
-            <a:endParaRPr lang="en-US" sz="1300" dirty="0"/>
-          </a:p>
-        </p:txBody>
-      </p:sp>
-      <p:sp>
-        <p:nvSpPr>
-          <p:cNvPr id="13" name="Text 11"/>
-          <p:cNvSpPr/>
-          <p:nvPr/>
-        </p:nvSpPr>
-        <p:spPr>
-          <a:xfrm>
-            <a:off x="6400800" y="1051560"/>
-            <a:ext cx="1920240" cy="658368"/>
-          </a:xfrm>
-          <a:prstGeom prst="rect">
-            <a:avLst/>
-          </a:prstGeom>
-          <a:noFill/>
-          <a:ln/>
-        </p:spPr>
-        <p:txBody>
-          <a:bodyPr wrap="square" lIns="0" tIns="0" rIns="0" bIns="0" rtlCol="0" anchor="ctr"/>
-          <a:lstStyle/>
-          <a:p>
-            <a:pPr indent="0" marL="0">
-              <a:buNone/>
-            </a:pPr>
-            <a:r>
-              <a:rPr lang="en-US" sz="1100" dirty="0">
-                <a:solidFill>
-                  <a:srgbClr val="6B6660"/>
-                </a:solidFill>
-                <a:latin typeface="Calibri" pitchFamily="34" charset="0"/>
-                <a:ea typeface="Calibri" pitchFamily="34" charset="-122"/>
-                <a:cs typeface="Calibri" pitchFamily="34" charset="-120"/>
-              </a:rPr>
-              <a:t>Lowest Common Multiple — best choice for common denominator</a:t>
-            </a:r>
-            <a:endParaRPr lang="en-US" sz="1100" dirty="0"/>
-          </a:p>
-        </p:txBody>
-      </p:sp>
-      <p:sp>
-        <p:nvSpPr>
-          <p:cNvPr id="14" name="Shape 12"/>
-          <p:cNvSpPr/>
-          <p:nvPr/>
-        </p:nvSpPr>
-        <p:spPr>
-          <a:xfrm>
-            <a:off x="731520" y="1819656"/>
-            <a:ext cx="3657600" cy="658368"/>
-          </a:xfrm>
-          <a:prstGeom prst="rect">
-            <a:avLst/>
-          </a:prstGeom>
-          <a:solidFill>
-            <a:srgbClr val="FFFFFF"/>
-          </a:solidFill>
-          <a:ln/>
-          <a:effectLst>
-            <a:outerShdw sx="100000" sy="100000" kx="0" ky="0" algn="bl" rotWithShape="0" blurRad="50800" dist="25400" dir="8100000">
-              <a:srgbClr val="000000">
-                <a:alpha val="10000"/>
-              </a:srgbClr>
-            </a:outerShdw>
-          </a:effectLst>
-        </p:spPr>
-      </p:sp>
-      <p:sp>
-        <p:nvSpPr>
-          <p:cNvPr id="15" name="Shape 13"/>
-          <p:cNvSpPr/>
-          <p:nvPr/>
-        </p:nvSpPr>
-        <p:spPr>
-          <a:xfrm>
-            <a:off x="731520" y="1819656"/>
-            <a:ext cx="54864" cy="658368"/>
-          </a:xfrm>
-          <a:prstGeom prst="rect">
-            <a:avLst/>
-          </a:prstGeom>
-          <a:solidFill>
-            <a:srgbClr val="2A9D8F"/>
-          </a:solidFill>
-          <a:ln/>
-        </p:spPr>
-      </p:sp>
-      <p:sp>
-        <p:nvSpPr>
-          <p:cNvPr id="16" name="Text 14"/>
-          <p:cNvSpPr/>
-          <p:nvPr/>
-        </p:nvSpPr>
-        <p:spPr>
-          <a:xfrm>
-            <a:off x="914400" y="1819656"/>
-            <a:ext cx="1463040" cy="658368"/>
-          </a:xfrm>
-          <a:prstGeom prst="rect">
-            <a:avLst/>
-          </a:prstGeom>
-          <a:noFill/>
-          <a:ln/>
-        </p:spPr>
-        <p:txBody>
-          <a:bodyPr wrap="square" lIns="0" tIns="0" rIns="0" bIns="0" rtlCol="0" anchor="ctr"/>
-          <a:lstStyle/>
-          <a:p>
-            <a:pPr indent="0" marL="0">
-              <a:buNone/>
-            </a:pPr>
-            <a:r>
-              <a:rPr lang="en-US" sz="1300" b="1" dirty="0">
-                <a:solidFill>
-                  <a:srgbClr val="1B2A4A"/>
-                </a:solidFill>
-                <a:latin typeface="Georgia" pitchFamily="34" charset="0"/>
-                <a:ea typeface="Georgia" pitchFamily="34" charset="-122"/>
-                <a:cs typeface="Georgia" pitchFamily="34" charset="-120"/>
-              </a:rPr>
-              <a:t>Convert</a:t>
-            </a:r>
-            <a:endParaRPr lang="en-US" sz="1300" dirty="0"/>
-          </a:p>
-        </p:txBody>
-      </p:sp>
-      <p:sp>
-        <p:nvSpPr>
-          <p:cNvPr id="17" name="Text 15"/>
-          <p:cNvSpPr/>
-          <p:nvPr/>
-        </p:nvSpPr>
-        <p:spPr>
-          <a:xfrm>
-            <a:off x="2377440" y="1819656"/>
-            <a:ext cx="1920240" cy="658368"/>
-          </a:xfrm>
-          <a:prstGeom prst="rect">
-            <a:avLst/>
-          </a:prstGeom>
-          <a:noFill/>
-          <a:ln/>
-        </p:spPr>
-        <p:txBody>
-          <a:bodyPr wrap="square" lIns="0" tIns="0" rIns="0" bIns="0" rtlCol="0" anchor="ctr"/>
-          <a:lstStyle/>
-          <a:p>
-            <a:pPr indent="0" marL="0">
-              <a:buNone/>
-            </a:pPr>
-            <a:r>
-              <a:rPr lang="en-US" sz="1100" dirty="0">
-                <a:solidFill>
-                  <a:srgbClr val="6B6660"/>
-                </a:solidFill>
-                <a:latin typeface="Calibri" pitchFamily="34" charset="0"/>
-                <a:ea typeface="Calibri" pitchFamily="34" charset="-122"/>
-                <a:cs typeface="Calibri" pitchFamily="34" charset="-120"/>
-              </a:rPr>
-              <a:t>Change to an equivalent fraction</a:t>
-            </a:r>
-            <a:endParaRPr lang="en-US" sz="1100" dirty="0"/>
-          </a:p>
-        </p:txBody>
-      </p:sp>
-      <p:sp>
-        <p:nvSpPr>
-          <p:cNvPr id="18" name="Shape 16"/>
-          <p:cNvSpPr/>
-          <p:nvPr/>
-        </p:nvSpPr>
-        <p:spPr>
-          <a:xfrm>
-            <a:off x="4754880" y="1819656"/>
-            <a:ext cx="3657600" cy="658368"/>
-          </a:xfrm>
-          <a:prstGeom prst="rect">
-            <a:avLst/>
-          </a:prstGeom>
-          <a:solidFill>
-            <a:srgbClr val="FFFFFF"/>
-          </a:solidFill>
-          <a:ln/>
-          <a:effectLst>
-            <a:outerShdw sx="100000" sy="100000" kx="0" ky="0" algn="bl" rotWithShape="0" blurRad="50800" dist="25400" dir="8100000">
-              <a:srgbClr val="000000">
-                <a:alpha val="10000"/>
-              </a:srgbClr>
-            </a:outerShdw>
-          </a:effectLst>
-        </p:spPr>
-      </p:sp>
-      <p:sp>
-        <p:nvSpPr>
-          <p:cNvPr id="19" name="Shape 17"/>
-          <p:cNvSpPr/>
-          <p:nvPr/>
-        </p:nvSpPr>
-        <p:spPr>
-          <a:xfrm>
-            <a:off x="4754880" y="1819656"/>
-            <a:ext cx="54864" cy="658368"/>
-          </a:xfrm>
-          <a:prstGeom prst="rect">
-            <a:avLst/>
-          </a:prstGeom>
-          <a:solidFill>
-            <a:srgbClr val="2A9D8F"/>
-          </a:solidFill>
-          <a:ln/>
-        </p:spPr>
-      </p:sp>
-      <p:sp>
-        <p:nvSpPr>
-          <p:cNvPr id="20" name="Text 18"/>
-          <p:cNvSpPr/>
-          <p:nvPr/>
-        </p:nvSpPr>
-        <p:spPr>
-          <a:xfrm>
-            <a:off x="4937760" y="1819656"/>
-            <a:ext cx="1463040" cy="658368"/>
-          </a:xfrm>
-          <a:prstGeom prst="rect">
-            <a:avLst/>
-          </a:prstGeom>
-          <a:noFill/>
-          <a:ln/>
-        </p:spPr>
-        <p:txBody>
-          <a:bodyPr wrap="square" lIns="0" tIns="0" rIns="0" bIns="0" rtlCol="0" anchor="ctr"/>
-          <a:lstStyle/>
-          <a:p>
-            <a:pPr indent="0" marL="0">
-              <a:buNone/>
-            </a:pPr>
-            <a:r>
-              <a:rPr lang="en-US" sz="1300" b="1" dirty="0">
-                <a:solidFill>
-                  <a:srgbClr val="1B2A4A"/>
-                </a:solidFill>
-                <a:latin typeface="Georgia" pitchFamily="34" charset="0"/>
-                <a:ea typeface="Georgia" pitchFamily="34" charset="-122"/>
-                <a:cs typeface="Georgia" pitchFamily="34" charset="-120"/>
-              </a:rPr>
-              <a:t>Simplify</a:t>
-            </a:r>
-            <a:endParaRPr lang="en-US" sz="1300" dirty="0"/>
-          </a:p>
-        </p:txBody>
-      </p:sp>
-      <p:sp>
-        <p:nvSpPr>
-          <p:cNvPr id="21" name="Text 19"/>
-          <p:cNvSpPr/>
-          <p:nvPr/>
-        </p:nvSpPr>
-        <p:spPr>
-          <a:xfrm>
-            <a:off x="6400800" y="1819656"/>
-            <a:ext cx="1920240" cy="658368"/>
-          </a:xfrm>
-          <a:prstGeom prst="rect">
-            <a:avLst/>
-          </a:prstGeom>
-          <a:noFill/>
-          <a:ln/>
-        </p:spPr>
-        <p:txBody>
-          <a:bodyPr wrap="square" lIns="0" tIns="0" rIns="0" bIns="0" rtlCol="0" anchor="ctr"/>
-          <a:lstStyle/>
-          <a:p>
-            <a:pPr indent="0" marL="0">
-              <a:buNone/>
-            </a:pPr>
-            <a:r>
-              <a:rPr lang="en-US" sz="1100" dirty="0">
-                <a:solidFill>
-                  <a:srgbClr val="6B6660"/>
-                </a:solidFill>
-                <a:latin typeface="Calibri" pitchFamily="34" charset="0"/>
-                <a:ea typeface="Calibri" pitchFamily="34" charset="-122"/>
-                <a:cs typeface="Calibri" pitchFamily="34" charset="-120"/>
-              </a:rPr>
-              <a:t>Reduce the answer to lowest terms</a:t>
-            </a:r>
-            <a:endParaRPr lang="en-US" sz="1100" dirty="0"/>
+          <a:bodyPr wrap="square" rtlCol="0" anchor="t"/>
+          <a:lstStyle/>
+          <a:p>
+            <a:pPr>
+              <a:lnSpc>
+                <a:spcPct val="150000"/>
+              </a:lnSpc>
+              <a:spcAft>
+                <a:spcPts val="600"/>
+              </a:spcAft>
+            </a:pPr>
+            <a:r>
+              <a:rPr lang="en-US" sz="1500" dirty="0">
+                <a:solidFill>
+                  <a:srgbClr val="3D3A36"/>
+                </a:solidFill>
+                <a:latin typeface="Arial" pitchFamily="34" charset="0"/>
+                <a:ea typeface="Arial" pitchFamily="34" charset="-122"/>
+                <a:cs typeface="Arial" pitchFamily="34" charset="-120"/>
+              </a:rPr>
+              <a:t>Same denominator: just add/subtract the numerators.</a:t>
+            </a:r>
+            <a:endParaRPr lang="en-US" sz="1500" dirty="0"/>
+          </a:p>
+          <a:p>
+            <a:pPr>
+              <a:lnSpc>
+                <a:spcPct val="150000"/>
+              </a:lnSpc>
+              <a:spcAft>
+                <a:spcPts val="600"/>
+              </a:spcAft>
+            </a:pPr>
+            <a:r>
+              <a:rPr lang="en-US" sz="1500" dirty="0">
+                <a:solidFill>
+                  <a:srgbClr val="3D3A36"/>
+                </a:solidFill>
+                <a:latin typeface="Arial" pitchFamily="34" charset="0"/>
+                <a:ea typeface="Arial" pitchFamily="34" charset="-122"/>
+                <a:cs typeface="Arial" pitchFamily="34" charset="-120"/>
+              </a:rPr>
+              <a:t>²⁄₇ + ³⁄₇ = ⁵⁄₇. ⁵⁄₈ − ²⁄₈ = ³⁄₈.</a:t>
+            </a:r>
+            <a:endParaRPr lang="en-US" sz="1500" dirty="0"/>
+          </a:p>
+          <a:p>
+            <a:pPr>
+              <a:lnSpc>
+                <a:spcPct val="150000"/>
+              </a:lnSpc>
+              <a:spcAft>
+                <a:spcPts val="600"/>
+              </a:spcAft>
+            </a:pPr>
+            <a:r>
+              <a:rPr lang="en-US" sz="1500" dirty="0">
+                <a:solidFill>
+                  <a:srgbClr val="3D3A36"/>
+                </a:solidFill>
+                <a:latin typeface="Arial" pitchFamily="34" charset="0"/>
+                <a:ea typeface="Arial" pitchFamily="34" charset="-122"/>
+                <a:cs typeface="Arial" pitchFamily="34" charset="-120"/>
+              </a:rPr>
+              <a:t>The denominator STAYS THE SAME.</a:t>
+            </a:r>
+            <a:endParaRPr lang="en-US" sz="1500" dirty="0"/>
+          </a:p>
+          <a:p>
+            <a:pPr>
+              <a:lnSpc>
+                <a:spcPct val="150000"/>
+              </a:lnSpc>
+              <a:spcAft>
+                <a:spcPts val="600"/>
+              </a:spcAft>
+            </a:pPr>
+            <a:r>
+              <a:rPr lang="en-US" sz="1500" dirty="0">
+                <a:solidFill>
+                  <a:srgbClr val="3D3A36"/>
+                </a:solidFill>
+                <a:latin typeface="Arial" pitchFamily="34" charset="0"/>
+                <a:ea typeface="Arial" pitchFamily="34" charset="-122"/>
+                <a:cs typeface="Arial" pitchFamily="34" charset="-120"/>
+              </a:rPr>
+              <a:t>Remember to simplify if possible: ²⁄₆ + ²⁄₆ = ⁴⁄₆ = ²⁄₃.</a:t>
+            </a:r>
+            <a:endParaRPr lang="en-US" sz="1500" dirty="0"/>
           </a:p>
         </p:txBody>
       </p:sp>
@@ -2309,47 +1856,7 @@
         <p:spPr>
           <a:xfrm>
             <a:off x="0" y="0"/>
-            <a:ext cx="9144000" cy="822960"/>
-          </a:xfrm>
-          <a:prstGeom prst="rect">
-            <a:avLst/>
-          </a:prstGeom>
-          <a:solidFill>
-            <a:srgbClr val="FFFFFF"/>
-          </a:solidFill>
-          <a:ln/>
-        </p:spPr>
-      </p:sp>
-      <p:sp>
-        <p:nvSpPr>
-          <p:cNvPr id="3" name="Shape 1"/>
-          <p:cNvSpPr/>
-          <p:nvPr/>
-        </p:nvSpPr>
-        <p:spPr>
-          <a:xfrm>
-            <a:off x="0" y="804672"/>
-            <a:ext cx="9144000" cy="27432"/>
-          </a:xfrm>
-          <a:prstGeom prst="rect">
-            <a:avLst/>
-          </a:prstGeom>
-          <a:solidFill>
-            <a:srgbClr val="E5E2DC"/>
-          </a:solidFill>
-          <a:ln/>
-        </p:spPr>
-      </p:sp>
-      <p:sp>
-        <p:nvSpPr>
-          <p:cNvPr id="4" name="Shape 2"/>
-          <p:cNvSpPr/>
-          <p:nvPr/>
-        </p:nvSpPr>
-        <p:spPr>
-          <a:xfrm>
-            <a:off x="548640" y="201168"/>
-            <a:ext cx="54864" cy="420624"/>
+            <a:ext cx="73152" cy="5148072"/>
           </a:xfrm>
           <a:prstGeom prst="rect">
             <a:avLst/>
@@ -2362,14 +1869,75 @@
       </p:sp>
       <p:sp>
         <p:nvSpPr>
+          <p:cNvPr id="3" name="Shape 1"/>
+          <p:cNvSpPr/>
+          <p:nvPr/>
+        </p:nvSpPr>
+        <p:spPr>
+          <a:xfrm>
+            <a:off x="548640" y="274320"/>
+            <a:ext cx="2011680" cy="320040"/>
+          </a:xfrm>
+          <a:prstGeom prst="roundRect">
+            <a:avLst>
+              <a:gd name="adj" fmla="val 17143"/>
+            </a:avLst>
+          </a:prstGeom>
+          <a:solidFill>
+            <a:srgbClr val="2A9D8F"/>
+          </a:solidFill>
+          <a:ln/>
+        </p:spPr>
+      </p:sp>
+      <p:sp>
+        <p:nvSpPr>
+          <p:cNvPr id="4" name="Text 2"/>
+          <p:cNvSpPr/>
+          <p:nvPr/>
+        </p:nvSpPr>
+        <p:spPr>
+          <a:xfrm>
+            <a:off x="548640" y="274320"/>
+            <a:ext cx="2011680" cy="320040"/>
+          </a:xfrm>
+          <a:prstGeom prst="rect">
+            <a:avLst/>
+          </a:prstGeom>
+          <a:noFill/>
+          <a:ln/>
+        </p:spPr>
+        <p:txBody>
+          <a:bodyPr wrap="square" rtlCol="0" anchor="ctr"/>
+          <a:lstStyle/>
+          <a:p>
+            <a:pPr algn="ctr" indent="0" marL="0">
+              <a:buNone/>
+            </a:pPr>
+            <a:r>
+              <a:rPr lang="en-US" sz="1000" b="1" dirty="0">
+                <a:solidFill>
+                  <a:srgbClr val="FFFFFF"/>
+                </a:solidFill>
+                <a:latin typeface="Arial" pitchFamily="34" charset="0"/>
+                <a:ea typeface="Arial" pitchFamily="34" charset="-122"/>
+                <a:cs typeface="Arial" pitchFamily="34" charset="-120"/>
+              </a:rPr>
+              <a:t>WORKED EXAMPLE</a:t>
+            </a:r>
+            <a:endParaRPr lang="en-US" sz="1000" dirty="0"/>
+          </a:p>
+        </p:txBody>
+      </p:sp>
+      <p:sp>
+        <p:nvSpPr>
           <p:cNvPr id="5" name="Text 3"/>
           <p:cNvSpPr/>
           <p:nvPr/>
         </p:nvSpPr>
         <p:spPr>
           <a:xfrm>
-            <a:off x="777240" y="137160"/>
-            <a:ext cx="7772400" cy="548640"/>
+            <a:off x="2743200" y="274320"/>
+            <a:ext cx="7315200" cy="457200"/>
           </a:xfrm>
           <a:prstGeom prst="rect">
             <a:avLst/>
@@ -2378,7 +1946,7 @@
           <a:ln/>
         </p:spPr>
         <p:txBody>
-          <a:bodyPr wrap="square" lIns="0" tIns="0" rIns="0" bIns="0" rtlCol="0" anchor="ctr"/>
+          <a:bodyPr wrap="square" rtlCol="0" anchor="ctr"/>
           <a:lstStyle/>
           <a:p>
             <a:pPr indent="0" marL="0">
@@ -2393,7 +1961,7 @@
                 <a:ea typeface="Georgia" pitchFamily="34" charset="-122"/>
                 <a:cs typeface="Georgia" pitchFamily="34" charset="-120"/>
               </a:rPr>
-              <a:t>Three Steps to Add/Subtract Fractions</a:t>
+              <a:t>Different Denominators: ¹⁄₃ + ¹⁄₄</a:t>
             </a:r>
             <a:endParaRPr lang="en-US" sz="2000" dirty="0"/>
           </a:p>
@@ -2407,37 +1975,402 @@
         </p:nvSpPr>
         <p:spPr>
           <a:xfrm>
-            <a:off x="640080" y="1051560"/>
-            <a:ext cx="2468880" cy="3657600"/>
-          </a:xfrm>
-          <a:prstGeom prst="rect">
+            <a:off x="548640" y="1051560"/>
+            <a:ext cx="365760" cy="365760"/>
+          </a:xfrm>
+          <a:prstGeom prst="ellipse">
             <a:avLst/>
           </a:prstGeom>
           <a:solidFill>
-            <a:srgbClr val="FFFFFF"/>
+            <a:srgbClr val="111D35"/>
           </a:solidFill>
           <a:ln/>
-          <a:effectLst>
-            <a:outerShdw sx="100000" sy="100000" kx="0" ky="0" algn="bl" rotWithShape="0" blurRad="50800" dist="25400" dir="8100000">
-              <a:srgbClr val="000000">
-                <a:alpha val="10000"/>
-              </a:srgbClr>
-            </a:outerShdw>
-          </a:effectLst>
-        </p:spPr>
-      </p:sp>
-      <p:sp>
-        <p:nvSpPr>
-          <p:cNvPr id="7" name="Shape 5"/>
-          <p:cNvSpPr/>
-          <p:nvPr/>
-        </p:nvSpPr>
-        <p:spPr>
-          <a:xfrm>
-            <a:off x="640080" y="1051560"/>
-            <a:ext cx="2468880" cy="54864"/>
-          </a:xfrm>
-          <a:prstGeom prst="rect">
+        </p:spPr>
+      </p:sp>
+      <p:sp>
+        <p:nvSpPr>
+          <p:cNvPr id="7" name="Text 5"/>
+          <p:cNvSpPr/>
+          <p:nvPr/>
+        </p:nvSpPr>
+        <p:spPr>
+          <a:xfrm>
+            <a:off x="548640" y="1051560"/>
+            <a:ext cx="365760" cy="365760"/>
+          </a:xfrm>
+          <a:prstGeom prst="rect">
+            <a:avLst/>
+          </a:prstGeom>
+          <a:noFill/>
+          <a:ln/>
+        </p:spPr>
+        <p:txBody>
+          <a:bodyPr wrap="square" rtlCol="0" anchor="ctr"/>
+          <a:lstStyle/>
+          <a:p>
+            <a:pPr algn="ctr" indent="0" marL="0">
+              <a:buNone/>
+            </a:pPr>
+            <a:r>
+              <a:rPr lang="en-US" sz="1300" b="1" dirty="0">
+                <a:solidFill>
+                  <a:srgbClr val="FFFFFF"/>
+                </a:solidFill>
+                <a:latin typeface="Arial" pitchFamily="34" charset="0"/>
+                <a:ea typeface="Arial" pitchFamily="34" charset="-122"/>
+                <a:cs typeface="Arial" pitchFamily="34" charset="-120"/>
+              </a:rPr>
+              <a:t>1</a:t>
+            </a:r>
+            <a:endParaRPr lang="en-US" sz="1300" dirty="0"/>
+          </a:p>
+        </p:txBody>
+      </p:sp>
+      <p:sp>
+        <p:nvSpPr>
+          <p:cNvPr id="8" name="Text 6"/>
+          <p:cNvSpPr/>
+          <p:nvPr/>
+        </p:nvSpPr>
+        <p:spPr>
+          <a:xfrm>
+            <a:off x="1097280" y="1005840"/>
+            <a:ext cx="9601200" cy="502920"/>
+          </a:xfrm>
+          <a:prstGeom prst="rect">
+            <a:avLst/>
+          </a:prstGeom>
+          <a:noFill/>
+          <a:ln/>
+        </p:spPr>
+        <p:txBody>
+          <a:bodyPr wrap="square" rtlCol="0" anchor="ctr"/>
+          <a:lstStyle/>
+          <a:p>
+            <a:pPr indent="0" marL="0">
+              <a:buNone/>
+            </a:pPr>
+            <a:r>
+              <a:rPr lang="en-US" sz="1500" dirty="0">
+                <a:solidFill>
+                  <a:srgbClr val="3D3A36"/>
+                </a:solidFill>
+                <a:latin typeface="Arial" pitchFamily="34" charset="0"/>
+                <a:ea typeface="Arial" pitchFamily="34" charset="-122"/>
+                <a:cs typeface="Arial" pitchFamily="34" charset="-120"/>
+              </a:rPr>
+              <a:t>Step 1: Find LCM of 3 and 4 → LCM = 12.</a:t>
+            </a:r>
+            <a:endParaRPr lang="en-US" sz="1500" dirty="0"/>
+          </a:p>
+        </p:txBody>
+      </p:sp>
+      <p:sp>
+        <p:nvSpPr>
+          <p:cNvPr id="9" name="Shape 7"/>
+          <p:cNvSpPr/>
+          <p:nvPr/>
+        </p:nvSpPr>
+        <p:spPr>
+          <a:xfrm>
+            <a:off x="548640" y="1783080"/>
+            <a:ext cx="365760" cy="365760"/>
+          </a:xfrm>
+          <a:prstGeom prst="ellipse">
+            <a:avLst/>
+          </a:prstGeom>
+          <a:solidFill>
+            <a:srgbClr val="111D35"/>
+          </a:solidFill>
+          <a:ln/>
+        </p:spPr>
+      </p:sp>
+      <p:sp>
+        <p:nvSpPr>
+          <p:cNvPr id="10" name="Text 8"/>
+          <p:cNvSpPr/>
+          <p:nvPr/>
+        </p:nvSpPr>
+        <p:spPr>
+          <a:xfrm>
+            <a:off x="548640" y="1783080"/>
+            <a:ext cx="365760" cy="365760"/>
+          </a:xfrm>
+          <a:prstGeom prst="rect">
+            <a:avLst/>
+          </a:prstGeom>
+          <a:noFill/>
+          <a:ln/>
+        </p:spPr>
+        <p:txBody>
+          <a:bodyPr wrap="square" rtlCol="0" anchor="ctr"/>
+          <a:lstStyle/>
+          <a:p>
+            <a:pPr algn="ctr" indent="0" marL="0">
+              <a:buNone/>
+            </a:pPr>
+            <a:r>
+              <a:rPr lang="en-US" sz="1300" b="1" dirty="0">
+                <a:solidFill>
+                  <a:srgbClr val="FFFFFF"/>
+                </a:solidFill>
+                <a:latin typeface="Arial" pitchFamily="34" charset="0"/>
+                <a:ea typeface="Arial" pitchFamily="34" charset="-122"/>
+                <a:cs typeface="Arial" pitchFamily="34" charset="-120"/>
+              </a:rPr>
+              <a:t>2</a:t>
+            </a:r>
+            <a:endParaRPr lang="en-US" sz="1300" dirty="0"/>
+          </a:p>
+        </p:txBody>
+      </p:sp>
+      <p:sp>
+        <p:nvSpPr>
+          <p:cNvPr id="11" name="Text 9"/>
+          <p:cNvSpPr/>
+          <p:nvPr/>
+        </p:nvSpPr>
+        <p:spPr>
+          <a:xfrm>
+            <a:off x="1097280" y="1737360"/>
+            <a:ext cx="9601200" cy="502920"/>
+          </a:xfrm>
+          <a:prstGeom prst="rect">
+            <a:avLst/>
+          </a:prstGeom>
+          <a:noFill/>
+          <a:ln/>
+        </p:spPr>
+        <p:txBody>
+          <a:bodyPr wrap="square" rtlCol="0" anchor="ctr"/>
+          <a:lstStyle/>
+          <a:p>
+            <a:pPr indent="0" marL="0">
+              <a:buNone/>
+            </a:pPr>
+            <a:r>
+              <a:rPr lang="en-US" sz="1500" dirty="0">
+                <a:solidFill>
+                  <a:srgbClr val="3D3A36"/>
+                </a:solidFill>
+                <a:latin typeface="Arial" pitchFamily="34" charset="0"/>
+                <a:ea typeface="Arial" pitchFamily="34" charset="-122"/>
+                <a:cs typeface="Arial" pitchFamily="34" charset="-120"/>
+              </a:rPr>
+              <a:t>Step 2: Convert ¹⁄₃ = ⁴⁄₁₂ (multiply by 4).</a:t>
+            </a:r>
+            <a:endParaRPr lang="en-US" sz="1500" dirty="0"/>
+          </a:p>
+        </p:txBody>
+      </p:sp>
+      <p:sp>
+        <p:nvSpPr>
+          <p:cNvPr id="12" name="Shape 10"/>
+          <p:cNvSpPr/>
+          <p:nvPr/>
+        </p:nvSpPr>
+        <p:spPr>
+          <a:xfrm>
+            <a:off x="548640" y="2514600"/>
+            <a:ext cx="365760" cy="365760"/>
+          </a:xfrm>
+          <a:prstGeom prst="ellipse">
+            <a:avLst/>
+          </a:prstGeom>
+          <a:solidFill>
+            <a:srgbClr val="111D35"/>
+          </a:solidFill>
+          <a:ln/>
+        </p:spPr>
+      </p:sp>
+      <p:sp>
+        <p:nvSpPr>
+          <p:cNvPr id="13" name="Text 11"/>
+          <p:cNvSpPr/>
+          <p:nvPr/>
+        </p:nvSpPr>
+        <p:spPr>
+          <a:xfrm>
+            <a:off x="548640" y="2514600"/>
+            <a:ext cx="365760" cy="365760"/>
+          </a:xfrm>
+          <a:prstGeom prst="rect">
+            <a:avLst/>
+          </a:prstGeom>
+          <a:noFill/>
+          <a:ln/>
+        </p:spPr>
+        <p:txBody>
+          <a:bodyPr wrap="square" rtlCol="0" anchor="ctr"/>
+          <a:lstStyle/>
+          <a:p>
+            <a:pPr algn="ctr" indent="0" marL="0">
+              <a:buNone/>
+            </a:pPr>
+            <a:r>
+              <a:rPr lang="en-US" sz="1300" b="1" dirty="0">
+                <a:solidFill>
+                  <a:srgbClr val="FFFFFF"/>
+                </a:solidFill>
+                <a:latin typeface="Arial" pitchFamily="34" charset="0"/>
+                <a:ea typeface="Arial" pitchFamily="34" charset="-122"/>
+                <a:cs typeface="Arial" pitchFamily="34" charset="-120"/>
+              </a:rPr>
+              <a:t>3</a:t>
+            </a:r>
+            <a:endParaRPr lang="en-US" sz="1300" dirty="0"/>
+          </a:p>
+        </p:txBody>
+      </p:sp>
+      <p:sp>
+        <p:nvSpPr>
+          <p:cNvPr id="14" name="Text 12"/>
+          <p:cNvSpPr/>
+          <p:nvPr/>
+        </p:nvSpPr>
+        <p:spPr>
+          <a:xfrm>
+            <a:off x="1097280" y="2468880"/>
+            <a:ext cx="9601200" cy="502920"/>
+          </a:xfrm>
+          <a:prstGeom prst="rect">
+            <a:avLst/>
+          </a:prstGeom>
+          <a:noFill/>
+          <a:ln/>
+        </p:spPr>
+        <p:txBody>
+          <a:bodyPr wrap="square" rtlCol="0" anchor="ctr"/>
+          <a:lstStyle/>
+          <a:p>
+            <a:pPr indent="0" marL="0">
+              <a:buNone/>
+            </a:pPr>
+            <a:r>
+              <a:rPr lang="en-US" sz="1500" dirty="0">
+                <a:solidFill>
+                  <a:srgbClr val="3D3A36"/>
+                </a:solidFill>
+                <a:latin typeface="Arial" pitchFamily="34" charset="0"/>
+                <a:ea typeface="Arial" pitchFamily="34" charset="-122"/>
+                <a:cs typeface="Arial" pitchFamily="34" charset="-120"/>
+              </a:rPr>
+              <a:t>Step 3: Convert ¹⁄₄ = ³⁄₁₂ (multiply by 3).</a:t>
+            </a:r>
+            <a:endParaRPr lang="en-US" sz="1500" dirty="0"/>
+          </a:p>
+        </p:txBody>
+      </p:sp>
+      <p:sp>
+        <p:nvSpPr>
+          <p:cNvPr id="15" name="Shape 13"/>
+          <p:cNvSpPr/>
+          <p:nvPr/>
+        </p:nvSpPr>
+        <p:spPr>
+          <a:xfrm>
+            <a:off x="548640" y="3246120"/>
+            <a:ext cx="365760" cy="365760"/>
+          </a:xfrm>
+          <a:prstGeom prst="ellipse">
+            <a:avLst/>
+          </a:prstGeom>
+          <a:solidFill>
+            <a:srgbClr val="111D35"/>
+          </a:solidFill>
+          <a:ln/>
+        </p:spPr>
+      </p:sp>
+      <p:sp>
+        <p:nvSpPr>
+          <p:cNvPr id="16" name="Text 14"/>
+          <p:cNvSpPr/>
+          <p:nvPr/>
+        </p:nvSpPr>
+        <p:spPr>
+          <a:xfrm>
+            <a:off x="548640" y="3246120"/>
+            <a:ext cx="365760" cy="365760"/>
+          </a:xfrm>
+          <a:prstGeom prst="rect">
+            <a:avLst/>
+          </a:prstGeom>
+          <a:noFill/>
+          <a:ln/>
+        </p:spPr>
+        <p:txBody>
+          <a:bodyPr wrap="square" rtlCol="0" anchor="ctr"/>
+          <a:lstStyle/>
+          <a:p>
+            <a:pPr algn="ctr" indent="0" marL="0">
+              <a:buNone/>
+            </a:pPr>
+            <a:r>
+              <a:rPr lang="en-US" sz="1300" b="1" dirty="0">
+                <a:solidFill>
+                  <a:srgbClr val="FFFFFF"/>
+                </a:solidFill>
+                <a:latin typeface="Arial" pitchFamily="34" charset="0"/>
+                <a:ea typeface="Arial" pitchFamily="34" charset="-122"/>
+                <a:cs typeface="Arial" pitchFamily="34" charset="-120"/>
+              </a:rPr>
+              <a:t>4</a:t>
+            </a:r>
+            <a:endParaRPr lang="en-US" sz="1300" dirty="0"/>
+          </a:p>
+        </p:txBody>
+      </p:sp>
+      <p:sp>
+        <p:nvSpPr>
+          <p:cNvPr id="17" name="Text 15"/>
+          <p:cNvSpPr/>
+          <p:nvPr/>
+        </p:nvSpPr>
+        <p:spPr>
+          <a:xfrm>
+            <a:off x="1097280" y="3200400"/>
+            <a:ext cx="9601200" cy="502920"/>
+          </a:xfrm>
+          <a:prstGeom prst="rect">
+            <a:avLst/>
+          </a:prstGeom>
+          <a:noFill/>
+          <a:ln/>
+        </p:spPr>
+        <p:txBody>
+          <a:bodyPr wrap="square" rtlCol="0" anchor="ctr"/>
+          <a:lstStyle/>
+          <a:p>
+            <a:pPr indent="0" marL="0">
+              <a:buNone/>
+            </a:pPr>
+            <a:r>
+              <a:rPr lang="en-US" sz="1500" dirty="0">
+                <a:solidFill>
+                  <a:srgbClr val="3D3A36"/>
+                </a:solidFill>
+                <a:latin typeface="Arial" pitchFamily="34" charset="0"/>
+                <a:ea typeface="Arial" pitchFamily="34" charset="-122"/>
+                <a:cs typeface="Arial" pitchFamily="34" charset="-120"/>
+              </a:rPr>
+              <a:t>Step 4: Add numerators: ⁴⁄₁₂ + ³⁄₁₂ = ⁷⁄₁₂.</a:t>
+            </a:r>
+            <a:endParaRPr lang="en-US" sz="1500" dirty="0"/>
+          </a:p>
+        </p:txBody>
+      </p:sp>
+      <p:sp>
+        <p:nvSpPr>
+          <p:cNvPr id="18" name="Shape 16"/>
+          <p:cNvSpPr/>
+          <p:nvPr/>
+        </p:nvSpPr>
+        <p:spPr>
+          <a:xfrm>
+            <a:off x="548640" y="3977640"/>
+            <a:ext cx="365760" cy="365760"/>
+          </a:xfrm>
+          <a:prstGeom prst="ellipse">
             <a:avLst/>
           </a:prstGeom>
           <a:solidFill>
@@ -2448,14 +2381,14 @@
       </p:sp>
       <p:sp>
         <p:nvSpPr>
-          <p:cNvPr id="8" name="Text 6"/>
-          <p:cNvSpPr/>
-          <p:nvPr/>
-        </p:nvSpPr>
-        <p:spPr>
-          <a:xfrm>
-            <a:off x="777240" y="1234440"/>
-            <a:ext cx="2194560" cy="457200"/>
+          <p:cNvPr id="19" name="Text 17"/>
+          <p:cNvSpPr/>
+          <p:nvPr/>
+        </p:nvSpPr>
+        <p:spPr>
+          <a:xfrm>
+            <a:off x="548640" y="3977640"/>
+            <a:ext cx="365760" cy="365760"/>
           </a:xfrm>
           <a:prstGeom prst="rect">
             <a:avLst/>
@@ -2471,30 +2404,30 @@
               <a:buNone/>
             </a:pPr>
             <a:r>
-              <a:rPr lang="en-US" sz="1400" b="1" dirty="0">
-                <a:solidFill>
-                  <a:srgbClr val="1B2A4A"/>
-                </a:solidFill>
-                <a:latin typeface="Georgia" pitchFamily="34" charset="0"/>
-                <a:ea typeface="Georgia" pitchFamily="34" charset="-122"/>
-                <a:cs typeface="Georgia" pitchFamily="34" charset="-120"/>
-              </a:rPr>
-              <a:t>Step 1: Same Denominator</a:t>
-            </a:r>
-            <a:endParaRPr lang="en-US" sz="1400" dirty="0"/>
-          </a:p>
-        </p:txBody>
-      </p:sp>
-      <p:sp>
-        <p:nvSpPr>
-          <p:cNvPr id="9" name="Text 7"/>
-          <p:cNvSpPr/>
-          <p:nvPr/>
-        </p:nvSpPr>
-        <p:spPr>
-          <a:xfrm>
-            <a:off x="777240" y="1737360"/>
-            <a:ext cx="2194560" cy="2834640"/>
+              <a:rPr lang="en-US" sz="1300" b="1" dirty="0">
+                <a:solidFill>
+                  <a:srgbClr val="FFFFFF"/>
+                </a:solidFill>
+                <a:latin typeface="Arial" pitchFamily="34" charset="0"/>
+                <a:ea typeface="Arial" pitchFamily="34" charset="-122"/>
+                <a:cs typeface="Arial" pitchFamily="34" charset="-120"/>
+              </a:rPr>
+              <a:t>5</a:t>
+            </a:r>
+            <a:endParaRPr lang="en-US" sz="1300" dirty="0"/>
+          </a:p>
+        </p:txBody>
+      </p:sp>
+      <p:sp>
+        <p:nvSpPr>
+          <p:cNvPr id="20" name="Text 18"/>
+          <p:cNvSpPr/>
+          <p:nvPr/>
+        </p:nvSpPr>
+        <p:spPr>
+          <a:xfrm>
+            <a:off x="1097280" y="3931920"/>
+            <a:ext cx="9601200" cy="502920"/>
           </a:xfrm>
           <a:prstGeom prst="rect">
             <a:avLst/>
@@ -2503,496 +2436,24 @@
           <a:ln/>
         </p:spPr>
         <p:txBody>
-          <a:bodyPr wrap="square" rtlCol="0" anchor="t"/>
-          <a:lstStyle/>
-          <a:p>
-            <a:pPr marL="342900" indent="-342900">
-              <a:spcAft>
-                <a:spcPts val="400"/>
-              </a:spcAft>
-              <a:buSzPct val="100000"/>
-              <a:buChar char="•"/>
-            </a:pPr>
-            <a:r>
-              <a:rPr lang="en-US" sz="1100" dirty="0">
-                <a:solidFill>
-                  <a:srgbClr val="6B6660"/>
-                </a:solidFill>
-                <a:latin typeface="Calibri" pitchFamily="34" charset="0"/>
-                <a:ea typeface="Calibri" pitchFamily="34" charset="-122"/>
-                <a:cs typeface="Calibri" pitchFamily="34" charset="-120"/>
-              </a:rPr>
-              <a:t>Find the LCM of both denominators</a:t>
-            </a:r>
-            <a:endParaRPr lang="en-US" sz="1100" dirty="0"/>
-          </a:p>
-          <a:p>
-            <a:pPr marL="342900" indent="-342900">
-              <a:spcAft>
-                <a:spcPts val="400"/>
-              </a:spcAft>
-              <a:buSzPct val="100000"/>
-              <a:buChar char="•"/>
-            </a:pPr>
-            <a:r>
-              <a:rPr lang="en-US" sz="1100" dirty="0">
-                <a:solidFill>
-                  <a:srgbClr val="6B6660"/>
-                </a:solidFill>
-                <a:latin typeface="Calibri" pitchFamily="34" charset="0"/>
-                <a:ea typeface="Calibri" pitchFamily="34" charset="-122"/>
-                <a:cs typeface="Calibri" pitchFamily="34" charset="-120"/>
-              </a:rPr>
-              <a:t>Convert both fractions</a:t>
-            </a:r>
-            <a:endParaRPr lang="en-US" sz="1100" dirty="0"/>
-          </a:p>
-          <a:p>
-            <a:pPr marL="342900" indent="-342900">
-              <a:spcAft>
-                <a:spcPts val="400"/>
-              </a:spcAft>
-              <a:buSzPct val="100000"/>
-              <a:buChar char="•"/>
-            </a:pPr>
-            <a:r>
-              <a:rPr lang="en-US" sz="1100" dirty="0">
-                <a:solidFill>
-                  <a:srgbClr val="6B6660"/>
-                </a:solidFill>
-                <a:latin typeface="Calibri" pitchFamily="34" charset="0"/>
-                <a:ea typeface="Calibri" pitchFamily="34" charset="-122"/>
-                <a:cs typeface="Calibri" pitchFamily="34" charset="-120"/>
-              </a:rPr>
-              <a:t>Example: ⅓ + ¼</a:t>
-            </a:r>
-            <a:endParaRPr lang="en-US" sz="1100" dirty="0"/>
-          </a:p>
-          <a:p>
-            <a:pPr marL="342900" indent="-342900">
-              <a:spcAft>
-                <a:spcPts val="400"/>
-              </a:spcAft>
-              <a:buSzPct val="100000"/>
-              <a:buChar char="•"/>
-            </a:pPr>
-            <a:r>
-              <a:rPr lang="en-US" sz="1100" dirty="0">
-                <a:solidFill>
-                  <a:srgbClr val="6B6660"/>
-                </a:solidFill>
-                <a:latin typeface="Calibri" pitchFamily="34" charset="0"/>
-                <a:ea typeface="Calibri" pitchFamily="34" charset="-122"/>
-                <a:cs typeface="Calibri" pitchFamily="34" charset="-120"/>
-              </a:rPr>
-              <a:t>LCM of 3 and 4 = 12</a:t>
-            </a:r>
-            <a:endParaRPr lang="en-US" sz="1100" dirty="0"/>
-          </a:p>
-          <a:p>
-            <a:pPr marL="342900" indent="-342900">
-              <a:spcAft>
-                <a:spcPts val="400"/>
-              </a:spcAft>
-              <a:buSzPct val="100000"/>
-              <a:buChar char="•"/>
-            </a:pPr>
-            <a:r>
-              <a:rPr lang="en-US" sz="1100" dirty="0">
-                <a:solidFill>
-                  <a:srgbClr val="6B6660"/>
-                </a:solidFill>
-                <a:latin typeface="Calibri" pitchFamily="34" charset="0"/>
-                <a:ea typeface="Calibri" pitchFamily="34" charset="-122"/>
-                <a:cs typeface="Calibri" pitchFamily="34" charset="-120"/>
-              </a:rPr>
-              <a:t>→ 4/12 + 3/12</a:t>
-            </a:r>
-            <a:endParaRPr lang="en-US" sz="1100" dirty="0"/>
-          </a:p>
-        </p:txBody>
-      </p:sp>
-      <p:sp>
-        <p:nvSpPr>
-          <p:cNvPr id="10" name="Shape 8"/>
-          <p:cNvSpPr/>
-          <p:nvPr/>
-        </p:nvSpPr>
-        <p:spPr>
-          <a:xfrm>
-            <a:off x="3246120" y="1051560"/>
-            <a:ext cx="2468880" cy="3657600"/>
-          </a:xfrm>
-          <a:prstGeom prst="rect">
-            <a:avLst/>
-          </a:prstGeom>
-          <a:solidFill>
-            <a:srgbClr val="FFFFFF"/>
-          </a:solidFill>
-          <a:ln/>
-          <a:effectLst>
-            <a:outerShdw sx="100000" sy="100000" kx="0" ky="0" algn="bl" rotWithShape="0" blurRad="50800" dist="25400" dir="8100000">
-              <a:srgbClr val="000000">
-                <a:alpha val="10000"/>
-              </a:srgbClr>
-            </a:outerShdw>
-          </a:effectLst>
-        </p:spPr>
-      </p:sp>
-      <p:sp>
-        <p:nvSpPr>
-          <p:cNvPr id="11" name="Shape 9"/>
-          <p:cNvSpPr/>
-          <p:nvPr/>
-        </p:nvSpPr>
-        <p:spPr>
-          <a:xfrm>
-            <a:off x="3246120" y="1051560"/>
-            <a:ext cx="2468880" cy="54864"/>
-          </a:xfrm>
-          <a:prstGeom prst="rect">
-            <a:avLst/>
-          </a:prstGeom>
-          <a:solidFill>
-            <a:srgbClr val="E9C46A"/>
-          </a:solidFill>
-          <a:ln/>
-        </p:spPr>
-      </p:sp>
-      <p:sp>
-        <p:nvSpPr>
-          <p:cNvPr id="12" name="Text 10"/>
-          <p:cNvSpPr/>
-          <p:nvPr/>
-        </p:nvSpPr>
-        <p:spPr>
-          <a:xfrm>
-            <a:off x="3383280" y="1234440"/>
-            <a:ext cx="2194560" cy="457200"/>
-          </a:xfrm>
-          <a:prstGeom prst="rect">
-            <a:avLst/>
-          </a:prstGeom>
-          <a:noFill/>
-          <a:ln/>
-        </p:spPr>
-        <p:txBody>
           <a:bodyPr wrap="square" rtlCol="0" anchor="ctr"/>
           <a:lstStyle/>
           <a:p>
-            <a:pPr algn="ctr" indent="0" marL="0">
+            <a:pPr indent="0" marL="0">
               <a:buNone/>
             </a:pPr>
             <a:r>
-              <a:rPr lang="en-US" sz="1400" b="1" dirty="0">
-                <a:solidFill>
-                  <a:srgbClr val="1B2A4A"/>
-                </a:solidFill>
-                <a:latin typeface="Georgia" pitchFamily="34" charset="0"/>
-                <a:ea typeface="Georgia" pitchFamily="34" charset="-122"/>
-                <a:cs typeface="Georgia" pitchFamily="34" charset="-120"/>
-              </a:rPr>
-              <a:t>Step 2: Add or Subtract</a:t>
-            </a:r>
-            <a:endParaRPr lang="en-US" sz="1400" dirty="0"/>
-          </a:p>
-        </p:txBody>
-      </p:sp>
-      <p:sp>
-        <p:nvSpPr>
-          <p:cNvPr id="13" name="Text 11"/>
-          <p:cNvSpPr/>
-          <p:nvPr/>
-        </p:nvSpPr>
-        <p:spPr>
-          <a:xfrm>
-            <a:off x="3383280" y="1737360"/>
-            <a:ext cx="2194560" cy="2834640"/>
-          </a:xfrm>
-          <a:prstGeom prst="rect">
-            <a:avLst/>
-          </a:prstGeom>
-          <a:noFill/>
-          <a:ln/>
-        </p:spPr>
-        <p:txBody>
-          <a:bodyPr wrap="square" rtlCol="0" anchor="t"/>
-          <a:lstStyle/>
-          <a:p>
-            <a:pPr marL="342900" indent="-342900">
-              <a:spcAft>
-                <a:spcPts val="400"/>
-              </a:spcAft>
-              <a:buSzPct val="100000"/>
-              <a:buChar char="•"/>
-            </a:pPr>
-            <a:r>
-              <a:rPr lang="en-US" sz="1100" dirty="0">
-                <a:solidFill>
-                  <a:srgbClr val="6B6660"/>
-                </a:solidFill>
-                <a:latin typeface="Calibri" pitchFamily="34" charset="0"/>
-                <a:ea typeface="Calibri" pitchFamily="34" charset="-122"/>
-                <a:cs typeface="Calibri" pitchFamily="34" charset="-120"/>
-              </a:rPr>
-              <a:t>Add/subtract the NUMERATORS only</a:t>
-            </a:r>
-            <a:endParaRPr lang="en-US" sz="1100" dirty="0"/>
-          </a:p>
-          <a:p>
-            <a:pPr marL="342900" indent="-342900">
-              <a:spcAft>
-                <a:spcPts val="400"/>
-              </a:spcAft>
-              <a:buSzPct val="100000"/>
-              <a:buChar char="•"/>
-            </a:pPr>
-            <a:r>
-              <a:rPr lang="en-US" sz="1100" dirty="0">
-                <a:solidFill>
-                  <a:srgbClr val="6B6660"/>
-                </a:solidFill>
-                <a:latin typeface="Calibri" pitchFamily="34" charset="0"/>
-                <a:ea typeface="Calibri" pitchFamily="34" charset="-122"/>
-                <a:cs typeface="Calibri" pitchFamily="34" charset="-120"/>
-              </a:rPr>
-              <a:t>Keep the denominator the same</a:t>
-            </a:r>
-            <a:endParaRPr lang="en-US" sz="1100" dirty="0"/>
-          </a:p>
-          <a:p>
-            <a:pPr marL="342900" indent="-342900">
-              <a:spcAft>
-                <a:spcPts val="400"/>
-              </a:spcAft>
-              <a:buSzPct val="100000"/>
-              <a:buChar char="•"/>
-            </a:pPr>
-            <a:r>
-              <a:rPr lang="en-US" sz="1100" dirty="0">
-                <a:solidFill>
-                  <a:srgbClr val="6B6660"/>
-                </a:solidFill>
-                <a:latin typeface="Calibri" pitchFamily="34" charset="0"/>
-                <a:ea typeface="Calibri" pitchFamily="34" charset="-122"/>
-                <a:cs typeface="Calibri" pitchFamily="34" charset="-120"/>
-              </a:rPr>
-              <a:t>4/12 + 3/12 = 7/12</a:t>
-            </a:r>
-            <a:endParaRPr lang="en-US" sz="1100" dirty="0"/>
-          </a:p>
-          <a:p>
-            <a:pPr marL="342900" indent="-342900">
-              <a:spcAft>
-                <a:spcPts val="400"/>
-              </a:spcAft>
-              <a:buSzPct val="100000"/>
-              <a:buChar char="•"/>
-            </a:pPr>
-            <a:r>
-              <a:rPr lang="en-US" sz="1100" dirty="0">
-                <a:solidFill>
-                  <a:srgbClr val="6B6660"/>
-                </a:solidFill>
-                <a:latin typeface="Calibri" pitchFamily="34" charset="0"/>
-                <a:ea typeface="Calibri" pitchFamily="34" charset="-122"/>
-                <a:cs typeface="Calibri" pitchFamily="34" charset="-120"/>
-              </a:rPr>
-              <a:t>Never add the denominators!</a:t>
-            </a:r>
-            <a:endParaRPr lang="en-US" sz="1100" dirty="0"/>
-          </a:p>
-        </p:txBody>
-      </p:sp>
-      <p:sp>
-        <p:nvSpPr>
-          <p:cNvPr id="14" name="Shape 12"/>
-          <p:cNvSpPr/>
-          <p:nvPr/>
-        </p:nvSpPr>
-        <p:spPr>
-          <a:xfrm>
-            <a:off x="5852160" y="1051560"/>
-            <a:ext cx="2468880" cy="3657600"/>
-          </a:xfrm>
-          <a:prstGeom prst="rect">
-            <a:avLst/>
-          </a:prstGeom>
-          <a:solidFill>
-            <a:srgbClr val="FFFFFF"/>
-          </a:solidFill>
-          <a:ln/>
-          <a:effectLst>
-            <a:outerShdw sx="100000" sy="100000" kx="0" ky="0" algn="bl" rotWithShape="0" blurRad="50800" dist="25400" dir="8100000">
-              <a:srgbClr val="000000">
-                <a:alpha val="10000"/>
-              </a:srgbClr>
-            </a:outerShdw>
-          </a:effectLst>
-        </p:spPr>
-      </p:sp>
-      <p:sp>
-        <p:nvSpPr>
-          <p:cNvPr id="15" name="Shape 13"/>
-          <p:cNvSpPr/>
-          <p:nvPr/>
-        </p:nvSpPr>
-        <p:spPr>
-          <a:xfrm>
-            <a:off x="5852160" y="1051560"/>
-            <a:ext cx="2468880" cy="54864"/>
-          </a:xfrm>
-          <a:prstGeom prst="rect">
-            <a:avLst/>
-          </a:prstGeom>
-          <a:solidFill>
-            <a:srgbClr val="9B9690"/>
-          </a:solidFill>
-          <a:ln/>
-        </p:spPr>
-      </p:sp>
-      <p:sp>
-        <p:nvSpPr>
-          <p:cNvPr id="16" name="Text 14"/>
-          <p:cNvSpPr/>
-          <p:nvPr/>
-        </p:nvSpPr>
-        <p:spPr>
-          <a:xfrm>
-            <a:off x="5989320" y="1234440"/>
-            <a:ext cx="2194560" cy="457200"/>
-          </a:xfrm>
-          <a:prstGeom prst="rect">
-            <a:avLst/>
-          </a:prstGeom>
-          <a:noFill/>
-          <a:ln/>
-        </p:spPr>
-        <p:txBody>
-          <a:bodyPr wrap="square" rtlCol="0" anchor="ctr"/>
-          <a:lstStyle/>
-          <a:p>
-            <a:pPr algn="ctr" indent="0" marL="0">
-              <a:buNone/>
-            </a:pPr>
-            <a:r>
-              <a:rPr lang="en-US" sz="1400" b="1" dirty="0">
-                <a:solidFill>
-                  <a:srgbClr val="1B2A4A"/>
-                </a:solidFill>
-                <a:latin typeface="Georgia" pitchFamily="34" charset="0"/>
-                <a:ea typeface="Georgia" pitchFamily="34" charset="-122"/>
-                <a:cs typeface="Georgia" pitchFamily="34" charset="-120"/>
-              </a:rPr>
-              <a:t>Step 3: Simplify</a:t>
-            </a:r>
-            <a:endParaRPr lang="en-US" sz="1400" dirty="0"/>
-          </a:p>
-        </p:txBody>
-      </p:sp>
-      <p:sp>
-        <p:nvSpPr>
-          <p:cNvPr id="17" name="Text 15"/>
-          <p:cNvSpPr/>
-          <p:nvPr/>
-        </p:nvSpPr>
-        <p:spPr>
-          <a:xfrm>
-            <a:off x="5989320" y="1737360"/>
-            <a:ext cx="2194560" cy="2834640"/>
-          </a:xfrm>
-          <a:prstGeom prst="rect">
-            <a:avLst/>
-          </a:prstGeom>
-          <a:noFill/>
-          <a:ln/>
-        </p:spPr>
-        <p:txBody>
-          <a:bodyPr wrap="square" rtlCol="0" anchor="t"/>
-          <a:lstStyle/>
-          <a:p>
-            <a:pPr marL="342900" indent="-342900">
-              <a:spcAft>
-                <a:spcPts val="400"/>
-              </a:spcAft>
-              <a:buSzPct val="100000"/>
-              <a:buChar char="•"/>
-            </a:pPr>
-            <a:r>
-              <a:rPr lang="en-US" sz="1100" dirty="0">
-                <a:solidFill>
-                  <a:srgbClr val="6B6660"/>
-                </a:solidFill>
-                <a:latin typeface="Calibri" pitchFamily="34" charset="0"/>
-                <a:ea typeface="Calibri" pitchFamily="34" charset="-122"/>
-                <a:cs typeface="Calibri" pitchFamily="34" charset="-120"/>
-              </a:rPr>
-              <a:t>Check if the answer can be simplified</a:t>
-            </a:r>
-            <a:endParaRPr lang="en-US" sz="1100" dirty="0"/>
-          </a:p>
-          <a:p>
-            <a:pPr marL="342900" indent="-342900">
-              <a:spcAft>
-                <a:spcPts val="400"/>
-              </a:spcAft>
-              <a:buSzPct val="100000"/>
-              <a:buChar char="•"/>
-            </a:pPr>
-            <a:r>
-              <a:rPr lang="en-US" sz="1100" dirty="0">
-                <a:solidFill>
-                  <a:srgbClr val="6B6660"/>
-                </a:solidFill>
-                <a:latin typeface="Calibri" pitchFamily="34" charset="0"/>
-                <a:ea typeface="Calibri" pitchFamily="34" charset="-122"/>
-                <a:cs typeface="Calibri" pitchFamily="34" charset="-120"/>
-              </a:rPr>
-              <a:t>Divide by common factors</a:t>
-            </a:r>
-            <a:endParaRPr lang="en-US" sz="1100" dirty="0"/>
-          </a:p>
-          <a:p>
-            <a:pPr marL="342900" indent="-342900">
-              <a:spcAft>
-                <a:spcPts val="400"/>
-              </a:spcAft>
-              <a:buSzPct val="100000"/>
-              <a:buChar char="•"/>
-            </a:pPr>
-            <a:r>
-              <a:rPr lang="en-US" sz="1100" dirty="0">
-                <a:solidFill>
-                  <a:srgbClr val="6B6660"/>
-                </a:solidFill>
-                <a:latin typeface="Calibri" pitchFamily="34" charset="0"/>
-                <a:ea typeface="Calibri" pitchFamily="34" charset="-122"/>
-                <a:cs typeface="Calibri" pitchFamily="34" charset="-120"/>
-              </a:rPr>
-              <a:t>7/12 is already in lowest terms</a:t>
-            </a:r>
-            <a:endParaRPr lang="en-US" sz="1100" dirty="0"/>
-          </a:p>
-          <a:p>
-            <a:pPr marL="342900" indent="-342900">
-              <a:spcAft>
-                <a:spcPts val="400"/>
-              </a:spcAft>
-              <a:buSzPct val="100000"/>
-              <a:buChar char="•"/>
-            </a:pPr>
-            <a:r>
-              <a:rPr lang="en-US" sz="1100" dirty="0">
-                <a:solidFill>
-                  <a:srgbClr val="6B6660"/>
-                </a:solidFill>
-                <a:latin typeface="Calibri" pitchFamily="34" charset="0"/>
-                <a:ea typeface="Calibri" pitchFamily="34" charset="-122"/>
-                <a:cs typeface="Calibri" pitchFamily="34" charset="-120"/>
-              </a:rPr>
-              <a:t>Convert improper to mixed if needed</a:t>
-            </a:r>
-            <a:endParaRPr lang="en-US" sz="1100" dirty="0"/>
+              <a:rPr lang="en-US" sz="1500" b="1" dirty="0">
+                <a:solidFill>
+                  <a:srgbClr val="2A9D8F"/>
+                </a:solidFill>
+                <a:latin typeface="Arial" pitchFamily="34" charset="0"/>
+                <a:ea typeface="Arial" pitchFamily="34" charset="-122"/>
+                <a:cs typeface="Arial" pitchFamily="34" charset="-120"/>
+              </a:rPr>
+              <a:t>Answer: ⁷⁄₁₂</a:t>
+            </a:r>
+            <a:endParaRPr lang="en-US" sz="1500" dirty="0"/>
           </a:p>
         </p:txBody>
       </p:sp>
@@ -3037,47 +2498,7 @@
         <p:spPr>
           <a:xfrm>
             <a:off x="0" y="0"/>
-            <a:ext cx="9144000" cy="822960"/>
-          </a:xfrm>
-          <a:prstGeom prst="rect">
-            <a:avLst/>
-          </a:prstGeom>
-          <a:solidFill>
-            <a:srgbClr val="FFFFFF"/>
-          </a:solidFill>
-          <a:ln/>
-        </p:spPr>
-      </p:sp>
-      <p:sp>
-        <p:nvSpPr>
-          <p:cNvPr id="3" name="Shape 1"/>
-          <p:cNvSpPr/>
-          <p:nvPr/>
-        </p:nvSpPr>
-        <p:spPr>
-          <a:xfrm>
-            <a:off x="0" y="804672"/>
-            <a:ext cx="9144000" cy="27432"/>
-          </a:xfrm>
-          <a:prstGeom prst="rect">
-            <a:avLst/>
-          </a:prstGeom>
-          <a:solidFill>
-            <a:srgbClr val="E5E2DC"/>
-          </a:solidFill>
-          <a:ln/>
-        </p:spPr>
-      </p:sp>
-      <p:sp>
-        <p:nvSpPr>
-          <p:cNvPr id="4" name="Shape 2"/>
-          <p:cNvSpPr/>
-          <p:nvPr/>
-        </p:nvSpPr>
-        <p:spPr>
-          <a:xfrm>
-            <a:off x="548640" y="201168"/>
-            <a:ext cx="54864" cy="420624"/>
+            <a:ext cx="73152" cy="5148072"/>
           </a:xfrm>
           <a:prstGeom prst="rect">
             <a:avLst/>
@@ -3090,14 +2511,14 @@
       </p:sp>
       <p:sp>
         <p:nvSpPr>
-          <p:cNvPr id="5" name="Text 3"/>
-          <p:cNvSpPr/>
-          <p:nvPr/>
-        </p:nvSpPr>
-        <p:spPr>
-          <a:xfrm>
-            <a:off x="777240" y="137160"/>
-            <a:ext cx="7772400" cy="548640"/>
+          <p:cNvPr id="3" name="Text 1"/>
+          <p:cNvSpPr/>
+          <p:nvPr/>
+        </p:nvSpPr>
+        <p:spPr>
+          <a:xfrm>
+            <a:off x="548640" y="274320"/>
+            <a:ext cx="9144000" cy="640080"/>
           </a:xfrm>
           <a:prstGeom prst="rect">
             <a:avLst/>
@@ -3106,14 +2527,14 @@
           <a:ln/>
         </p:spPr>
         <p:txBody>
-          <a:bodyPr wrap="square" lIns="0" tIns="0" rIns="0" bIns="0" rtlCol="0" anchor="ctr"/>
+          <a:bodyPr wrap="square" rtlCol="0" anchor="ctr"/>
           <a:lstStyle/>
           <a:p>
             <a:pPr indent="0" marL="0">
               <a:buNone/>
             </a:pPr>
             <a:r>
-              <a:rPr lang="en-US" sz="2000" b="1" dirty="0">
+              <a:rPr lang="en-US" sz="2400" b="1" dirty="0">
                 <a:solidFill>
                   <a:srgbClr val="1B2A4A"/>
                 </a:solidFill>
@@ -3121,22 +2542,42 @@
                 <a:ea typeface="Georgia" pitchFamily="34" charset="-122"/>
                 <a:cs typeface="Georgia" pitchFamily="34" charset="-120"/>
               </a:rPr>
-              <a:t>Adding &amp; Subtracting Mixed Numbers</a:t>
-            </a:r>
-            <a:endParaRPr lang="en-US" sz="2000" dirty="0"/>
-          </a:p>
-        </p:txBody>
-      </p:sp>
-      <p:sp>
-        <p:nvSpPr>
-          <p:cNvPr id="6" name="Text 4"/>
-          <p:cNvSpPr/>
-          <p:nvPr/>
-        </p:nvSpPr>
-        <p:spPr>
-          <a:xfrm>
-            <a:off x="731520" y="1051560"/>
-            <a:ext cx="7680960" cy="3108960"/>
+              <a:t>Adding Mixed Numbers</a:t>
+            </a:r>
+            <a:endParaRPr lang="en-US" sz="2400" dirty="0"/>
+          </a:p>
+        </p:txBody>
+      </p:sp>
+      <p:sp>
+        <p:nvSpPr>
+          <p:cNvPr id="4" name="Shape 2"/>
+          <p:cNvSpPr/>
+          <p:nvPr/>
+        </p:nvSpPr>
+        <p:spPr>
+          <a:xfrm>
+            <a:off x="548640" y="960120"/>
+            <a:ext cx="2286000" cy="36576"/>
+          </a:xfrm>
+          <a:prstGeom prst="rect">
+            <a:avLst/>
+          </a:prstGeom>
+          <a:solidFill>
+            <a:srgbClr val="2A9D8F"/>
+          </a:solidFill>
+          <a:ln/>
+        </p:spPr>
+      </p:sp>
+      <p:sp>
+        <p:nvSpPr>
+          <p:cNvPr id="5" name="Text 3"/>
+          <p:cNvSpPr/>
+          <p:nvPr/>
+        </p:nvSpPr>
+        <p:spPr>
+          <a:xfrm>
+            <a:off x="548640" y="1188720"/>
+            <a:ext cx="10058400" cy="3474720"/>
           </a:xfrm>
           <a:prstGeom prst="rect">
             <a:avLst/>
@@ -3148,189 +2589,92 @@
           <a:bodyPr wrap="square" rtlCol="0" anchor="t"/>
           <a:lstStyle/>
           <a:p>
-            <a:pPr marL="342900" indent="-342900">
+            <a:pPr>
+              <a:lnSpc>
+                <a:spcPct val="150000"/>
+              </a:lnSpc>
               <a:spcAft>
-                <a:spcPts val="800"/>
+                <a:spcPts val="600"/>
               </a:spcAft>
-              <a:buSzPct val="100000"/>
-              <a:buChar char="•"/>
             </a:pPr>
             <a:r>
               <a:rPr lang="en-US" sz="1500" dirty="0">
                 <a:solidFill>
                   <a:srgbClr val="3D3A36"/>
                 </a:solidFill>
-                <a:latin typeface="Calibri" pitchFamily="34" charset="0"/>
-                <a:ea typeface="Calibri" pitchFamily="34" charset="-122"/>
-                <a:cs typeface="Calibri" pitchFamily="34" charset="-120"/>
-              </a:rPr>
-              <a:t>Method 1: Convert to improper fractions, then add/subtract normally.</a:t>
+                <a:latin typeface="Arial" pitchFamily="34" charset="0"/>
+                <a:ea typeface="Arial" pitchFamily="34" charset="-122"/>
+                <a:cs typeface="Arial" pitchFamily="34" charset="-120"/>
+              </a:rPr>
+              <a:t>Convert to improper fractions first (or add wholes separately).</a:t>
             </a:r>
             <a:endParaRPr lang="en-US" sz="1500" dirty="0"/>
           </a:p>
           <a:p>
-            <a:pPr marL="342900" indent="-342900">
+            <a:pPr>
+              <a:lnSpc>
+                <a:spcPct val="150000"/>
+              </a:lnSpc>
               <a:spcAft>
-                <a:spcPts val="800"/>
+                <a:spcPts val="600"/>
               </a:spcAft>
-              <a:buSzPct val="100000"/>
-              <a:buChar char="•"/>
             </a:pPr>
             <a:r>
               <a:rPr lang="en-US" sz="1500" dirty="0">
                 <a:solidFill>
                   <a:srgbClr val="3D3A36"/>
                 </a:solidFill>
-                <a:latin typeface="Calibri" pitchFamily="34" charset="0"/>
-                <a:ea typeface="Calibri" pitchFamily="34" charset="-122"/>
-                <a:cs typeface="Calibri" pitchFamily="34" charset="-120"/>
-              </a:rPr>
-              <a:t>Method 2: Add whole numbers separately, then add fractions separately.</a:t>
+                <a:latin typeface="Arial" pitchFamily="34" charset="0"/>
+                <a:ea typeface="Arial" pitchFamily="34" charset="-122"/>
+                <a:cs typeface="Arial" pitchFamily="34" charset="-120"/>
+              </a:rPr>
+              <a:t>Example: 2¹⁄₃ + 1²⁄₅</a:t>
             </a:r>
             <a:endParaRPr lang="en-US" sz="1500" dirty="0"/>
           </a:p>
           <a:p>
-            <a:pPr marL="342900" indent="-342900">
+            <a:pPr>
+              <a:lnSpc>
+                <a:spcPct val="150000"/>
+              </a:lnSpc>
               <a:spcAft>
-                <a:spcPts val="800"/>
+                <a:spcPts val="600"/>
               </a:spcAft>
-              <a:buSzPct val="100000"/>
-              <a:buChar char="•"/>
             </a:pPr>
             <a:r>
               <a:rPr lang="en-US" sz="1500" dirty="0">
                 <a:solidFill>
                   <a:srgbClr val="3D3A36"/>
                 </a:solidFill>
-                <a:latin typeface="Calibri" pitchFamily="34" charset="0"/>
-                <a:ea typeface="Calibri" pitchFamily="34" charset="-122"/>
-                <a:cs typeface="Calibri" pitchFamily="34" charset="-120"/>
-              </a:rPr>
-              <a:t>Example: 2¾ + 1⅔ → Convert: 11/4 + 5/3 → Common denom 12: 33/12 + 20/12 = 53/12 = 4 5/12.</a:t>
+                <a:latin typeface="Arial" pitchFamily="34" charset="0"/>
+                <a:ea typeface="Arial" pitchFamily="34" charset="-122"/>
+                <a:cs typeface="Arial" pitchFamily="34" charset="-120"/>
+              </a:rPr>
+              <a:t>Method 1: Wholes: 2 + 1 = 3. Fractions: ¹⁄₃ + ²⁄₅ = ⁵⁄₁₅ + ⁶⁄₁₅ = ¹¹⁄₁₅. Answer: 3¹¹⁄₁₅.</a:t>
             </a:r>
             <a:endParaRPr lang="en-US" sz="1500" dirty="0"/>
           </a:p>
           <a:p>
-            <a:pPr marL="342900" indent="-342900">
+            <a:pPr>
+              <a:lnSpc>
+                <a:spcPct val="150000"/>
+              </a:lnSpc>
               <a:spcAft>
-                <a:spcPts val="800"/>
+                <a:spcPts val="600"/>
               </a:spcAft>
-              <a:buSzPct val="100000"/>
-              <a:buChar char="•"/>
             </a:pPr>
             <a:r>
               <a:rPr lang="en-US" sz="1500" dirty="0">
                 <a:solidFill>
                   <a:srgbClr val="3D3A36"/>
                 </a:solidFill>
-                <a:latin typeface="Calibri" pitchFamily="34" charset="0"/>
-                <a:ea typeface="Calibri" pitchFamily="34" charset="-122"/>
-                <a:cs typeface="Calibri" pitchFamily="34" charset="-120"/>
-              </a:rPr>
-              <a:t>For subtraction, you may need to 'borrow' from the whole number.</a:t>
+                <a:latin typeface="Arial" pitchFamily="34" charset="0"/>
+                <a:ea typeface="Arial" pitchFamily="34" charset="-122"/>
+                <a:cs typeface="Arial" pitchFamily="34" charset="-120"/>
+              </a:rPr>
+              <a:t>Method 2: ⁷⁄₃ + ⁷⁄₅ = ³⁵⁄₁₅ + ²¹⁄₁₅ = ⁵⁶⁄₁₅ = 3¹¹⁄₁₅.</a:t>
             </a:r>
             <a:endParaRPr lang="en-US" sz="1500" dirty="0"/>
-          </a:p>
-          <a:p>
-            <a:pPr marL="342900" indent="-342900">
-              <a:spcAft>
-                <a:spcPts val="800"/>
-              </a:spcAft>
-              <a:buSzPct val="100000"/>
-              <a:buChar char="•"/>
-            </a:pPr>
-            <a:r>
-              <a:rPr lang="en-US" sz="1500" dirty="0">
-                <a:solidFill>
-                  <a:srgbClr val="3D3A36"/>
-                </a:solidFill>
-                <a:latin typeface="Calibri" pitchFamily="34" charset="0"/>
-                <a:ea typeface="Calibri" pitchFamily="34" charset="-122"/>
-                <a:cs typeface="Calibri" pitchFamily="34" charset="-120"/>
-              </a:rPr>
-              <a:t>Always simplify your final answer.</a:t>
-            </a:r>
-            <a:endParaRPr lang="en-US" sz="1500" dirty="0"/>
-          </a:p>
-        </p:txBody>
-      </p:sp>
-      <p:sp>
-        <p:nvSpPr>
-          <p:cNvPr id="7" name="Shape 5"/>
-          <p:cNvSpPr/>
-          <p:nvPr/>
-        </p:nvSpPr>
-        <p:spPr>
-          <a:xfrm>
-            <a:off x="731520" y="4206240"/>
-            <a:ext cx="7680960" cy="640080"/>
-          </a:xfrm>
-          <a:prstGeom prst="rect">
-            <a:avLst/>
-          </a:prstGeom>
-          <a:solidFill>
-            <a:srgbClr val="E8F5F3"/>
-          </a:solidFill>
-          <a:ln/>
-          <a:effectLst>
-            <a:outerShdw sx="100000" sy="100000" kx="0" ky="0" algn="bl" rotWithShape="0" blurRad="50800" dist="25400" dir="8100000">
-              <a:srgbClr val="000000">
-                <a:alpha val="10000"/>
-              </a:srgbClr>
-            </a:outerShdw>
-          </a:effectLst>
-        </p:spPr>
-      </p:sp>
-      <p:sp>
-        <p:nvSpPr>
-          <p:cNvPr id="8" name="Text 6"/>
-          <p:cNvSpPr/>
-          <p:nvPr/>
-        </p:nvSpPr>
-        <p:spPr>
-          <a:xfrm>
-            <a:off x="914400" y="4251960"/>
-            <a:ext cx="7315200" cy="548640"/>
-          </a:xfrm>
-          <a:prstGeom prst="rect">
-            <a:avLst/>
-          </a:prstGeom>
-          <a:noFill/>
-          <a:ln/>
-        </p:spPr>
-        <p:txBody>
-          <a:bodyPr wrap="square" rtlCol="0" anchor="ctr"/>
-          <a:lstStyle/>
-          <a:p>
-            <a:pPr indent="0" marL="0">
-              <a:buNone/>
-            </a:pPr>
-            <a:r>
-              <a:rPr lang="en-US" sz="1200" b="1" dirty="0">
-                <a:solidFill>
-                  <a:srgbClr val="2A9D8F"/>
-                </a:solidFill>
-                <a:latin typeface="Calibri" pitchFamily="34" charset="0"/>
-                <a:ea typeface="Calibri" pitchFamily="34" charset="-122"/>
-                <a:cs typeface="Calibri" pitchFamily="34" charset="-120"/>
-              </a:rPr>
-              <a:t>Key Idea: </a:t>
-            </a:r>
-            <a:pPr indent="0" marL="0">
-              <a:buNone/>
-            </a:pPr>
-            <a:r>
-              <a:rPr lang="en-US" sz="1200" i="1" dirty="0">
-                <a:solidFill>
-                  <a:srgbClr val="3D3A36"/>
-                </a:solidFill>
-                <a:latin typeface="Calibri" pitchFamily="34" charset="0"/>
-                <a:ea typeface="Calibri" pitchFamily="34" charset="-122"/>
-                <a:cs typeface="Calibri" pitchFamily="34" charset="-120"/>
-              </a:rPr>
-              <a:t>Most students find Method 1 (convert to improper) more reliable.</a:t>
-            </a:r>
-            <a:endParaRPr lang="en-US" sz="1200" dirty="0"/>
           </a:p>
         </p:txBody>
       </p:sp>
@@ -3375,47 +2719,7 @@
         <p:spPr>
           <a:xfrm>
             <a:off x="0" y="0"/>
-            <a:ext cx="9144000" cy="822960"/>
-          </a:xfrm>
-          <a:prstGeom prst="rect">
-            <a:avLst/>
-          </a:prstGeom>
-          <a:solidFill>
-            <a:srgbClr val="FFFFFF"/>
-          </a:solidFill>
-          <a:ln/>
-        </p:spPr>
-      </p:sp>
-      <p:sp>
-        <p:nvSpPr>
-          <p:cNvPr id="3" name="Shape 1"/>
-          <p:cNvSpPr/>
-          <p:nvPr/>
-        </p:nvSpPr>
-        <p:spPr>
-          <a:xfrm>
-            <a:off x="0" y="804672"/>
-            <a:ext cx="9144000" cy="27432"/>
-          </a:xfrm>
-          <a:prstGeom prst="rect">
-            <a:avLst/>
-          </a:prstGeom>
-          <a:solidFill>
-            <a:srgbClr val="E5E2DC"/>
-          </a:solidFill>
-          <a:ln/>
-        </p:spPr>
-      </p:sp>
-      <p:sp>
-        <p:nvSpPr>
-          <p:cNvPr id="4" name="Shape 2"/>
-          <p:cNvSpPr/>
-          <p:nvPr/>
-        </p:nvSpPr>
-        <p:spPr>
-          <a:xfrm>
-            <a:off x="548640" y="201168"/>
-            <a:ext cx="54864" cy="420624"/>
+            <a:ext cx="73152" cy="5148072"/>
           </a:xfrm>
           <a:prstGeom prst="rect">
             <a:avLst/>
@@ -3428,14 +2732,14 @@
       </p:sp>
       <p:sp>
         <p:nvSpPr>
-          <p:cNvPr id="5" name="Text 3"/>
-          <p:cNvSpPr/>
-          <p:nvPr/>
-        </p:nvSpPr>
-        <p:spPr>
-          <a:xfrm>
-            <a:off x="777240" y="137160"/>
-            <a:ext cx="7772400" cy="548640"/>
+          <p:cNvPr id="3" name="Text 1"/>
+          <p:cNvSpPr/>
+          <p:nvPr/>
+        </p:nvSpPr>
+        <p:spPr>
+          <a:xfrm>
+            <a:off x="548640" y="274320"/>
+            <a:ext cx="9144000" cy="640080"/>
           </a:xfrm>
           <a:prstGeom prst="rect">
             <a:avLst/>
@@ -3444,14 +2748,14 @@
           <a:ln/>
         </p:spPr>
         <p:txBody>
-          <a:bodyPr wrap="square" lIns="0" tIns="0" rIns="0" bIns="0" rtlCol="0" anchor="ctr"/>
+          <a:bodyPr wrap="square" rtlCol="0" anchor="ctr"/>
           <a:lstStyle/>
           <a:p>
             <a:pPr indent="0" marL="0">
               <a:buNone/>
             </a:pPr>
             <a:r>
-              <a:rPr lang="en-US" sz="2000" b="1" dirty="0">
+              <a:rPr lang="en-US" sz="2400" b="1" dirty="0">
                 <a:solidFill>
                   <a:srgbClr val="1B2A4A"/>
                 </a:solidFill>
@@ -3459,22 +2763,42 @@
                 <a:ea typeface="Georgia" pitchFamily="34" charset="-122"/>
                 <a:cs typeface="Georgia" pitchFamily="34" charset="-120"/>
               </a:rPr>
-              <a:t>Common Mistakes</a:t>
-            </a:r>
-            <a:endParaRPr lang="en-US" sz="2000" dirty="0"/>
-          </a:p>
-        </p:txBody>
-      </p:sp>
-      <p:sp>
-        <p:nvSpPr>
-          <p:cNvPr id="6" name="Text 4"/>
-          <p:cNvSpPr/>
-          <p:nvPr/>
-        </p:nvSpPr>
-        <p:spPr>
-          <a:xfrm>
-            <a:off x="731520" y="1051560"/>
-            <a:ext cx="7680960" cy="3108960"/>
+              <a:t>Common Mistakes to Avoid</a:t>
+            </a:r>
+            <a:endParaRPr lang="en-US" sz="2400" dirty="0"/>
+          </a:p>
+        </p:txBody>
+      </p:sp>
+      <p:sp>
+        <p:nvSpPr>
+          <p:cNvPr id="4" name="Shape 2"/>
+          <p:cNvSpPr/>
+          <p:nvPr/>
+        </p:nvSpPr>
+        <p:spPr>
+          <a:xfrm>
+            <a:off x="548640" y="960120"/>
+            <a:ext cx="2286000" cy="36576"/>
+          </a:xfrm>
+          <a:prstGeom prst="rect">
+            <a:avLst/>
+          </a:prstGeom>
+          <a:solidFill>
+            <a:srgbClr val="2A9D8F"/>
+          </a:solidFill>
+          <a:ln/>
+        </p:spPr>
+      </p:sp>
+      <p:sp>
+        <p:nvSpPr>
+          <p:cNvPr id="5" name="Text 3"/>
+          <p:cNvSpPr/>
+          <p:nvPr/>
+        </p:nvSpPr>
+        <p:spPr>
+          <a:xfrm>
+            <a:off x="548640" y="1188720"/>
+            <a:ext cx="10058400" cy="3474720"/>
           </a:xfrm>
           <a:prstGeom prst="rect">
             <a:avLst/>
@@ -3486,107 +2810,90 @@
           <a:bodyPr wrap="square" rtlCol="0" anchor="t"/>
           <a:lstStyle/>
           <a:p>
-            <a:pPr marL="342900" indent="-342900">
+            <a:pPr>
+              <a:lnSpc>
+                <a:spcPct val="150000"/>
+              </a:lnSpc>
               <a:spcAft>
-                <a:spcPts val="800"/>
+                <a:spcPts val="600"/>
               </a:spcAft>
-              <a:buSzPct val="100000"/>
-              <a:buChar char="•"/>
             </a:pPr>
             <a:r>
               <a:rPr lang="en-US" sz="1500" dirty="0">
                 <a:solidFill>
                   <a:srgbClr val="3D3A36"/>
                 </a:solidFill>
-                <a:latin typeface="Calibri" pitchFamily="34" charset="0"/>
-                <a:ea typeface="Calibri" pitchFamily="34" charset="-122"/>
-                <a:cs typeface="Calibri" pitchFamily="34" charset="-120"/>
-              </a:rPr>
-              <a:t>Adding denominators: ½ + ⅓ ≠ 2/5 (WRONG! → correct answer is 5/6).</a:t>
+                <a:latin typeface="Arial" pitchFamily="34" charset="0"/>
+                <a:ea typeface="Arial" pitchFamily="34" charset="-122"/>
+                <a:cs typeface="Arial" pitchFamily="34" charset="-120"/>
+              </a:rPr>
+              <a:t>WRONG: ¹⁄₃ + ¹⁄₄ = ²⁄₇ ← You CANNOT add denominators!</a:t>
             </a:r>
             <a:endParaRPr lang="en-US" sz="1500" dirty="0"/>
           </a:p>
           <a:p>
-            <a:pPr marL="342900" indent="-342900">
+            <a:pPr>
+              <a:lnSpc>
+                <a:spcPct val="150000"/>
+              </a:lnSpc>
               <a:spcAft>
-                <a:spcPts val="800"/>
+                <a:spcPts val="600"/>
               </a:spcAft>
-              <a:buSzPct val="100000"/>
-              <a:buChar char="•"/>
             </a:pPr>
             <a:r>
               <a:rPr lang="en-US" sz="1500" dirty="0">
                 <a:solidFill>
                   <a:srgbClr val="3D3A36"/>
                 </a:solidFill>
-                <a:latin typeface="Calibri" pitchFamily="34" charset="0"/>
-                <a:ea typeface="Calibri" pitchFamily="34" charset="-122"/>
-                <a:cs typeface="Calibri" pitchFamily="34" charset="-120"/>
-              </a:rPr>
-              <a:t>Forgetting to find a common denominator before adding.</a:t>
+                <a:latin typeface="Arial" pitchFamily="34" charset="0"/>
+                <a:ea typeface="Arial" pitchFamily="34" charset="-122"/>
+                <a:cs typeface="Arial" pitchFamily="34" charset="-120"/>
+              </a:rPr>
+              <a:t>WRONG: Forgetting to find a common denominator.</a:t>
             </a:r>
             <a:endParaRPr lang="en-US" sz="1500" dirty="0"/>
           </a:p>
           <a:p>
-            <a:pPr marL="342900" indent="-342900">
+            <a:pPr>
+              <a:lnSpc>
+                <a:spcPct val="150000"/>
+              </a:lnSpc>
               <a:spcAft>
-                <a:spcPts val="800"/>
+                <a:spcPts val="600"/>
               </a:spcAft>
-              <a:buSzPct val="100000"/>
-              <a:buChar char="•"/>
             </a:pPr>
             <a:r>
               <a:rPr lang="en-US" sz="1500" dirty="0">
                 <a:solidFill>
                   <a:srgbClr val="3D3A36"/>
                 </a:solidFill>
-                <a:latin typeface="Calibri" pitchFamily="34" charset="0"/>
-                <a:ea typeface="Calibri" pitchFamily="34" charset="-122"/>
-                <a:cs typeface="Calibri" pitchFamily="34" charset="-120"/>
-              </a:rPr>
-              <a:t>Not simplifying the final answer.</a:t>
+                <a:latin typeface="Arial" pitchFamily="34" charset="0"/>
+                <a:ea typeface="Arial" pitchFamily="34" charset="-122"/>
+                <a:cs typeface="Arial" pitchFamily="34" charset="-120"/>
+              </a:rPr>
+              <a:t>WRONG: Not simplifying the final answer.</a:t>
             </a:r>
             <a:endParaRPr lang="en-US" sz="1500" dirty="0"/>
           </a:p>
           <a:p>
-            <a:pPr marL="342900" indent="-342900">
+            <a:pPr>
+              <a:lnSpc>
+                <a:spcPct val="150000"/>
+              </a:lnSpc>
               <a:spcAft>
-                <a:spcPts val="800"/>
+                <a:spcPts val="600"/>
               </a:spcAft>
-              <a:buSzPct val="100000"/>
-              <a:buChar char="•"/>
             </a:pPr>
             <a:r>
               <a:rPr lang="en-US" sz="1500" dirty="0">
                 <a:solidFill>
                   <a:srgbClr val="3D3A36"/>
                 </a:solidFill>
-                <a:latin typeface="Calibri" pitchFamily="34" charset="0"/>
-                <a:ea typeface="Calibri" pitchFamily="34" charset="-122"/>
-                <a:cs typeface="Calibri" pitchFamily="34" charset="-120"/>
-              </a:rPr>
-              <a:t>Forgetting to convert back from improper to mixed number.</a:t>
-            </a:r>
-            <a:endParaRPr lang="en-US" sz="1500" dirty="0"/>
-          </a:p>
-          <a:p>
-            <a:pPr marL="342900" indent="-342900">
-              <a:spcAft>
-                <a:spcPts val="800"/>
-              </a:spcAft>
-              <a:buSzPct val="100000"/>
-              <a:buChar char="•"/>
-            </a:pPr>
-            <a:r>
-              <a:rPr lang="en-US" sz="1500" dirty="0">
-                <a:solidFill>
-                  <a:srgbClr val="3D3A36"/>
-                </a:solidFill>
-                <a:latin typeface="Calibri" pitchFamily="34" charset="0"/>
-                <a:ea typeface="Calibri" pitchFamily="34" charset="-122"/>
-                <a:cs typeface="Calibri" pitchFamily="34" charset="-120"/>
-              </a:rPr>
-              <a:t>Always check: does my answer make sense?</a:t>
+                <a:latin typeface="Arial" pitchFamily="34" charset="0"/>
+                <a:ea typeface="Arial" pitchFamily="34" charset="-122"/>
+                <a:cs typeface="Arial" pitchFamily="34" charset="-120"/>
+              </a:rPr>
+              <a:t>ALWAYS: Find common denominator → add numerators → simplify.</a:t>
             </a:r>
             <a:endParaRPr lang="en-US" sz="1500" dirty="0"/>
           </a:p>
@@ -3633,47 +2940,7 @@
         <p:spPr>
           <a:xfrm>
             <a:off x="0" y="0"/>
-            <a:ext cx="9144000" cy="822960"/>
-          </a:xfrm>
-          <a:prstGeom prst="rect">
-            <a:avLst/>
-          </a:prstGeom>
-          <a:solidFill>
-            <a:srgbClr val="FFFFFF"/>
-          </a:solidFill>
-          <a:ln/>
-        </p:spPr>
-      </p:sp>
-      <p:sp>
-        <p:nvSpPr>
-          <p:cNvPr id="3" name="Shape 1"/>
-          <p:cNvSpPr/>
-          <p:nvPr/>
-        </p:nvSpPr>
-        <p:spPr>
-          <a:xfrm>
-            <a:off x="0" y="804672"/>
-            <a:ext cx="9144000" cy="27432"/>
-          </a:xfrm>
-          <a:prstGeom prst="rect">
-            <a:avLst/>
-          </a:prstGeom>
-          <a:solidFill>
-            <a:srgbClr val="E5E2DC"/>
-          </a:solidFill>
-          <a:ln/>
-        </p:spPr>
-      </p:sp>
-      <p:sp>
-        <p:nvSpPr>
-          <p:cNvPr id="4" name="Shape 2"/>
-          <p:cNvSpPr/>
-          <p:nvPr/>
-        </p:nvSpPr>
-        <p:spPr>
-          <a:xfrm>
-            <a:off x="548640" y="201168"/>
-            <a:ext cx="54864" cy="420624"/>
+            <a:ext cx="73152" cy="5148072"/>
           </a:xfrm>
           <a:prstGeom prst="rect">
             <a:avLst/>
@@ -3686,14 +2953,14 @@
       </p:sp>
       <p:sp>
         <p:nvSpPr>
-          <p:cNvPr id="5" name="Text 3"/>
-          <p:cNvSpPr/>
-          <p:nvPr/>
-        </p:nvSpPr>
-        <p:spPr>
-          <a:xfrm>
-            <a:off x="777240" y="137160"/>
-            <a:ext cx="7772400" cy="548640"/>
+          <p:cNvPr id="3" name="Text 1"/>
+          <p:cNvSpPr/>
+          <p:nvPr/>
+        </p:nvSpPr>
+        <p:spPr>
+          <a:xfrm>
+            <a:off x="548640" y="274320"/>
+            <a:ext cx="9144000" cy="640080"/>
           </a:xfrm>
           <a:prstGeom prst="rect">
             <a:avLst/>
@@ -3702,14 +2969,14 @@
           <a:ln/>
         </p:spPr>
         <p:txBody>
-          <a:bodyPr wrap="square" lIns="0" tIns="0" rIns="0" bIns="0" rtlCol="0" anchor="ctr"/>
+          <a:bodyPr wrap="square" rtlCol="0" anchor="ctr"/>
           <a:lstStyle/>
           <a:p>
             <a:pPr indent="0" marL="0">
               <a:buNone/>
             </a:pPr>
             <a:r>
-              <a:rPr lang="en-US" sz="2000" b="1" dirty="0">
+              <a:rPr lang="en-US" sz="2400" b="1" dirty="0">
                 <a:solidFill>
                   <a:srgbClr val="1B2A4A"/>
                 </a:solidFill>
@@ -3719,40 +2986,40 @@
               </a:rPr>
               <a:t>Check Your Understanding</a:t>
             </a:r>
-            <a:endParaRPr lang="en-US" sz="2000" dirty="0"/>
-          </a:p>
-        </p:txBody>
-      </p:sp>
-      <p:sp>
-        <p:nvSpPr>
-          <p:cNvPr id="6" name="Shape 4"/>
-          <p:cNvSpPr/>
-          <p:nvPr/>
-        </p:nvSpPr>
-        <p:spPr>
-          <a:xfrm>
-            <a:off x="731520" y="1051560"/>
-            <a:ext cx="7680960" cy="438912"/>
+            <a:endParaRPr lang="en-US" sz="2400" dirty="0"/>
+          </a:p>
+        </p:txBody>
+      </p:sp>
+      <p:sp>
+        <p:nvSpPr>
+          <p:cNvPr id="4" name="Shape 2"/>
+          <p:cNvSpPr/>
+          <p:nvPr/>
+        </p:nvSpPr>
+        <p:spPr>
+          <a:xfrm>
+            <a:off x="548640" y="960120"/>
+            <a:ext cx="2286000" cy="36576"/>
           </a:xfrm>
           <a:prstGeom prst="rect">
             <a:avLst/>
           </a:prstGeom>
           <a:solidFill>
-            <a:srgbClr val="FFFFFF"/>
+            <a:srgbClr val="2A9D8F"/>
           </a:solidFill>
           <a:ln/>
         </p:spPr>
       </p:sp>
       <p:sp>
         <p:nvSpPr>
-          <p:cNvPr id="7" name="Text 5"/>
-          <p:cNvSpPr/>
-          <p:nvPr/>
-        </p:nvSpPr>
-        <p:spPr>
-          <a:xfrm>
-            <a:off x="868680" y="1051560"/>
-            <a:ext cx="320040" cy="438912"/>
+          <p:cNvPr id="5" name="Text 3"/>
+          <p:cNvSpPr/>
+          <p:nvPr/>
+        </p:nvSpPr>
+        <p:spPr>
+          <a:xfrm>
+            <a:off x="548640" y="1188720"/>
+            <a:ext cx="365760" cy="457200"/>
           </a:xfrm>
           <a:prstGeom prst="rect">
             <a:avLst/>
@@ -3768,12 +3035,57 @@
               <a:buNone/>
             </a:pPr>
             <a:r>
+              <a:rPr lang="en-US" sz="1600" dirty="0">
+                <a:solidFill>
+                  <a:srgbClr val="2A9D8F"/>
+                </a:solidFill>
+                <a:latin typeface="Arial" pitchFamily="34" charset="0"/>
+                <a:ea typeface="Arial" pitchFamily="34" charset="-122"/>
+                <a:cs typeface="Arial" pitchFamily="34" charset="-120"/>
+              </a:rPr>
+              <a:t>☐</a:t>
+            </a:r>
+            <a:endParaRPr lang="en-US" sz="1600" dirty="0"/>
+          </a:p>
+        </p:txBody>
+      </p:sp>
+      <p:sp>
+        <p:nvSpPr>
+          <p:cNvPr id="6" name="Text 4"/>
+          <p:cNvSpPr/>
+          <p:nvPr/>
+        </p:nvSpPr>
+        <p:spPr>
+          <a:xfrm>
+            <a:off x="1005840" y="1188720"/>
+            <a:ext cx="9601200" cy="457200"/>
+          </a:xfrm>
+          <a:prstGeom prst="rect">
+            <a:avLst/>
+          </a:prstGeom>
+          <a:noFill/>
+          <a:ln/>
+        </p:spPr>
+        <p:txBody>
+          <a:bodyPr wrap="square" rtlCol="0" anchor="ctr"/>
+          <a:lstStyle/>
+          <a:p>
+            <a:pPr indent="0" marL="0">
+              <a:lnSpc>
+                <a:spcPct val="130000"/>
+              </a:lnSpc>
+              <a:buNone/>
+            </a:pPr>
+            <a:r>
               <a:rPr lang="en-US" sz="1400" dirty="0">
                 <a:solidFill>
-                  <a:srgbClr val="2A9D8F"/>
-                </a:solidFill>
-              </a:rPr>
-              <a:t>☐</a:t>
+                  <a:srgbClr val="3D3A36"/>
+                </a:solidFill>
+                <a:latin typeface="Arial" pitchFamily="34" charset="0"/>
+                <a:ea typeface="Arial" pitchFamily="34" charset="-122"/>
+                <a:cs typeface="Arial" pitchFamily="34" charset="-120"/>
+              </a:rPr>
+              <a:t>I can add and subtract fractions with the same denominator.</a:t>
             </a:r>
             <a:endParaRPr lang="en-US" sz="1400" dirty="0"/>
           </a:p>
@@ -3781,14 +3093,14 @@
       </p:sp>
       <p:sp>
         <p:nvSpPr>
-          <p:cNvPr id="8" name="Text 6"/>
-          <p:cNvSpPr/>
-          <p:nvPr/>
-        </p:nvSpPr>
-        <p:spPr>
-          <a:xfrm>
-            <a:off x="1234440" y="1051560"/>
-            <a:ext cx="6949440" cy="438912"/>
+          <p:cNvPr id="7" name="Text 5"/>
+          <p:cNvSpPr/>
+          <p:nvPr/>
+        </p:nvSpPr>
+        <p:spPr>
+          <a:xfrm>
+            <a:off x="548640" y="1783080"/>
+            <a:ext cx="365760" cy="457200"/>
           </a:xfrm>
           <a:prstGeom prst="rect">
             <a:avLst/>
@@ -3804,50 +3116,72 @@
               <a:buNone/>
             </a:pPr>
             <a:r>
-              <a:rPr lang="en-US" sz="1300" dirty="0">
+              <a:rPr lang="en-US" sz="1600" dirty="0">
+                <a:solidFill>
+                  <a:srgbClr val="2A9D8F"/>
+                </a:solidFill>
+                <a:latin typeface="Arial" pitchFamily="34" charset="0"/>
+                <a:ea typeface="Arial" pitchFamily="34" charset="-122"/>
+                <a:cs typeface="Arial" pitchFamily="34" charset="-120"/>
+              </a:rPr>
+              <a:t>☐</a:t>
+            </a:r>
+            <a:endParaRPr lang="en-US" sz="1600" dirty="0"/>
+          </a:p>
+        </p:txBody>
+      </p:sp>
+      <p:sp>
+        <p:nvSpPr>
+          <p:cNvPr id="8" name="Text 6"/>
+          <p:cNvSpPr/>
+          <p:nvPr/>
+        </p:nvSpPr>
+        <p:spPr>
+          <a:xfrm>
+            <a:off x="1005840" y="1783080"/>
+            <a:ext cx="9601200" cy="457200"/>
+          </a:xfrm>
+          <a:prstGeom prst="rect">
+            <a:avLst/>
+          </a:prstGeom>
+          <a:noFill/>
+          <a:ln/>
+        </p:spPr>
+        <p:txBody>
+          <a:bodyPr wrap="square" rtlCol="0" anchor="ctr"/>
+          <a:lstStyle/>
+          <a:p>
+            <a:pPr indent="0" marL="0">
+              <a:lnSpc>
+                <a:spcPct val="130000"/>
+              </a:lnSpc>
+              <a:buNone/>
+            </a:pPr>
+            <a:r>
+              <a:rPr lang="en-US" sz="1400" dirty="0">
                 <a:solidFill>
                   <a:srgbClr val="3D3A36"/>
                 </a:solidFill>
-                <a:latin typeface="Calibri" pitchFamily="34" charset="0"/>
-                <a:ea typeface="Calibri" pitchFamily="34" charset="-122"/>
-                <a:cs typeface="Calibri" pitchFamily="34" charset="-120"/>
-              </a:rPr>
-              <a:t>I can add fractions with the same denominator</a:t>
-            </a:r>
-            <a:endParaRPr lang="en-US" sz="1300" dirty="0"/>
-          </a:p>
-        </p:txBody>
-      </p:sp>
-      <p:sp>
-        <p:nvSpPr>
-          <p:cNvPr id="9" name="Shape 7"/>
-          <p:cNvSpPr/>
-          <p:nvPr/>
-        </p:nvSpPr>
-        <p:spPr>
-          <a:xfrm>
-            <a:off x="731520" y="1554480"/>
-            <a:ext cx="7680960" cy="438912"/>
-          </a:xfrm>
-          <a:prstGeom prst="rect">
-            <a:avLst/>
-          </a:prstGeom>
-          <a:solidFill>
-            <a:srgbClr val="F8F6F3"/>
-          </a:solidFill>
-          <a:ln/>
-        </p:spPr>
-      </p:sp>
-      <p:sp>
-        <p:nvSpPr>
-          <p:cNvPr id="10" name="Text 8"/>
-          <p:cNvSpPr/>
-          <p:nvPr/>
-        </p:nvSpPr>
-        <p:spPr>
-          <a:xfrm>
-            <a:off x="868680" y="1554480"/>
-            <a:ext cx="320040" cy="438912"/>
+                <a:latin typeface="Arial" pitchFamily="34" charset="0"/>
+                <a:ea typeface="Arial" pitchFamily="34" charset="-122"/>
+                <a:cs typeface="Arial" pitchFamily="34" charset="-120"/>
+              </a:rPr>
+              <a:t>I can find a common denominator for different fractions.</a:t>
+            </a:r>
+            <a:endParaRPr lang="en-US" sz="1400" dirty="0"/>
+          </a:p>
+        </p:txBody>
+      </p:sp>
+      <p:sp>
+        <p:nvSpPr>
+          <p:cNvPr id="9" name="Text 7"/>
+          <p:cNvSpPr/>
+          <p:nvPr/>
+        </p:nvSpPr>
+        <p:spPr>
+          <a:xfrm>
+            <a:off x="548640" y="2377440"/>
+            <a:ext cx="365760" cy="457200"/>
           </a:xfrm>
           <a:prstGeom prst="rect">
             <a:avLst/>
@@ -3863,12 +3197,57 @@
               <a:buNone/>
             </a:pPr>
             <a:r>
+              <a:rPr lang="en-US" sz="1600" dirty="0">
+                <a:solidFill>
+                  <a:srgbClr val="2A9D8F"/>
+                </a:solidFill>
+                <a:latin typeface="Arial" pitchFamily="34" charset="0"/>
+                <a:ea typeface="Arial" pitchFamily="34" charset="-122"/>
+                <a:cs typeface="Arial" pitchFamily="34" charset="-120"/>
+              </a:rPr>
+              <a:t>☐</a:t>
+            </a:r>
+            <a:endParaRPr lang="en-US" sz="1600" dirty="0"/>
+          </a:p>
+        </p:txBody>
+      </p:sp>
+      <p:sp>
+        <p:nvSpPr>
+          <p:cNvPr id="10" name="Text 8"/>
+          <p:cNvSpPr/>
+          <p:nvPr/>
+        </p:nvSpPr>
+        <p:spPr>
+          <a:xfrm>
+            <a:off x="1005840" y="2377440"/>
+            <a:ext cx="9601200" cy="457200"/>
+          </a:xfrm>
+          <a:prstGeom prst="rect">
+            <a:avLst/>
+          </a:prstGeom>
+          <a:noFill/>
+          <a:ln/>
+        </p:spPr>
+        <p:txBody>
+          <a:bodyPr wrap="square" rtlCol="0" anchor="ctr"/>
+          <a:lstStyle/>
+          <a:p>
+            <a:pPr indent="0" marL="0">
+              <a:lnSpc>
+                <a:spcPct val="130000"/>
+              </a:lnSpc>
+              <a:buNone/>
+            </a:pPr>
+            <a:r>
               <a:rPr lang="en-US" sz="1400" dirty="0">
                 <a:solidFill>
-                  <a:srgbClr val="2A9D8F"/>
-                </a:solidFill>
-              </a:rPr>
-              <a:t>☐</a:t>
+                  <a:srgbClr val="3D3A36"/>
+                </a:solidFill>
+                <a:latin typeface="Arial" pitchFamily="34" charset="0"/>
+                <a:ea typeface="Arial" pitchFamily="34" charset="-122"/>
+                <a:cs typeface="Arial" pitchFamily="34" charset="-120"/>
+              </a:rPr>
+              <a:t>I can add and subtract mixed numbers.</a:t>
             </a:r>
             <a:endParaRPr lang="en-US" sz="1400" dirty="0"/>
           </a:p>
@@ -3882,8 +3261,8 @@
         </p:nvSpPr>
         <p:spPr>
           <a:xfrm>
-            <a:off x="1234440" y="1554480"/>
-            <a:ext cx="6949440" cy="438912"/>
+            <a:off x="548640" y="2971800"/>
+            <a:ext cx="365760" cy="457200"/>
           </a:xfrm>
           <a:prstGeom prst="rect">
             <a:avLst/>
@@ -3899,382 +3278,59 @@
               <a:buNone/>
             </a:pPr>
             <a:r>
-              <a:rPr lang="en-US" sz="1300" dirty="0">
+              <a:rPr lang="en-US" sz="1600" dirty="0">
+                <a:solidFill>
+                  <a:srgbClr val="2A9D8F"/>
+                </a:solidFill>
+                <a:latin typeface="Arial" pitchFamily="34" charset="0"/>
+                <a:ea typeface="Arial" pitchFamily="34" charset="-122"/>
+                <a:cs typeface="Arial" pitchFamily="34" charset="-120"/>
+              </a:rPr>
+              <a:t>☐</a:t>
+            </a:r>
+            <a:endParaRPr lang="en-US" sz="1600" dirty="0"/>
+          </a:p>
+        </p:txBody>
+      </p:sp>
+      <p:sp>
+        <p:nvSpPr>
+          <p:cNvPr id="12" name="Text 10"/>
+          <p:cNvSpPr/>
+          <p:nvPr/>
+        </p:nvSpPr>
+        <p:spPr>
+          <a:xfrm>
+            <a:off x="1005840" y="2971800"/>
+            <a:ext cx="9601200" cy="457200"/>
+          </a:xfrm>
+          <a:prstGeom prst="rect">
+            <a:avLst/>
+          </a:prstGeom>
+          <a:noFill/>
+          <a:ln/>
+        </p:spPr>
+        <p:txBody>
+          <a:bodyPr wrap="square" rtlCol="0" anchor="ctr"/>
+          <a:lstStyle/>
+          <a:p>
+            <a:pPr indent="0" marL="0">
+              <a:lnSpc>
+                <a:spcPct val="130000"/>
+              </a:lnSpc>
+              <a:buNone/>
+            </a:pPr>
+            <a:r>
+              <a:rPr lang="en-US" sz="1400" dirty="0">
                 <a:solidFill>
                   <a:srgbClr val="3D3A36"/>
                 </a:solidFill>
-                <a:latin typeface="Calibri" pitchFamily="34" charset="0"/>
-                <a:ea typeface="Calibri" pitchFamily="34" charset="-122"/>
-                <a:cs typeface="Calibri" pitchFamily="34" charset="-120"/>
-              </a:rPr>
-              <a:t>I can add fractions with different denominators (find LCM)</a:t>
-            </a:r>
-            <a:endParaRPr lang="en-US" sz="1300" dirty="0"/>
-          </a:p>
-        </p:txBody>
-      </p:sp>
-      <p:sp>
-        <p:nvSpPr>
-          <p:cNvPr id="12" name="Shape 10"/>
-          <p:cNvSpPr/>
-          <p:nvPr/>
-        </p:nvSpPr>
-        <p:spPr>
-          <a:xfrm>
-            <a:off x="731520" y="2057400"/>
-            <a:ext cx="7680960" cy="438912"/>
-          </a:xfrm>
-          <a:prstGeom prst="rect">
-            <a:avLst/>
-          </a:prstGeom>
-          <a:solidFill>
-            <a:srgbClr val="FFFFFF"/>
-          </a:solidFill>
-          <a:ln/>
-        </p:spPr>
-      </p:sp>
-      <p:sp>
-        <p:nvSpPr>
-          <p:cNvPr id="13" name="Text 11"/>
-          <p:cNvSpPr/>
-          <p:nvPr/>
-        </p:nvSpPr>
-        <p:spPr>
-          <a:xfrm>
-            <a:off x="868680" y="2057400"/>
-            <a:ext cx="320040" cy="438912"/>
-          </a:xfrm>
-          <a:prstGeom prst="rect">
-            <a:avLst/>
-          </a:prstGeom>
-          <a:noFill/>
-          <a:ln/>
-        </p:spPr>
-        <p:txBody>
-          <a:bodyPr wrap="square" rtlCol="0" anchor="ctr"/>
-          <a:lstStyle/>
-          <a:p>
-            <a:pPr indent="0" marL="0">
-              <a:buNone/>
-            </a:pPr>
-            <a:r>
-              <a:rPr lang="en-US" sz="1400" dirty="0">
-                <a:solidFill>
-                  <a:srgbClr val="2A9D8F"/>
-                </a:solidFill>
-              </a:rPr>
-              <a:t>☐</a:t>
+                <a:latin typeface="Arial" pitchFamily="34" charset="0"/>
+                <a:ea typeface="Arial" pitchFamily="34" charset="-122"/>
+                <a:cs typeface="Arial" pitchFamily="34" charset="-120"/>
+              </a:rPr>
+              <a:t>I know NOT to add the denominators together.</a:t>
             </a:r>
             <a:endParaRPr lang="en-US" sz="1400" dirty="0"/>
-          </a:p>
-        </p:txBody>
-      </p:sp>
-      <p:sp>
-        <p:nvSpPr>
-          <p:cNvPr id="14" name="Text 12"/>
-          <p:cNvSpPr/>
-          <p:nvPr/>
-        </p:nvSpPr>
-        <p:spPr>
-          <a:xfrm>
-            <a:off x="1234440" y="2057400"/>
-            <a:ext cx="6949440" cy="438912"/>
-          </a:xfrm>
-          <a:prstGeom prst="rect">
-            <a:avLst/>
-          </a:prstGeom>
-          <a:noFill/>
-          <a:ln/>
-        </p:spPr>
-        <p:txBody>
-          <a:bodyPr wrap="square" rtlCol="0" anchor="ctr"/>
-          <a:lstStyle/>
-          <a:p>
-            <a:pPr indent="0" marL="0">
-              <a:buNone/>
-            </a:pPr>
-            <a:r>
-              <a:rPr lang="en-US" sz="1300" dirty="0">
-                <a:solidFill>
-                  <a:srgbClr val="3D3A36"/>
-                </a:solidFill>
-                <a:latin typeface="Calibri" pitchFamily="34" charset="0"/>
-                <a:ea typeface="Calibri" pitchFamily="34" charset="-122"/>
-                <a:cs typeface="Calibri" pitchFamily="34" charset="-120"/>
-              </a:rPr>
-              <a:t>I can subtract fractions</a:t>
-            </a:r>
-            <a:endParaRPr lang="en-US" sz="1300" dirty="0"/>
-          </a:p>
-        </p:txBody>
-      </p:sp>
-      <p:sp>
-        <p:nvSpPr>
-          <p:cNvPr id="15" name="Shape 13"/>
-          <p:cNvSpPr/>
-          <p:nvPr/>
-        </p:nvSpPr>
-        <p:spPr>
-          <a:xfrm>
-            <a:off x="731520" y="2560320"/>
-            <a:ext cx="7680960" cy="438912"/>
-          </a:xfrm>
-          <a:prstGeom prst="rect">
-            <a:avLst/>
-          </a:prstGeom>
-          <a:solidFill>
-            <a:srgbClr val="F8F6F3"/>
-          </a:solidFill>
-          <a:ln/>
-        </p:spPr>
-      </p:sp>
-      <p:sp>
-        <p:nvSpPr>
-          <p:cNvPr id="16" name="Text 14"/>
-          <p:cNvSpPr/>
-          <p:nvPr/>
-        </p:nvSpPr>
-        <p:spPr>
-          <a:xfrm>
-            <a:off x="868680" y="2560320"/>
-            <a:ext cx="320040" cy="438912"/>
-          </a:xfrm>
-          <a:prstGeom prst="rect">
-            <a:avLst/>
-          </a:prstGeom>
-          <a:noFill/>
-          <a:ln/>
-        </p:spPr>
-        <p:txBody>
-          <a:bodyPr wrap="square" rtlCol="0" anchor="ctr"/>
-          <a:lstStyle/>
-          <a:p>
-            <a:pPr indent="0" marL="0">
-              <a:buNone/>
-            </a:pPr>
-            <a:r>
-              <a:rPr lang="en-US" sz="1400" dirty="0">
-                <a:solidFill>
-                  <a:srgbClr val="2A9D8F"/>
-                </a:solidFill>
-              </a:rPr>
-              <a:t>☐</a:t>
-            </a:r>
-            <a:endParaRPr lang="en-US" sz="1400" dirty="0"/>
-          </a:p>
-        </p:txBody>
-      </p:sp>
-      <p:sp>
-        <p:nvSpPr>
-          <p:cNvPr id="17" name="Text 15"/>
-          <p:cNvSpPr/>
-          <p:nvPr/>
-        </p:nvSpPr>
-        <p:spPr>
-          <a:xfrm>
-            <a:off x="1234440" y="2560320"/>
-            <a:ext cx="6949440" cy="438912"/>
-          </a:xfrm>
-          <a:prstGeom prst="rect">
-            <a:avLst/>
-          </a:prstGeom>
-          <a:noFill/>
-          <a:ln/>
-        </p:spPr>
-        <p:txBody>
-          <a:bodyPr wrap="square" rtlCol="0" anchor="ctr"/>
-          <a:lstStyle/>
-          <a:p>
-            <a:pPr indent="0" marL="0">
-              <a:buNone/>
-            </a:pPr>
-            <a:r>
-              <a:rPr lang="en-US" sz="1300" dirty="0">
-                <a:solidFill>
-                  <a:srgbClr val="3D3A36"/>
-                </a:solidFill>
-                <a:latin typeface="Calibri" pitchFamily="34" charset="0"/>
-                <a:ea typeface="Calibri" pitchFamily="34" charset="-122"/>
-                <a:cs typeface="Calibri" pitchFamily="34" charset="-120"/>
-              </a:rPr>
-              <a:t>I can add and subtract mixed numbers</a:t>
-            </a:r>
-            <a:endParaRPr lang="en-US" sz="1300" dirty="0"/>
-          </a:p>
-        </p:txBody>
-      </p:sp>
-      <p:sp>
-        <p:nvSpPr>
-          <p:cNvPr id="18" name="Shape 16"/>
-          <p:cNvSpPr/>
-          <p:nvPr/>
-        </p:nvSpPr>
-        <p:spPr>
-          <a:xfrm>
-            <a:off x="731520" y="3063240"/>
-            <a:ext cx="7680960" cy="438912"/>
-          </a:xfrm>
-          <a:prstGeom prst="rect">
-            <a:avLst/>
-          </a:prstGeom>
-          <a:solidFill>
-            <a:srgbClr val="FFFFFF"/>
-          </a:solidFill>
-          <a:ln/>
-        </p:spPr>
-      </p:sp>
-      <p:sp>
-        <p:nvSpPr>
-          <p:cNvPr id="19" name="Text 17"/>
-          <p:cNvSpPr/>
-          <p:nvPr/>
-        </p:nvSpPr>
-        <p:spPr>
-          <a:xfrm>
-            <a:off x="868680" y="3063240"/>
-            <a:ext cx="320040" cy="438912"/>
-          </a:xfrm>
-          <a:prstGeom prst="rect">
-            <a:avLst/>
-          </a:prstGeom>
-          <a:noFill/>
-          <a:ln/>
-        </p:spPr>
-        <p:txBody>
-          <a:bodyPr wrap="square" rtlCol="0" anchor="ctr"/>
-          <a:lstStyle/>
-          <a:p>
-            <a:pPr indent="0" marL="0">
-              <a:buNone/>
-            </a:pPr>
-            <a:r>
-              <a:rPr lang="en-US" sz="1400" dirty="0">
-                <a:solidFill>
-                  <a:srgbClr val="2A9D8F"/>
-                </a:solidFill>
-              </a:rPr>
-              <a:t>☐</a:t>
-            </a:r>
-            <a:endParaRPr lang="en-US" sz="1400" dirty="0"/>
-          </a:p>
-        </p:txBody>
-      </p:sp>
-      <p:sp>
-        <p:nvSpPr>
-          <p:cNvPr id="20" name="Text 18"/>
-          <p:cNvSpPr/>
-          <p:nvPr/>
-        </p:nvSpPr>
-        <p:spPr>
-          <a:xfrm>
-            <a:off x="1234440" y="3063240"/>
-            <a:ext cx="6949440" cy="438912"/>
-          </a:xfrm>
-          <a:prstGeom prst="rect">
-            <a:avLst/>
-          </a:prstGeom>
-          <a:noFill/>
-          <a:ln/>
-        </p:spPr>
-        <p:txBody>
-          <a:bodyPr wrap="square" rtlCol="0" anchor="ctr"/>
-          <a:lstStyle/>
-          <a:p>
-            <a:pPr indent="0" marL="0">
-              <a:buNone/>
-            </a:pPr>
-            <a:r>
-              <a:rPr lang="en-US" sz="1300" dirty="0">
-                <a:solidFill>
-                  <a:srgbClr val="3D3A36"/>
-                </a:solidFill>
-                <a:latin typeface="Calibri" pitchFamily="34" charset="0"/>
-                <a:ea typeface="Calibri" pitchFamily="34" charset="-122"/>
-                <a:cs typeface="Calibri" pitchFamily="34" charset="-120"/>
-              </a:rPr>
-              <a:t>I always simplify my final answer</a:t>
-            </a:r>
-            <a:endParaRPr lang="en-US" sz="1300" dirty="0"/>
-          </a:p>
-        </p:txBody>
-      </p:sp>
-      <p:sp>
-        <p:nvSpPr>
-          <p:cNvPr id="21" name="Shape 19"/>
-          <p:cNvSpPr/>
-          <p:nvPr/>
-        </p:nvSpPr>
-        <p:spPr>
-          <a:xfrm>
-            <a:off x="731520" y="3749040"/>
-            <a:ext cx="7680960" cy="594360"/>
-          </a:xfrm>
-          <a:prstGeom prst="rect">
-            <a:avLst/>
-          </a:prstGeom>
-          <a:solidFill>
-            <a:srgbClr val="E8F5F3"/>
-          </a:solidFill>
-          <a:ln/>
-          <a:effectLst>
-            <a:outerShdw sx="100000" sy="100000" kx="0" ky="0" algn="bl" rotWithShape="0" blurRad="50800" dist="25400" dir="8100000">
-              <a:srgbClr val="000000">
-                <a:alpha val="10000"/>
-              </a:srgbClr>
-            </a:outerShdw>
-          </a:effectLst>
-        </p:spPr>
-      </p:sp>
-      <p:sp>
-        <p:nvSpPr>
-          <p:cNvPr id="22" name="Text 20"/>
-          <p:cNvSpPr/>
-          <p:nvPr/>
-        </p:nvSpPr>
-        <p:spPr>
-          <a:xfrm>
-            <a:off x="914400" y="3749040"/>
-            <a:ext cx="7315200" cy="594360"/>
-          </a:xfrm>
-          <a:prstGeom prst="rect">
-            <a:avLst/>
-          </a:prstGeom>
-          <a:noFill/>
-          <a:ln/>
-        </p:spPr>
-        <p:txBody>
-          <a:bodyPr wrap="square" rtlCol="0" anchor="ctr"/>
-          <a:lstStyle/>
-          <a:p>
-            <a:pPr indent="0" marL="0">
-              <a:buNone/>
-            </a:pPr>
-            <a:r>
-              <a:rPr lang="en-US" sz="1200" b="1" dirty="0">
-                <a:solidFill>
-                  <a:srgbClr val="2A9D8F"/>
-                </a:solidFill>
-                <a:latin typeface="Calibri" pitchFamily="34" charset="0"/>
-                <a:ea typeface="Calibri" pitchFamily="34" charset="-122"/>
-                <a:cs typeface="Calibri" pitchFamily="34" charset="-120"/>
-              </a:rPr>
-              <a:t>Key Idea: </a:t>
-            </a:r>
-            <a:pPr indent="0" marL="0">
-              <a:buNone/>
-            </a:pPr>
-            <a:r>
-              <a:rPr lang="en-US" sz="1200" i="1" dirty="0">
-                <a:solidFill>
-                  <a:srgbClr val="3D3A36"/>
-                </a:solidFill>
-                <a:latin typeface="Calibri" pitchFamily="34" charset="0"/>
-                <a:ea typeface="Calibri" pitchFamily="34" charset="-122"/>
-                <a:cs typeface="Calibri" pitchFamily="34" charset="-120"/>
-              </a:rPr>
-              <a:t>Never add denominators — only add numerators after making denominators the same.</a:t>
-            </a:r>
-            <a:endParaRPr lang="en-US" sz="1200" dirty="0"/>
           </a:p>
         </p:txBody>
       </p:sp>
@@ -4289,6 +3345,13 @@
 <file path=ppt/slides/slide7.xml><?xml version="1.0" encoding="utf-8"?>
 <p:sld xmlns:a="http://schemas.openxmlformats.org/drawingml/2006/main" xmlns:r="http://schemas.openxmlformats.org/officeDocument/2006/relationships" xmlns:p="http://schemas.openxmlformats.org/presentationml/2006/main">
   <p:cSld name="Slide 7">
+    <p:bg>
+      <p:bgPr>
+        <a:solidFill>
+          <a:srgbClr val="111D35"/>
+        </a:solidFill>
+      </p:bgPr>
+    </p:bg>
     <p:spTree>
       <p:nvGrpSpPr>
         <p:cNvPr id="1" name=""/>
@@ -4305,76 +3368,14 @@
       </p:grpSpPr>
       <p:sp>
         <p:nvSpPr>
-          <p:cNvPr id="2" name="Shape 0"/>
-          <p:cNvSpPr/>
-          <p:nvPr/>
-        </p:nvSpPr>
-        <p:spPr>
-          <a:xfrm>
-            <a:off x="0" y="0"/>
-            <a:ext cx="9144000" cy="5143500"/>
-          </a:xfrm>
-          <a:prstGeom prst="rect">
-            <a:avLst/>
-          </a:prstGeom>
-          <a:solidFill>
-            <a:srgbClr val="1B2A4A"/>
-          </a:solidFill>
-          <a:ln/>
-        </p:spPr>
-      </p:sp>
-      <p:sp>
-        <p:nvSpPr>
-          <p:cNvPr id="3" name="Shape 1"/>
-          <p:cNvSpPr/>
-          <p:nvPr/>
-        </p:nvSpPr>
-        <p:spPr>
-          <a:xfrm>
-            <a:off x="0" y="4777740"/>
-            <a:ext cx="9144000" cy="365760"/>
-          </a:xfrm>
-          <a:prstGeom prst="rect">
-            <a:avLst/>
-          </a:prstGeom>
-          <a:solidFill>
-            <a:srgbClr val="2A9D8F"/>
-          </a:solidFill>
-          <a:ln/>
-        </p:spPr>
-      </p:sp>
-      <p:sp>
-        <p:nvSpPr>
-          <p:cNvPr id="4" name="Shape 2"/>
-          <p:cNvSpPr/>
-          <p:nvPr/>
-        </p:nvSpPr>
-        <p:spPr>
-          <a:xfrm>
-            <a:off x="-914400" y="-914400"/>
-            <a:ext cx="3657600" cy="3657600"/>
-          </a:xfrm>
-          <a:prstGeom prst="ellipse">
-            <a:avLst/>
-          </a:prstGeom>
-          <a:solidFill>
-            <a:srgbClr val="2A9D8F">
-              <a:alpha val="10000"/>
-            </a:srgbClr>
-          </a:solidFill>
-          <a:ln/>
-        </p:spPr>
-      </p:sp>
-      <p:sp>
-        <p:nvSpPr>
-          <p:cNvPr id="5" name="Text 3"/>
-          <p:cNvSpPr/>
-          <p:nvPr/>
-        </p:nvSpPr>
-        <p:spPr>
-          <a:xfrm>
-            <a:off x="731520" y="1463040"/>
-            <a:ext cx="7680960" cy="822960"/>
+          <p:cNvPr id="2" name="Text 0"/>
+          <p:cNvSpPr/>
+          <p:nvPr/>
+        </p:nvSpPr>
+        <p:spPr>
+          <a:xfrm>
+            <a:off x="731520" y="1371600"/>
+            <a:ext cx="9144000" cy="914400"/>
           </a:xfrm>
           <a:prstGeom prst="rect">
             <a:avLst/>
@@ -4386,11 +3387,11 @@
           <a:bodyPr wrap="square" rtlCol="0" anchor="ctr"/>
           <a:lstStyle/>
           <a:p>
-            <a:pPr algn="ctr" indent="0" marL="0">
+            <a:pPr indent="0" marL="0">
               <a:buNone/>
             </a:pPr>
             <a:r>
-              <a:rPr lang="en-US" sz="3400" b="1" dirty="0">
+              <a:rPr lang="en-US" sz="3200" b="1" dirty="0">
                 <a:solidFill>
                   <a:srgbClr val="FFFFFF"/>
                 </a:solidFill>
@@ -4400,20 +3401,20 @@
               </a:rPr>
               <a:t>Review &amp; Practise</a:t>
             </a:r>
-            <a:endParaRPr lang="en-US" sz="3400" dirty="0"/>
-          </a:p>
-        </p:txBody>
-      </p:sp>
-      <p:sp>
-        <p:nvSpPr>
-          <p:cNvPr id="6" name="Text 4"/>
-          <p:cNvSpPr/>
-          <p:nvPr/>
-        </p:nvSpPr>
-        <p:spPr>
-          <a:xfrm>
-            <a:off x="731520" y="2468880"/>
-            <a:ext cx="7680960" cy="457200"/>
+            <a:endParaRPr lang="en-US" sz="3200" dirty="0"/>
+          </a:p>
+        </p:txBody>
+      </p:sp>
+      <p:sp>
+        <p:nvSpPr>
+          <p:cNvPr id="3" name="Text 1"/>
+          <p:cNvSpPr/>
+          <p:nvPr/>
+        </p:nvSpPr>
+        <p:spPr>
+          <a:xfrm>
+            <a:off x="731520" y="2377440"/>
+            <a:ext cx="7315200" cy="548640"/>
           </a:xfrm>
           <a:prstGeom prst="rect">
             <a:avLst/>
@@ -4425,60 +3426,62 @@
           <a:bodyPr wrap="square" rtlCol="0" anchor="ctr"/>
           <a:lstStyle/>
           <a:p>
-            <a:pPr algn="ctr" indent="0" marL="0">
+            <a:pPr indent="0" marL="0">
               <a:buNone/>
             </a:pPr>
             <a:r>
-              <a:rPr lang="en-US" sz="1800" dirty="0">
-                <a:solidFill>
-                  <a:srgbClr val="2A9D8F"/>
-                </a:solidFill>
-                <a:latin typeface="Calibri" pitchFamily="34" charset="0"/>
-                <a:ea typeface="Calibri" pitchFamily="34" charset="-122"/>
-                <a:cs typeface="Calibri" pitchFamily="34" charset="-120"/>
+              <a:rPr lang="en-US" sz="1500" dirty="0">
+                <a:solidFill>
+                  <a:srgbClr val="FFFFFF">
+                    <a:alpha val="60000"/>
+                  </a:srgbClr>
+                </a:solidFill>
+                <a:latin typeface="Arial" pitchFamily="34" charset="0"/>
+                <a:ea typeface="Arial" pitchFamily="34" charset="-122"/>
+                <a:cs typeface="Arial" pitchFamily="34" charset="-120"/>
+              </a:rPr>
+              <a:t>Use the Self-Quiz, Review Games, and Practice Builder to test yourself.</a:t>
+            </a:r>
+            <a:endParaRPr lang="en-US" sz="1500" dirty="0"/>
+          </a:p>
+        </p:txBody>
+      </p:sp>
+      <p:sp>
+        <p:nvSpPr>
+          <p:cNvPr id="4" name="Text 2"/>
+          <p:cNvSpPr/>
+          <p:nvPr/>
+        </p:nvSpPr>
+        <p:spPr>
+          <a:xfrm>
+            <a:off x="731520" y="3291840"/>
+            <a:ext cx="3657600" cy="457200"/>
+          </a:xfrm>
+          <a:prstGeom prst="rect">
+            <a:avLst/>
+          </a:prstGeom>
+          <a:noFill/>
+          <a:ln/>
+        </p:spPr>
+        <p:txBody>
+          <a:bodyPr wrap="square" rtlCol="0" anchor="ctr"/>
+          <a:lstStyle/>
+          <a:p>
+            <a:pPr indent="0" marL="0">
+              <a:buNone/>
+            </a:pPr>
+            <a:r>
+              <a:rPr lang="en-US" sz="1800" b="1" dirty="0">
+                <a:solidFill>
+                  <a:srgbClr val="E9C46A"/>
+                </a:solidFill>
+                <a:latin typeface="Georgia" pitchFamily="34" charset="0"/>
+                <a:ea typeface="Georgia" pitchFamily="34" charset="-122"/>
+                <a:cs typeface="Georgia" pitchFamily="34" charset="-120"/>
               </a:rPr>
               <a:t>mrzocchi.com</a:t>
             </a:r>
             <a:endParaRPr lang="en-US" sz="1800" dirty="0"/>
-          </a:p>
-        </p:txBody>
-      </p:sp>
-      <p:sp>
-        <p:nvSpPr>
-          <p:cNvPr id="7" name="Text 5"/>
-          <p:cNvSpPr/>
-          <p:nvPr/>
-        </p:nvSpPr>
-        <p:spPr>
-          <a:xfrm>
-            <a:off x="731520" y="3108960"/>
-            <a:ext cx="7680960" cy="457200"/>
-          </a:xfrm>
-          <a:prstGeom prst="rect">
-            <a:avLst/>
-          </a:prstGeom>
-          <a:noFill/>
-          <a:ln/>
-        </p:spPr>
-        <p:txBody>
-          <a:bodyPr wrap="square" rtlCol="0" anchor="ctr"/>
-          <a:lstStyle/>
-          <a:p>
-            <a:pPr algn="ctr" indent="0" marL="0">
-              <a:buNone/>
-            </a:pPr>
-            <a:r>
-              <a:rPr lang="en-US" sz="1300" dirty="0">
-                <a:solidFill>
-                  <a:srgbClr val="9B9690"/>
-                </a:solidFill>
-                <a:latin typeface="Calibri" pitchFamily="34" charset="0"/>
-                <a:ea typeface="Calibri" pitchFamily="34" charset="-122"/>
-                <a:cs typeface="Calibri" pitchFamily="34" charset="-120"/>
-              </a:rPr>
-              <a:t>Use the Self-Quiz, Review Games, and Practice Builder to test yourself.</a:t>
-            </a:r>
-            <a:endParaRPr lang="en-US" sz="1300" dirty="0"/>
           </a:p>
         </p:txBody>
       </p:sp>
